--- a/Streams and Batch processing in Spring Integration.pptx
+++ b/Streams and Batch processing in Spring Integration.pptx
@@ -20,43 +20,47 @@
     <p:sldId id="304" r:id="rId14"/>
     <p:sldId id="305" r:id="rId15"/>
     <p:sldId id="306" r:id="rId16"/>
-    <p:sldId id="307" r:id="rId17"/>
-    <p:sldId id="303" r:id="rId18"/>
-    <p:sldId id="270" r:id="rId19"/>
-    <p:sldId id="271" r:id="rId20"/>
-    <p:sldId id="272" r:id="rId21"/>
-    <p:sldId id="273" r:id="rId22"/>
-    <p:sldId id="274" r:id="rId23"/>
-    <p:sldId id="275" r:id="rId24"/>
-    <p:sldId id="276" r:id="rId25"/>
-    <p:sldId id="277" r:id="rId26"/>
-    <p:sldId id="278" r:id="rId27"/>
-    <p:sldId id="279" r:id="rId28"/>
-    <p:sldId id="280" r:id="rId29"/>
-    <p:sldId id="281" r:id="rId30"/>
-    <p:sldId id="282" r:id="rId31"/>
-    <p:sldId id="283" r:id="rId32"/>
-    <p:sldId id="284" r:id="rId33"/>
-    <p:sldId id="285" r:id="rId34"/>
-    <p:sldId id="286" r:id="rId35"/>
-    <p:sldId id="287" r:id="rId36"/>
-    <p:sldId id="288" r:id="rId37"/>
-    <p:sldId id="289" r:id="rId38"/>
-    <p:sldId id="290" r:id="rId39"/>
-    <p:sldId id="291" r:id="rId40"/>
-    <p:sldId id="292" r:id="rId41"/>
-    <p:sldId id="293" r:id="rId42"/>
-    <p:sldId id="294" r:id="rId43"/>
-    <p:sldId id="295" r:id="rId44"/>
-    <p:sldId id="296" r:id="rId45"/>
-    <p:sldId id="297" r:id="rId46"/>
-    <p:sldId id="298" r:id="rId47"/>
-    <p:sldId id="299" r:id="rId48"/>
-    <p:sldId id="300" r:id="rId49"/>
-    <p:sldId id="301" r:id="rId50"/>
-    <p:sldId id="302" r:id="rId51"/>
-    <p:sldId id="262" r:id="rId52"/>
-    <p:sldId id="263" r:id="rId53"/>
+    <p:sldId id="303" r:id="rId17"/>
+    <p:sldId id="270" r:id="rId18"/>
+    <p:sldId id="271" r:id="rId19"/>
+    <p:sldId id="272" r:id="rId20"/>
+    <p:sldId id="310" r:id="rId21"/>
+    <p:sldId id="311" r:id="rId22"/>
+    <p:sldId id="307" r:id="rId23"/>
+    <p:sldId id="308" r:id="rId24"/>
+    <p:sldId id="273" r:id="rId25"/>
+    <p:sldId id="274" r:id="rId26"/>
+    <p:sldId id="275" r:id="rId27"/>
+    <p:sldId id="276" r:id="rId28"/>
+    <p:sldId id="309" r:id="rId29"/>
+    <p:sldId id="277" r:id="rId30"/>
+    <p:sldId id="278" r:id="rId31"/>
+    <p:sldId id="279" r:id="rId32"/>
+    <p:sldId id="280" r:id="rId33"/>
+    <p:sldId id="281" r:id="rId34"/>
+    <p:sldId id="282" r:id="rId35"/>
+    <p:sldId id="283" r:id="rId36"/>
+    <p:sldId id="284" r:id="rId37"/>
+    <p:sldId id="285" r:id="rId38"/>
+    <p:sldId id="286" r:id="rId39"/>
+    <p:sldId id="287" r:id="rId40"/>
+    <p:sldId id="288" r:id="rId41"/>
+    <p:sldId id="289" r:id="rId42"/>
+    <p:sldId id="290" r:id="rId43"/>
+    <p:sldId id="291" r:id="rId44"/>
+    <p:sldId id="292" r:id="rId45"/>
+    <p:sldId id="293" r:id="rId46"/>
+    <p:sldId id="294" r:id="rId47"/>
+    <p:sldId id="295" r:id="rId48"/>
+    <p:sldId id="296" r:id="rId49"/>
+    <p:sldId id="297" r:id="rId50"/>
+    <p:sldId id="298" r:id="rId51"/>
+    <p:sldId id="299" r:id="rId52"/>
+    <p:sldId id="300" r:id="rId53"/>
+    <p:sldId id="301" r:id="rId54"/>
+    <p:sldId id="302" r:id="rId55"/>
+    <p:sldId id="262" r:id="rId56"/>
+    <p:sldId id="263" r:id="rId57"/>
   </p:sldIdLst>
   <p:sldSz cx="12192000" cy="6858000"/>
   <p:notesSz cx="6858000" cy="9144000"/>
@@ -155,6 +159,11 @@
       </a:defRPr>
     </a:lvl9pPr>
   </p:defaultTextStyle>
+  <p:extLst>
+    <p:ext uri="{EFAFB233-063F-42B5-8137-9DF3F51BA10A}">
+      <p15:sldGuideLst xmlns:p15="http://schemas.microsoft.com/office/powerpoint/2012/main"/>
+    </p:ext>
+  </p:extLst>
 </p:presentation>
 </file>
 
@@ -493,7 +502,7 @@
           <a:p>
             <a:fld id="{7B1B23F7-5DCE-49D8-9317-A5F9C3452F81}" type="datetimeFigureOut">
               <a:rPr lang="en-IN" smtClean="0"/>
-              <a:t>26-03-2026</a:t>
+              <a:t>27-03-2026</a:t>
             </a:fld>
             <a:endParaRPr lang="en-IN"/>
           </a:p>
@@ -1581,7 +1590,7 @@
           <a:p>
             <a:fld id="{7B1B23F7-5DCE-49D8-9317-A5F9C3452F81}" type="datetimeFigureOut">
               <a:rPr lang="en-IN" smtClean="0"/>
-              <a:t>26-03-2026</a:t>
+              <a:t>27-03-2026</a:t>
             </a:fld>
             <a:endParaRPr lang="en-IN"/>
           </a:p>
@@ -2561,7 +2570,7 @@
           <a:p>
             <a:fld id="{7B1B23F7-5DCE-49D8-9317-A5F9C3452F81}" type="datetimeFigureOut">
               <a:rPr lang="en-IN" smtClean="0"/>
-              <a:t>26-03-2026</a:t>
+              <a:t>27-03-2026</a:t>
             </a:fld>
             <a:endParaRPr lang="en-IN"/>
           </a:p>
@@ -3695,7 +3704,7 @@
           <a:p>
             <a:fld id="{7B1B23F7-5DCE-49D8-9317-A5F9C3452F81}" type="datetimeFigureOut">
               <a:rPr lang="en-IN" smtClean="0"/>
-              <a:t>26-03-2026</a:t>
+              <a:t>27-03-2026</a:t>
             </a:fld>
             <a:endParaRPr lang="en-IN"/>
           </a:p>
@@ -4728,7 +4737,7 @@
           <a:p>
             <a:fld id="{7B1B23F7-5DCE-49D8-9317-A5F9C3452F81}" type="datetimeFigureOut">
               <a:rPr lang="en-IN" smtClean="0"/>
-              <a:t>26-03-2026</a:t>
+              <a:t>27-03-2026</a:t>
             </a:fld>
             <a:endParaRPr lang="en-IN"/>
           </a:p>
@@ -5388,7 +5397,7 @@
           <a:p>
             <a:fld id="{7B1B23F7-5DCE-49D8-9317-A5F9C3452F81}" type="datetimeFigureOut">
               <a:rPr lang="en-IN" smtClean="0"/>
-              <a:t>26-03-2026</a:t>
+              <a:t>27-03-2026</a:t>
             </a:fld>
             <a:endParaRPr lang="en-IN"/>
           </a:p>
@@ -6249,7 +6258,7 @@
           <a:p>
             <a:fld id="{7B1B23F7-5DCE-49D8-9317-A5F9C3452F81}" type="datetimeFigureOut">
               <a:rPr lang="en-IN" smtClean="0"/>
-              <a:t>26-03-2026</a:t>
+              <a:t>27-03-2026</a:t>
             </a:fld>
             <a:endParaRPr lang="en-IN"/>
           </a:p>
@@ -6439,7 +6448,7 @@
           <a:p>
             <a:fld id="{7B1B23F7-5DCE-49D8-9317-A5F9C3452F81}" type="datetimeFigureOut">
               <a:rPr lang="en-IN" smtClean="0"/>
-              <a:t>26-03-2026</a:t>
+              <a:t>27-03-2026</a:t>
             </a:fld>
             <a:endParaRPr lang="en-IN"/>
           </a:p>
@@ -7411,7 +7420,7 @@
           <a:p>
             <a:fld id="{7B1B23F7-5DCE-49D8-9317-A5F9C3452F81}" type="datetimeFigureOut">
               <a:rPr lang="en-IN" smtClean="0"/>
-              <a:t>26-03-2026</a:t>
+              <a:t>27-03-2026</a:t>
             </a:fld>
             <a:endParaRPr lang="en-IN"/>
           </a:p>
@@ -7622,7 +7631,7 @@
           <a:p>
             <a:fld id="{7B1B23F7-5DCE-49D8-9317-A5F9C3452F81}" type="datetimeFigureOut">
               <a:rPr lang="en-IN" smtClean="0"/>
-              <a:t>26-03-2026</a:t>
+              <a:t>27-03-2026</a:t>
             </a:fld>
             <a:endParaRPr lang="en-IN"/>
           </a:p>
@@ -8656,7 +8665,7 @@
           <a:p>
             <a:fld id="{7B1B23F7-5DCE-49D8-9317-A5F9C3452F81}" type="datetimeFigureOut">
               <a:rPr lang="en-IN" smtClean="0"/>
-              <a:t>26-03-2026</a:t>
+              <a:t>27-03-2026</a:t>
             </a:fld>
             <a:endParaRPr lang="en-IN"/>
           </a:p>
@@ -8928,7 +8937,7 @@
           <a:p>
             <a:fld id="{7B1B23F7-5DCE-49D8-9317-A5F9C3452F81}" type="datetimeFigureOut">
               <a:rPr lang="en-IN" smtClean="0"/>
-              <a:t>26-03-2026</a:t>
+              <a:t>27-03-2026</a:t>
             </a:fld>
             <a:endParaRPr lang="en-IN"/>
           </a:p>
@@ -9338,7 +9347,7 @@
           <a:p>
             <a:fld id="{7B1B23F7-5DCE-49D8-9317-A5F9C3452F81}" type="datetimeFigureOut">
               <a:rPr lang="en-IN" smtClean="0"/>
-              <a:t>26-03-2026</a:t>
+              <a:t>27-03-2026</a:t>
             </a:fld>
             <a:endParaRPr lang="en-IN"/>
           </a:p>
@@ -9465,7 +9474,7 @@
           <a:p>
             <a:fld id="{7B1B23F7-5DCE-49D8-9317-A5F9C3452F81}" type="datetimeFigureOut">
               <a:rPr lang="en-IN" smtClean="0"/>
-              <a:t>26-03-2026</a:t>
+              <a:t>27-03-2026</a:t>
             </a:fld>
             <a:endParaRPr lang="en-IN"/>
           </a:p>
@@ -9560,7 +9569,7 @@
           <a:p>
             <a:fld id="{7B1B23F7-5DCE-49D8-9317-A5F9C3452F81}" type="datetimeFigureOut">
               <a:rPr lang="en-IN" smtClean="0"/>
-              <a:t>26-03-2026</a:t>
+              <a:t>27-03-2026</a:t>
             </a:fld>
             <a:endParaRPr lang="en-IN"/>
           </a:p>
@@ -10641,7 +10650,7 @@
           <a:p>
             <a:fld id="{7B1B23F7-5DCE-49D8-9317-A5F9C3452F81}" type="datetimeFigureOut">
               <a:rPr lang="en-IN" smtClean="0"/>
-              <a:t>26-03-2026</a:t>
+              <a:t>27-03-2026</a:t>
             </a:fld>
             <a:endParaRPr lang="en-IN"/>
           </a:p>
@@ -11749,7 +11758,7 @@
           <a:p>
             <a:fld id="{7B1B23F7-5DCE-49D8-9317-A5F9C3452F81}" type="datetimeFigureOut">
               <a:rPr lang="en-IN" smtClean="0"/>
-              <a:t>26-03-2026</a:t>
+              <a:t>27-03-2026</a:t>
             </a:fld>
             <a:endParaRPr lang="en-IN"/>
           </a:p>
@@ -12746,7 +12755,7 @@
           <a:p>
             <a:fld id="{7B1B23F7-5DCE-49D8-9317-A5F9C3452F81}" type="datetimeFigureOut">
               <a:rPr lang="en-IN" smtClean="0"/>
-              <a:t>26-03-2026</a:t>
+              <a:t>27-03-2026</a:t>
             </a:fld>
             <a:endParaRPr lang="en-IN"/>
           </a:p>
@@ -14566,36 +14575,6 @@
           <a:chExt cx="0" cy="0"/>
         </a:xfrm>
       </p:grpSpPr>
-    </p:spTree>
-    <p:extLst>
-      <p:ext uri="{BB962C8B-B14F-4D97-AF65-F5344CB8AC3E}">
-        <p14:creationId xmlns:p14="http://schemas.microsoft.com/office/powerpoint/2010/main" val="297999778"/>
-      </p:ext>
-    </p:extLst>
-  </p:cSld>
-  <p:clrMapOvr>
-    <a:masterClrMapping/>
-  </p:clrMapOvr>
-</p:sld>
-</file>
-
-<file path=ppt/slides/slide17.xml><?xml version="1.0" encoding="utf-8"?>
-<p:sld xmlns:a="http://schemas.openxmlformats.org/drawingml/2006/main" xmlns:r="http://schemas.openxmlformats.org/officeDocument/2006/relationships" xmlns:p="http://schemas.openxmlformats.org/presentationml/2006/main">
-  <p:cSld>
-    <p:spTree>
-      <p:nvGrpSpPr>
-        <p:cNvPr id="1" name=""/>
-        <p:cNvGrpSpPr/>
-        <p:nvPr/>
-      </p:nvGrpSpPr>
-      <p:grpSpPr>
-        <a:xfrm>
-          <a:off x="0" y="0"/>
-          <a:ext cx="0" cy="0"/>
-          <a:chOff x="0" y="0"/>
-          <a:chExt cx="0" cy="0"/>
-        </a:xfrm>
-      </p:grpSpPr>
       <p:sp>
         <p:nvSpPr>
           <p:cNvPr id="4" name="Title 3">
@@ -14663,7 +14642,7 @@
 </p:sld>
 </file>
 
-<file path=ppt/slides/slide18.xml><?xml version="1.0" encoding="utf-8"?>
+<file path=ppt/slides/slide17.xml><?xml version="1.0" encoding="utf-8"?>
 <p:sld xmlns:a="http://schemas.openxmlformats.org/drawingml/2006/main" xmlns:r="http://schemas.openxmlformats.org/officeDocument/2006/relationships" xmlns:p="http://schemas.openxmlformats.org/presentationml/2006/main">
   <p:cSld>
     <p:spTree>
@@ -14975,7 +14954,7 @@
 </p:sld>
 </file>
 
-<file path=ppt/slides/slide19.xml><?xml version="1.0" encoding="utf-8"?>
+<file path=ppt/slides/slide18.xml><?xml version="1.0" encoding="utf-8"?>
 <p:sld xmlns:a="http://schemas.openxmlformats.org/drawingml/2006/main" xmlns:r="http://schemas.openxmlformats.org/officeDocument/2006/relationships" xmlns:p="http://schemas.openxmlformats.org/presentationml/2006/main">
   <p:cSld>
     <p:spTree>
@@ -15019,7 +14998,11 @@
           <a:bodyPr/>
           <a:lstStyle/>
           <a:p>
-            <a:endParaRPr lang="en-IN"/>
+            <a:r>
+              <a:rPr lang="en-US" b="1" dirty="0"/>
+              <a:t>Why combine them?</a:t>
+            </a:r>
+            <a:endParaRPr lang="en-IN" dirty="0"/>
           </a:p>
         </p:txBody>
       </p:sp>
@@ -15049,6 +15032,36 @@
           <a:bodyPr/>
           <a:lstStyle/>
           <a:p>
+            <a:r>
+              <a:rPr lang="en-US" b="1" dirty="0"/>
+              <a:t>Spring Batch:</a:t>
+            </a:r>
+            <a:r>
+              <a:rPr lang="en-US" dirty="0"/>
+              <a:t> Optimized for processing millions of records using a "Read-Process-Write" strategy. It handles transactions, restarts, and skipping errors.</a:t>
+            </a:r>
+          </a:p>
+          <a:p>
+            <a:r>
+              <a:rPr lang="en-US" b="1" dirty="0"/>
+              <a:t>Spring Integration:</a:t>
+            </a:r>
+            <a:r>
+              <a:rPr lang="en-US" dirty="0"/>
+              <a:t> Optimized for connecting systems using "Messages" and "Channels." It follows Enterprise Integration Patterns (EIP).</a:t>
+            </a:r>
+          </a:p>
+          <a:p>
+            <a:r>
+              <a:rPr lang="en-US" b="1" dirty="0"/>
+              <a:t>The Synergy:</a:t>
+            </a:r>
+            <a:r>
+              <a:rPr lang="en-US" dirty="0"/>
+              <a:t> Spring Integration acts as the "trigger" or the "orchestrator," while Spring Batch acts as the "heavy lifter."</a:t>
+            </a:r>
+          </a:p>
+          <a:p>
             <a:endParaRPr lang="en-IN" dirty="0"/>
           </a:p>
         </p:txBody>
@@ -15057,6 +15070,180 @@
     <p:extLst>
       <p:ext uri="{BB962C8B-B14F-4D97-AF65-F5344CB8AC3E}">
         <p14:creationId xmlns:p14="http://schemas.microsoft.com/office/powerpoint/2010/main" val="1987127572"/>
+      </p:ext>
+    </p:extLst>
+  </p:cSld>
+  <p:clrMapOvr>
+    <a:masterClrMapping/>
+  </p:clrMapOvr>
+</p:sld>
+</file>
+
+<file path=ppt/slides/slide19.xml><?xml version="1.0" encoding="utf-8"?>
+<p:sld xmlns:a="http://schemas.openxmlformats.org/drawingml/2006/main" xmlns:r="http://schemas.openxmlformats.org/officeDocument/2006/relationships" xmlns:p="http://schemas.openxmlformats.org/presentationml/2006/main">
+  <p:cSld>
+    <p:spTree>
+      <p:nvGrpSpPr>
+        <p:cNvPr id="1" name="">
+          <a:extLst>
+            <a:ext uri="{FF2B5EF4-FFF2-40B4-BE49-F238E27FC236}">
+              <a16:creationId xmlns:a16="http://schemas.microsoft.com/office/drawing/2014/main" id="{173333F0-956A-31FB-837E-E3520B349018}"/>
+            </a:ext>
+          </a:extLst>
+        </p:cNvPr>
+        <p:cNvGrpSpPr/>
+        <p:nvPr/>
+      </p:nvGrpSpPr>
+      <p:grpSpPr>
+        <a:xfrm>
+          <a:off x="0" y="0"/>
+          <a:ext cx="0" cy="0"/>
+          <a:chOff x="0" y="0"/>
+          <a:chExt cx="0" cy="0"/>
+        </a:xfrm>
+      </p:grpSpPr>
+      <p:sp>
+        <p:nvSpPr>
+          <p:cNvPr id="2" name="Title 1">
+            <a:extLst>
+              <a:ext uri="{FF2B5EF4-FFF2-40B4-BE49-F238E27FC236}">
+                <a16:creationId xmlns:a16="http://schemas.microsoft.com/office/drawing/2014/main" id="{DD768DC4-65B4-C857-1FCD-AFC427EAD7A3}"/>
+              </a:ext>
+            </a:extLst>
+          </p:cNvPr>
+          <p:cNvSpPr>
+            <a:spLocks noGrp="1"/>
+          </p:cNvSpPr>
+          <p:nvPr>
+            <p:ph type="title"/>
+          </p:nvPr>
+        </p:nvSpPr>
+        <p:spPr/>
+        <p:txBody>
+          <a:bodyPr/>
+          <a:lstStyle/>
+          <a:p>
+            <a:r>
+              <a:rPr lang="en-US" b="1" dirty="0"/>
+              <a:t>Launching a Job via Messaging</a:t>
+            </a:r>
+            <a:endParaRPr lang="en-IN" dirty="0"/>
+          </a:p>
+        </p:txBody>
+      </p:sp>
+      <p:sp>
+        <p:nvSpPr>
+          <p:cNvPr id="3" name="Content Placeholder 2">
+            <a:extLst>
+              <a:ext uri="{FF2B5EF4-FFF2-40B4-BE49-F238E27FC236}">
+                <a16:creationId xmlns:a16="http://schemas.microsoft.com/office/drawing/2014/main" id="{D8670B5B-1EB1-7FFE-BAA2-0DF70B425BC2}"/>
+              </a:ext>
+            </a:extLst>
+          </p:cNvPr>
+          <p:cNvSpPr>
+            <a:spLocks noGrp="1"/>
+          </p:cNvSpPr>
+          <p:nvPr>
+            <p:ph idx="1"/>
+          </p:nvPr>
+        </p:nvSpPr>
+        <p:spPr>
+          <a:xfrm>
+            <a:off x="1154954" y="2603499"/>
+            <a:ext cx="10497534" cy="3948885"/>
+          </a:xfrm>
+        </p:spPr>
+        <p:txBody>
+          <a:bodyPr/>
+          <a:lstStyle/>
+          <a:p>
+            <a:r>
+              <a:rPr lang="en-US" dirty="0"/>
+              <a:t>Most common use case is starting a Batch Job automatically when a message arrives.</a:t>
+            </a:r>
+          </a:p>
+          <a:p>
+            <a:pPr marL="0" indent="0">
+              <a:buNone/>
+            </a:pPr>
+            <a:r>
+              <a:rPr lang="en-US" b="1" dirty="0">
+                <a:solidFill>
+                  <a:srgbClr val="FF0000"/>
+                </a:solidFill>
+              </a:rPr>
+              <a:t>Key Component: </a:t>
+            </a:r>
+            <a:r>
+              <a:rPr lang="en-US" b="1" dirty="0" err="1">
+                <a:solidFill>
+                  <a:srgbClr val="FF0000"/>
+                </a:solidFill>
+              </a:rPr>
+              <a:t>JobLaunchingMessageHandler</a:t>
+            </a:r>
+            <a:endParaRPr lang="en-US" b="1" dirty="0">
+              <a:solidFill>
+                <a:srgbClr val="FF0000"/>
+              </a:solidFill>
+            </a:endParaRPr>
+          </a:p>
+          <a:p>
+            <a:r>
+              <a:rPr lang="en-US" dirty="0"/>
+              <a:t>This component listens to a Spring Integration </a:t>
+            </a:r>
+            <a:r>
+              <a:rPr lang="en-US" dirty="0" err="1"/>
+              <a:t>MessageChannel</a:t>
+            </a:r>
+            <a:r>
+              <a:rPr lang="en-US" dirty="0"/>
+              <a:t> and converts a </a:t>
+            </a:r>
+            <a:r>
+              <a:rPr lang="en-US" dirty="0" err="1"/>
+              <a:t>JobLaunchRequest</a:t>
+            </a:r>
+            <a:r>
+              <a:rPr lang="en-US" dirty="0"/>
+              <a:t> into a running Job.</a:t>
+            </a:r>
+          </a:p>
+          <a:p>
+            <a:br>
+              <a:rPr lang="en-US" dirty="0"/>
+            </a:br>
+            <a:r>
+              <a:rPr lang="en-US" dirty="0"/>
+              <a:t>Launching a Spring Batch job via messaging is the most common way to transition from an </a:t>
+            </a:r>
+            <a:r>
+              <a:rPr lang="en-US" b="1" dirty="0"/>
+              <a:t>event-driven</a:t>
+            </a:r>
+            <a:r>
+              <a:rPr lang="en-US" dirty="0"/>
+              <a:t> architecture (where things happen randomly) to a </a:t>
+            </a:r>
+            <a:r>
+              <a:rPr lang="en-US" b="1" dirty="0"/>
+              <a:t>batch-processing</a:t>
+            </a:r>
+            <a:r>
+              <a:rPr lang="en-US" dirty="0"/>
+              <a:t> architecture (where data is processed in bulk).</a:t>
+            </a:r>
+          </a:p>
+          <a:p>
+            <a:endParaRPr lang="en-IN" dirty="0"/>
+          </a:p>
+        </p:txBody>
+      </p:sp>
+    </p:spTree>
+    <p:extLst>
+      <p:ext uri="{BB962C8B-B14F-4D97-AF65-F5344CB8AC3E}">
+        <p14:creationId xmlns:p14="http://schemas.microsoft.com/office/powerpoint/2010/main" val="813019541"/>
       </p:ext>
     </p:extLst>
   </p:cSld>
@@ -15218,13 +15405,7 @@
   <p:cSld>
     <p:spTree>
       <p:nvGrpSpPr>
-        <p:cNvPr id="1" name="">
-          <a:extLst>
-            <a:ext uri="{FF2B5EF4-FFF2-40B4-BE49-F238E27FC236}">
-              <a16:creationId xmlns:a16="http://schemas.microsoft.com/office/drawing/2014/main" id="{173333F0-956A-31FB-837E-E3520B349018}"/>
-            </a:ext>
-          </a:extLst>
-        </p:cNvPr>
+        <p:cNvPr id="1" name=""/>
         <p:cNvGrpSpPr/>
         <p:nvPr/>
       </p:nvGrpSpPr>
@@ -15241,7 +15422,7 @@
           <p:cNvPr id="2" name="Title 1">
             <a:extLst>
               <a:ext uri="{FF2B5EF4-FFF2-40B4-BE49-F238E27FC236}">
-                <a16:creationId xmlns:a16="http://schemas.microsoft.com/office/drawing/2014/main" id="{DD768DC4-65B4-C857-1FCD-AFC427EAD7A3}"/>
+                <a16:creationId xmlns:a16="http://schemas.microsoft.com/office/drawing/2014/main" id="{3FCEC68F-3497-4112-84A5-544F54566DF3}"/>
               </a:ext>
             </a:extLst>
           </p:cNvPr>
@@ -15257,7 +15438,11 @@
           <a:bodyPr/>
           <a:lstStyle/>
           <a:p>
-            <a:endParaRPr lang="en-IN"/>
+            <a:r>
+              <a:rPr lang="en-US" b="1" dirty="0"/>
+              <a:t>Core Workflow</a:t>
+            </a:r>
+            <a:endParaRPr lang="en-IN" dirty="0"/>
           </a:p>
         </p:txBody>
       </p:sp>
@@ -15266,7 +15451,7 @@
           <p:cNvPr id="3" name="Content Placeholder 2">
             <a:extLst>
               <a:ext uri="{FF2B5EF4-FFF2-40B4-BE49-F238E27FC236}">
-                <a16:creationId xmlns:a16="http://schemas.microsoft.com/office/drawing/2014/main" id="{D8670B5B-1EB1-7FFE-BAA2-0DF70B425BC2}"/>
+                <a16:creationId xmlns:a16="http://schemas.microsoft.com/office/drawing/2014/main" id="{7D739A1A-5529-AEEC-BCF0-E9A9D257DF73}"/>
               </a:ext>
             </a:extLst>
           </p:cNvPr>
@@ -15280,12 +15465,105 @@
         <p:spPr>
           <a:xfrm>
             <a:off x="1154954" y="2603499"/>
-            <a:ext cx="10497534" cy="3948885"/>
+            <a:ext cx="10746916" cy="3826639"/>
           </a:xfrm>
         </p:spPr>
         <p:txBody>
-          <a:bodyPr/>
+          <a:bodyPr>
+            <a:normAutofit/>
+          </a:bodyPr>
           <a:lstStyle/>
+          <a:p>
+            <a:pPr marL="0" indent="0">
+              <a:buNone/>
+            </a:pPr>
+            <a:r>
+              <a:rPr lang="en-US" dirty="0"/>
+              <a:t>The process follows a specific sequence of transformations:</a:t>
+            </a:r>
+          </a:p>
+          <a:p>
+            <a:r>
+              <a:rPr lang="en-US" b="1" dirty="0"/>
+              <a:t>The Trigger:</a:t>
+            </a:r>
+            <a:r>
+              <a:rPr lang="en-US" dirty="0"/>
+              <a:t> An external event occurs (e.g., a file is uploaded, or a JSON message arrives in RabbitMQ).</a:t>
+            </a:r>
+          </a:p>
+          <a:p>
+            <a:r>
+              <a:rPr lang="en-US" b="1" dirty="0"/>
+              <a:t>The Message:</a:t>
+            </a:r>
+            <a:r>
+              <a:rPr lang="en-US" dirty="0"/>
+              <a:t> Spring Integration captures this as a Message&lt;T&gt;.</a:t>
+            </a:r>
+          </a:p>
+          <a:p>
+            <a:r>
+              <a:rPr lang="en-US" b="1" dirty="0"/>
+              <a:t>The Transformation:</a:t>
+            </a:r>
+            <a:r>
+              <a:rPr lang="en-US" dirty="0"/>
+              <a:t> The message payload is transformed into a </a:t>
+            </a:r>
+            <a:r>
+              <a:rPr lang="en-US" dirty="0" err="1"/>
+              <a:t>JobLaunchRequest</a:t>
+            </a:r>
+            <a:r>
+              <a:rPr lang="en-US" dirty="0"/>
+              <a:t>.</a:t>
+            </a:r>
+          </a:p>
+          <a:p>
+            <a:r>
+              <a:rPr lang="en-US" b="1" dirty="0"/>
+              <a:t>The Handler:</a:t>
+            </a:r>
+            <a:r>
+              <a:rPr lang="en-US" dirty="0"/>
+              <a:t> The </a:t>
+            </a:r>
+            <a:r>
+              <a:rPr lang="en-US" dirty="0" err="1"/>
+              <a:t>JobLaunchingMessageHandler</a:t>
+            </a:r>
+            <a:r>
+              <a:rPr lang="en-US" dirty="0"/>
+              <a:t> receives the request and uses a </a:t>
+            </a:r>
+            <a:r>
+              <a:rPr lang="en-US" dirty="0" err="1"/>
+              <a:t>JobLauncher</a:t>
+            </a:r>
+            <a:r>
+              <a:rPr lang="en-US" dirty="0"/>
+              <a:t> to start the Batch Job.</a:t>
+            </a:r>
+          </a:p>
+          <a:p>
+            <a:r>
+              <a:rPr lang="en-US" b="1" dirty="0"/>
+              <a:t>The Result:</a:t>
+            </a:r>
+            <a:r>
+              <a:rPr lang="en-US" dirty="0"/>
+              <a:t> The handler outputs a </a:t>
+            </a:r>
+            <a:r>
+              <a:rPr lang="en-US" dirty="0" err="1"/>
+              <a:t>JobExecution</a:t>
+            </a:r>
+            <a:r>
+              <a:rPr lang="en-US" dirty="0"/>
+              <a:t> object, which can be used to track if the job started successfully.</a:t>
+            </a:r>
+          </a:p>
           <a:p>
             <a:endParaRPr lang="en-IN" dirty="0"/>
           </a:p>
@@ -15294,7 +15572,7 @@
     </p:spTree>
     <p:extLst>
       <p:ext uri="{BB962C8B-B14F-4D97-AF65-F5344CB8AC3E}">
-        <p14:creationId xmlns:p14="http://schemas.microsoft.com/office/powerpoint/2010/main" val="813019541"/>
+        <p14:creationId xmlns:p14="http://schemas.microsoft.com/office/powerpoint/2010/main" val="1476332250"/>
       </p:ext>
     </p:extLst>
   </p:cSld>
@@ -15305,6 +15583,816 @@
 </file>
 
 <file path=ppt/slides/slide21.xml><?xml version="1.0" encoding="utf-8"?>
+<p:sld xmlns:a="http://schemas.openxmlformats.org/drawingml/2006/main" xmlns:r="http://schemas.openxmlformats.org/officeDocument/2006/relationships" xmlns:p="http://schemas.openxmlformats.org/presentationml/2006/main">
+  <p:cSld>
+    <p:spTree>
+      <p:nvGrpSpPr>
+        <p:cNvPr id="1" name=""/>
+        <p:cNvGrpSpPr/>
+        <p:nvPr/>
+      </p:nvGrpSpPr>
+      <p:grpSpPr>
+        <a:xfrm>
+          <a:off x="0" y="0"/>
+          <a:ext cx="0" cy="0"/>
+          <a:chOff x="0" y="0"/>
+          <a:chExt cx="0" cy="0"/>
+        </a:xfrm>
+      </p:grpSpPr>
+      <p:sp>
+        <p:nvSpPr>
+          <p:cNvPr id="2" name="Title 1">
+            <a:extLst>
+              <a:ext uri="{FF2B5EF4-FFF2-40B4-BE49-F238E27FC236}">
+                <a16:creationId xmlns:a16="http://schemas.microsoft.com/office/drawing/2014/main" id="{F7CB4BF1-99E8-C97E-F946-BB23A74AC5CB}"/>
+              </a:ext>
+            </a:extLst>
+          </p:cNvPr>
+          <p:cNvSpPr>
+            <a:spLocks noGrp="1"/>
+          </p:cNvSpPr>
+          <p:nvPr>
+            <p:ph type="title"/>
+          </p:nvPr>
+        </p:nvSpPr>
+        <p:spPr/>
+        <p:txBody>
+          <a:bodyPr/>
+          <a:lstStyle/>
+          <a:p>
+            <a:r>
+              <a:rPr lang="en-US" b="1" dirty="0"/>
+              <a:t>Key Components</a:t>
+            </a:r>
+            <a:endParaRPr lang="en-IN" dirty="0"/>
+          </a:p>
+        </p:txBody>
+      </p:sp>
+      <p:sp>
+        <p:nvSpPr>
+          <p:cNvPr id="3" name="Content Placeholder 2">
+            <a:extLst>
+              <a:ext uri="{FF2B5EF4-FFF2-40B4-BE49-F238E27FC236}">
+                <a16:creationId xmlns:a16="http://schemas.microsoft.com/office/drawing/2014/main" id="{88188BC5-DE9B-AFBC-0E6E-4F5E38F685D0}"/>
+              </a:ext>
+            </a:extLst>
+          </p:cNvPr>
+          <p:cNvSpPr>
+            <a:spLocks noGrp="1"/>
+          </p:cNvSpPr>
+          <p:nvPr>
+            <p:ph idx="1"/>
+          </p:nvPr>
+        </p:nvSpPr>
+        <p:spPr>
+          <a:xfrm>
+            <a:off x="1154954" y="2603500"/>
+            <a:ext cx="10698017" cy="3748402"/>
+          </a:xfrm>
+        </p:spPr>
+        <p:txBody>
+          <a:bodyPr>
+            <a:normAutofit lnSpcReduction="10000"/>
+          </a:bodyPr>
+          <a:lstStyle/>
+          <a:p>
+            <a:pPr marL="0" indent="0">
+              <a:buNone/>
+            </a:pPr>
+            <a:r>
+              <a:rPr lang="en-US" b="1" dirty="0"/>
+              <a:t>A. </a:t>
+            </a:r>
+            <a:r>
+              <a:rPr lang="en-US" b="1" dirty="0" err="1"/>
+              <a:t>JobLaunchRequest</a:t>
+            </a:r>
+            <a:endParaRPr lang="en-US" b="1" dirty="0"/>
+          </a:p>
+          <a:p>
+            <a:r>
+              <a:rPr lang="en-US" dirty="0"/>
+              <a:t>This is a simple wrapper object. It is NOT the job itself, but the </a:t>
+            </a:r>
+            <a:r>
+              <a:rPr lang="en-US" b="1" dirty="0"/>
+              <a:t>instruction</a:t>
+            </a:r>
+            <a:r>
+              <a:rPr lang="en-US" dirty="0"/>
+              <a:t> to run a job. It requires two things:</a:t>
+            </a:r>
+          </a:p>
+          <a:p>
+            <a:r>
+              <a:rPr lang="en-US" dirty="0"/>
+              <a:t>The Job bean to be executed.</a:t>
+            </a:r>
+          </a:p>
+          <a:p>
+            <a:r>
+              <a:rPr lang="en-US" dirty="0" err="1"/>
+              <a:t>JobParameters</a:t>
+            </a:r>
+            <a:r>
+              <a:rPr lang="en-US" dirty="0"/>
+              <a:t> (e.g., the timestamp, the input file path).</a:t>
+            </a:r>
+          </a:p>
+          <a:p>
+            <a:pPr marL="0" indent="0">
+              <a:buNone/>
+            </a:pPr>
+            <a:r>
+              <a:rPr lang="en-US" b="1" dirty="0"/>
+              <a:t>B. </a:t>
+            </a:r>
+            <a:r>
+              <a:rPr lang="en-US" b="1" dirty="0" err="1"/>
+              <a:t>JobLaunchingMessageHandler</a:t>
+            </a:r>
+            <a:endParaRPr lang="en-US" b="1" dirty="0"/>
+          </a:p>
+          <a:p>
+            <a:r>
+              <a:rPr lang="en-US" dirty="0"/>
+              <a:t>This is the "bridge." It is a Spring Integration MessageHandler.</a:t>
+            </a:r>
+          </a:p>
+          <a:p>
+            <a:r>
+              <a:rPr lang="en-US" b="1" dirty="0"/>
+              <a:t>Input:</a:t>
+            </a:r>
+            <a:r>
+              <a:rPr lang="en-US" dirty="0"/>
+              <a:t> Expects a </a:t>
+            </a:r>
+            <a:r>
+              <a:rPr lang="en-US" dirty="0" err="1"/>
+              <a:t>JobLaunchRequest</a:t>
+            </a:r>
+            <a:r>
+              <a:rPr lang="en-US" dirty="0"/>
+              <a:t>.</a:t>
+            </a:r>
+          </a:p>
+          <a:p>
+            <a:r>
+              <a:rPr lang="en-US" b="1" dirty="0"/>
+              <a:t>Action:</a:t>
+            </a:r>
+            <a:r>
+              <a:rPr lang="en-US" dirty="0"/>
+              <a:t> Calls </a:t>
+            </a:r>
+            <a:r>
+              <a:rPr lang="en-US" dirty="0" err="1"/>
+              <a:t>jobLauncher.run</a:t>
+            </a:r>
+            <a:r>
+              <a:rPr lang="en-US" dirty="0"/>
+              <a:t>(job, parameters).</a:t>
+            </a:r>
+          </a:p>
+          <a:p>
+            <a:r>
+              <a:rPr lang="en-US" b="1" dirty="0"/>
+              <a:t>Output:</a:t>
+            </a:r>
+            <a:r>
+              <a:rPr lang="en-US" dirty="0"/>
+              <a:t> Returns the </a:t>
+            </a:r>
+            <a:r>
+              <a:rPr lang="en-US" dirty="0" err="1"/>
+              <a:t>JobExecution</a:t>
+            </a:r>
+            <a:r>
+              <a:rPr lang="en-US" dirty="0"/>
+              <a:t> object to the next channel.</a:t>
+            </a:r>
+          </a:p>
+          <a:p>
+            <a:endParaRPr lang="en-IN" dirty="0"/>
+          </a:p>
+        </p:txBody>
+      </p:sp>
+    </p:spTree>
+    <p:extLst>
+      <p:ext uri="{BB962C8B-B14F-4D97-AF65-F5344CB8AC3E}">
+        <p14:creationId xmlns:p14="http://schemas.microsoft.com/office/powerpoint/2010/main" val="805759023"/>
+      </p:ext>
+    </p:extLst>
+  </p:cSld>
+  <p:clrMapOvr>
+    <a:masterClrMapping/>
+  </p:clrMapOvr>
+</p:sld>
+</file>
+
+<file path=ppt/slides/slide22.xml><?xml version="1.0" encoding="utf-8"?>
+<p:sld xmlns:a="http://schemas.openxmlformats.org/drawingml/2006/main" xmlns:r="http://schemas.openxmlformats.org/officeDocument/2006/relationships" xmlns:p="http://schemas.openxmlformats.org/presentationml/2006/main">
+  <p:cSld>
+    <p:spTree>
+      <p:nvGrpSpPr>
+        <p:cNvPr id="1" name=""/>
+        <p:cNvGrpSpPr/>
+        <p:nvPr/>
+      </p:nvGrpSpPr>
+      <p:grpSpPr>
+        <a:xfrm>
+          <a:off x="0" y="0"/>
+          <a:ext cx="0" cy="0"/>
+          <a:chOff x="0" y="0"/>
+          <a:chExt cx="0" cy="0"/>
+        </a:xfrm>
+      </p:grpSpPr>
+      <p:sp>
+        <p:nvSpPr>
+          <p:cNvPr id="5" name="TextBox 4">
+            <a:extLst>
+              <a:ext uri="{FF2B5EF4-FFF2-40B4-BE49-F238E27FC236}">
+                <a16:creationId xmlns:a16="http://schemas.microsoft.com/office/drawing/2014/main" id="{CE03160E-0D5A-DCE0-55C5-CB72BE364BA7}"/>
+              </a:ext>
+            </a:extLst>
+          </p:cNvPr>
+          <p:cNvSpPr txBox="1"/>
+          <p:nvPr/>
+        </p:nvSpPr>
+        <p:spPr>
+          <a:xfrm>
+            <a:off x="607155" y="308109"/>
+            <a:ext cx="11769844" cy="6463308"/>
+          </a:xfrm>
+          <a:prstGeom prst="rect">
+            <a:avLst/>
+          </a:prstGeom>
+          <a:noFill/>
+        </p:spPr>
+        <p:txBody>
+          <a:bodyPr wrap="square">
+            <a:spAutoFit/>
+          </a:bodyPr>
+          <a:lstStyle/>
+          <a:p>
+            <a:r>
+              <a:rPr lang="en-IN" dirty="0"/>
+              <a:t>@Configuration</a:t>
+            </a:r>
+          </a:p>
+          <a:p>
+            <a:r>
+              <a:rPr lang="en-IN" dirty="0"/>
+              <a:t>@EnableBatchProcessing</a:t>
+            </a:r>
+          </a:p>
+          <a:p>
+            <a:r>
+              <a:rPr lang="en-IN" dirty="0"/>
+              <a:t>@EnableIntegration</a:t>
+            </a:r>
+          </a:p>
+          <a:p>
+            <a:r>
+              <a:rPr lang="en-IN" dirty="0"/>
+              <a:t>public class </a:t>
+            </a:r>
+            <a:r>
+              <a:rPr lang="en-IN" dirty="0" err="1"/>
+              <a:t>BatchIntegrationConfig</a:t>
+            </a:r>
+            <a:r>
+              <a:rPr lang="en-IN" dirty="0"/>
+              <a:t> {</a:t>
+            </a:r>
+          </a:p>
+          <a:p>
+            <a:endParaRPr lang="en-IN" dirty="0"/>
+          </a:p>
+          <a:p>
+            <a:r>
+              <a:rPr lang="en-IN" dirty="0"/>
+              <a:t>    </a:t>
+            </a:r>
+          </a:p>
+          <a:p>
+            <a:r>
+              <a:rPr lang="en-IN" dirty="0"/>
+              <a:t>    // 2. Integration Flow: File arrives -&gt; Start Batch Job</a:t>
+            </a:r>
+          </a:p>
+          <a:p>
+            <a:r>
+              <a:rPr lang="en-IN" dirty="0"/>
+              <a:t>    @Bean</a:t>
+            </a:r>
+          </a:p>
+          <a:p>
+            <a:r>
+              <a:rPr lang="en-IN" dirty="0"/>
+              <a:t>    public </a:t>
+            </a:r>
+            <a:r>
+              <a:rPr lang="en-IN" dirty="0" err="1"/>
+              <a:t>IntegrationFlow</a:t>
+            </a:r>
+            <a:r>
+              <a:rPr lang="en-IN" dirty="0"/>
+              <a:t> </a:t>
+            </a:r>
+            <a:r>
+              <a:rPr lang="en-IN" dirty="0" err="1"/>
+              <a:t>fileTriggerFlow</a:t>
+            </a:r>
+            <a:r>
+              <a:rPr lang="en-IN" dirty="0"/>
+              <a:t>(</a:t>
+            </a:r>
+            <a:r>
+              <a:rPr lang="en-IN" dirty="0" err="1"/>
+              <a:t>JobLaunchingMessageHandler</a:t>
+            </a:r>
+            <a:r>
+              <a:rPr lang="en-IN" dirty="0"/>
+              <a:t> handler) {</a:t>
+            </a:r>
+          </a:p>
+          <a:p>
+            <a:r>
+              <a:rPr lang="en-IN" dirty="0"/>
+              <a:t>        return </a:t>
+            </a:r>
+            <a:r>
+              <a:rPr lang="en-IN" dirty="0" err="1"/>
+              <a:t>IntegrationFlow.from</a:t>
+            </a:r>
+            <a:r>
+              <a:rPr lang="en-IN" dirty="0"/>
+              <a:t>(</a:t>
+            </a:r>
+            <a:r>
+              <a:rPr lang="en-IN" dirty="0" err="1"/>
+              <a:t>Files.inboundAdapter</a:t>
+            </a:r>
+            <a:r>
+              <a:rPr lang="en-IN" dirty="0"/>
+              <a:t>(new File("input-</a:t>
+            </a:r>
+            <a:r>
+              <a:rPr lang="en-IN" dirty="0" err="1"/>
+              <a:t>dir</a:t>
+            </a:r>
+            <a:r>
+              <a:rPr lang="en-IN" dirty="0"/>
+              <a:t>")),</a:t>
+            </a:r>
+          </a:p>
+          <a:p>
+            <a:r>
+              <a:rPr lang="en-IN" dirty="0"/>
+              <a:t>                        e -&gt; </a:t>
+            </a:r>
+            <a:r>
+              <a:rPr lang="en-IN" dirty="0" err="1"/>
+              <a:t>e.poller</a:t>
+            </a:r>
+            <a:r>
+              <a:rPr lang="en-IN" dirty="0"/>
+              <a:t>(</a:t>
+            </a:r>
+            <a:r>
+              <a:rPr lang="en-IN" dirty="0" err="1"/>
+              <a:t>Pollers.fixedDelay</a:t>
+            </a:r>
+            <a:r>
+              <a:rPr lang="en-IN" dirty="0"/>
+              <a:t>(5000)))</a:t>
+            </a:r>
+          </a:p>
+          <a:p>
+            <a:r>
+              <a:rPr lang="en-IN" dirty="0"/>
+              <a:t>                .transform(file -&gt; {</a:t>
+            </a:r>
+          </a:p>
+          <a:p>
+            <a:r>
+              <a:rPr lang="en-IN" dirty="0"/>
+              <a:t>                    // Wrap the file path as a Job Parameter</a:t>
+            </a:r>
+          </a:p>
+          <a:p>
+            <a:r>
+              <a:rPr lang="en-IN" dirty="0"/>
+              <a:t>                    </a:t>
+            </a:r>
+            <a:r>
+              <a:rPr lang="en-IN" dirty="0" err="1"/>
+              <a:t>JobParameters</a:t>
+            </a:r>
+            <a:r>
+              <a:rPr lang="en-IN" dirty="0"/>
+              <a:t> params = new </a:t>
+            </a:r>
+            <a:r>
+              <a:rPr lang="en-IN" dirty="0" err="1"/>
+              <a:t>JobParametersBuilder</a:t>
+            </a:r>
+            <a:r>
+              <a:rPr lang="en-IN" dirty="0"/>
+              <a:t>()</a:t>
+            </a:r>
+          </a:p>
+          <a:p>
+            <a:r>
+              <a:rPr lang="en-IN" dirty="0"/>
+              <a:t>                            .</a:t>
+            </a:r>
+            <a:r>
+              <a:rPr lang="en-IN" dirty="0" err="1"/>
+              <a:t>addString</a:t>
+            </a:r>
+            <a:r>
+              <a:rPr lang="en-IN" dirty="0"/>
+              <a:t>("</a:t>
+            </a:r>
+            <a:r>
+              <a:rPr lang="en-IN" dirty="0" err="1"/>
+              <a:t>file.path</a:t>
+            </a:r>
+            <a:r>
+              <a:rPr lang="en-IN" dirty="0"/>
+              <a:t>", ((File)file).</a:t>
+            </a:r>
+            <a:r>
+              <a:rPr lang="en-IN" dirty="0" err="1"/>
+              <a:t>getAbsolutePath</a:t>
+            </a:r>
+            <a:r>
+              <a:rPr lang="en-IN" dirty="0"/>
+              <a:t>())</a:t>
+            </a:r>
+          </a:p>
+          <a:p>
+            <a:r>
+              <a:rPr lang="en-IN" dirty="0"/>
+              <a:t>                            .</a:t>
+            </a:r>
+            <a:r>
+              <a:rPr lang="en-IN" dirty="0" err="1"/>
+              <a:t>toJobParameters</a:t>
+            </a:r>
+            <a:r>
+              <a:rPr lang="en-IN" dirty="0"/>
+              <a:t>();</a:t>
+            </a:r>
+          </a:p>
+          <a:p>
+            <a:r>
+              <a:rPr lang="en-IN" dirty="0"/>
+              <a:t>                    return new </a:t>
+            </a:r>
+            <a:r>
+              <a:rPr lang="en-IN" dirty="0" err="1"/>
+              <a:t>JobLaunchRequest</a:t>
+            </a:r>
+            <a:r>
+              <a:rPr lang="en-IN" dirty="0"/>
+              <a:t>(</a:t>
+            </a:r>
+            <a:r>
+              <a:rPr lang="en-IN" dirty="0" err="1"/>
+              <a:t>transformJob</a:t>
+            </a:r>
+            <a:r>
+              <a:rPr lang="en-IN" dirty="0"/>
+              <a:t>(null, null), params);</a:t>
+            </a:r>
+          </a:p>
+          <a:p>
+            <a:r>
+              <a:rPr lang="en-IN" dirty="0"/>
+              <a:t>                })</a:t>
+            </a:r>
+          </a:p>
+          <a:p>
+            <a:r>
+              <a:rPr lang="en-IN" dirty="0"/>
+              <a:t>                .handle(handler) // This launches the job</a:t>
+            </a:r>
+          </a:p>
+          <a:p>
+            <a:r>
+              <a:rPr lang="en-IN" dirty="0"/>
+              <a:t>                .get();</a:t>
+            </a:r>
+          </a:p>
+          <a:p>
+            <a:r>
+              <a:rPr lang="en-IN" dirty="0"/>
+              <a:t>    }</a:t>
+            </a:r>
+          </a:p>
+          <a:p>
+            <a:endParaRPr lang="en-IN" dirty="0"/>
+          </a:p>
+          <a:p>
+            <a:r>
+              <a:rPr lang="en-IN" dirty="0"/>
+              <a:t>}</a:t>
+            </a:r>
+          </a:p>
+        </p:txBody>
+      </p:sp>
+    </p:spTree>
+    <p:extLst>
+      <p:ext uri="{BB962C8B-B14F-4D97-AF65-F5344CB8AC3E}">
+        <p14:creationId xmlns:p14="http://schemas.microsoft.com/office/powerpoint/2010/main" val="998225913"/>
+      </p:ext>
+    </p:extLst>
+  </p:cSld>
+  <p:clrMapOvr>
+    <a:masterClrMapping/>
+  </p:clrMapOvr>
+</p:sld>
+</file>
+
+<file path=ppt/slides/slide23.xml><?xml version="1.0" encoding="utf-8"?>
+<p:sld xmlns:a="http://schemas.openxmlformats.org/drawingml/2006/main" xmlns:r="http://schemas.openxmlformats.org/officeDocument/2006/relationships" xmlns:p="http://schemas.openxmlformats.org/presentationml/2006/main">
+  <p:cSld>
+    <p:spTree>
+      <p:nvGrpSpPr>
+        <p:cNvPr id="1" name=""/>
+        <p:cNvGrpSpPr/>
+        <p:nvPr/>
+      </p:nvGrpSpPr>
+      <p:grpSpPr>
+        <a:xfrm>
+          <a:off x="0" y="0"/>
+          <a:ext cx="0" cy="0"/>
+          <a:chOff x="0" y="0"/>
+          <a:chExt cx="0" cy="0"/>
+        </a:xfrm>
+      </p:grpSpPr>
+      <p:sp>
+        <p:nvSpPr>
+          <p:cNvPr id="3" name="TextBox 2">
+            <a:extLst>
+              <a:ext uri="{FF2B5EF4-FFF2-40B4-BE49-F238E27FC236}">
+                <a16:creationId xmlns:a16="http://schemas.microsoft.com/office/drawing/2014/main" id="{995F49B7-4C02-04F5-1D3A-62EF7B7DE8AA}"/>
+              </a:ext>
+            </a:extLst>
+          </p:cNvPr>
+          <p:cNvSpPr txBox="1"/>
+          <p:nvPr/>
+        </p:nvSpPr>
+        <p:spPr>
+          <a:xfrm>
+            <a:off x="583114" y="4061399"/>
+            <a:ext cx="10076736" cy="1754326"/>
+          </a:xfrm>
+          <a:prstGeom prst="rect">
+            <a:avLst/>
+          </a:prstGeom>
+          <a:noFill/>
+          <a:ln>
+            <a:solidFill>
+              <a:schemeClr val="accent1"/>
+            </a:solidFill>
+          </a:ln>
+        </p:spPr>
+        <p:txBody>
+          <a:bodyPr wrap="square">
+            <a:spAutoFit/>
+          </a:bodyPr>
+          <a:lstStyle/>
+          <a:p>
+            <a:r>
+              <a:rPr lang="en-IN" dirty="0"/>
+              <a:t> @Bean</a:t>
+            </a:r>
+          </a:p>
+          <a:p>
+            <a:r>
+              <a:rPr lang="en-IN" dirty="0"/>
+              <a:t>    @ServiceActivator(inputChannel = "</a:t>
+            </a:r>
+            <a:r>
+              <a:rPr lang="en-IN" dirty="0" err="1"/>
+              <a:t>jobLaunchChannel</a:t>
+            </a:r>
+            <a:r>
+              <a:rPr lang="en-IN" dirty="0"/>
+              <a:t>")</a:t>
+            </a:r>
+          </a:p>
+          <a:p>
+            <a:r>
+              <a:rPr lang="en-IN" dirty="0"/>
+              <a:t>    public </a:t>
+            </a:r>
+            <a:r>
+              <a:rPr lang="en-IN" dirty="0" err="1"/>
+              <a:t>JobLaunchingMessageHandler</a:t>
+            </a:r>
+            <a:r>
+              <a:rPr lang="en-IN" dirty="0"/>
+              <a:t> </a:t>
+            </a:r>
+            <a:r>
+              <a:rPr lang="en-IN" dirty="0" err="1"/>
+              <a:t>jobLaunchingMessageHandler</a:t>
+            </a:r>
+            <a:r>
+              <a:rPr lang="en-IN" dirty="0"/>
+              <a:t>(</a:t>
+            </a:r>
+            <a:r>
+              <a:rPr lang="en-IN" dirty="0" err="1"/>
+              <a:t>JobLauncher</a:t>
+            </a:r>
+            <a:r>
+              <a:rPr lang="en-IN" dirty="0"/>
+              <a:t> </a:t>
+            </a:r>
+            <a:r>
+              <a:rPr lang="en-IN" dirty="0" err="1"/>
+              <a:t>jobLauncher</a:t>
+            </a:r>
+            <a:r>
+              <a:rPr lang="en-IN" dirty="0"/>
+              <a:t>) {</a:t>
+            </a:r>
+          </a:p>
+          <a:p>
+            <a:r>
+              <a:rPr lang="en-IN" dirty="0"/>
+              <a:t>        return new </a:t>
+            </a:r>
+            <a:r>
+              <a:rPr lang="en-IN" dirty="0" err="1"/>
+              <a:t>JobLaunchingMessageHandler</a:t>
+            </a:r>
+            <a:r>
+              <a:rPr lang="en-IN" dirty="0"/>
+              <a:t>(</a:t>
+            </a:r>
+            <a:r>
+              <a:rPr lang="en-IN" dirty="0" err="1"/>
+              <a:t>jobLauncher</a:t>
+            </a:r>
+            <a:r>
+              <a:rPr lang="en-IN" dirty="0"/>
+              <a:t>);</a:t>
+            </a:r>
+          </a:p>
+          <a:p>
+            <a:r>
+              <a:rPr lang="en-IN" dirty="0"/>
+              <a:t>    }</a:t>
+            </a:r>
+          </a:p>
+        </p:txBody>
+      </p:sp>
+      <p:sp>
+        <p:nvSpPr>
+          <p:cNvPr id="5" name="TextBox 4">
+            <a:extLst>
+              <a:ext uri="{FF2B5EF4-FFF2-40B4-BE49-F238E27FC236}">
+                <a16:creationId xmlns:a16="http://schemas.microsoft.com/office/drawing/2014/main" id="{EA02F9DE-4D20-FCA0-9C60-BE6BD6347314}"/>
+              </a:ext>
+            </a:extLst>
+          </p:cNvPr>
+          <p:cNvSpPr txBox="1"/>
+          <p:nvPr/>
+        </p:nvSpPr>
+        <p:spPr>
+          <a:xfrm>
+            <a:off x="720028" y="719821"/>
+            <a:ext cx="9172117" cy="2031325"/>
+          </a:xfrm>
+          <a:prstGeom prst="rect">
+            <a:avLst/>
+          </a:prstGeom>
+          <a:noFill/>
+          <a:ln>
+            <a:solidFill>
+              <a:schemeClr val="accent1"/>
+            </a:solidFill>
+          </a:ln>
+        </p:spPr>
+        <p:txBody>
+          <a:bodyPr wrap="square">
+            <a:spAutoFit/>
+          </a:bodyPr>
+          <a:lstStyle/>
+          <a:p>
+            <a:r>
+              <a:rPr lang="en-IN" dirty="0"/>
+              <a:t>// 1. The Batch Job</a:t>
+            </a:r>
+          </a:p>
+          <a:p>
+            <a:r>
+              <a:rPr lang="en-IN" dirty="0"/>
+              <a:t>    @Bean</a:t>
+            </a:r>
+          </a:p>
+          <a:p>
+            <a:r>
+              <a:rPr lang="en-IN" dirty="0"/>
+              <a:t>    public Job </a:t>
+            </a:r>
+            <a:r>
+              <a:rPr lang="en-IN" dirty="0" err="1"/>
+              <a:t>transformJob</a:t>
+            </a:r>
+            <a:r>
+              <a:rPr lang="en-IN" dirty="0"/>
+              <a:t>(</a:t>
+            </a:r>
+            <a:r>
+              <a:rPr lang="en-IN" dirty="0" err="1"/>
+              <a:t>JobRepository</a:t>
+            </a:r>
+            <a:r>
+              <a:rPr lang="en-IN" dirty="0"/>
+              <a:t> </a:t>
+            </a:r>
+            <a:r>
+              <a:rPr lang="en-IN" dirty="0" err="1"/>
+              <a:t>jobRepository</a:t>
+            </a:r>
+            <a:r>
+              <a:rPr lang="en-IN" dirty="0"/>
+              <a:t>, Step step1) {</a:t>
+            </a:r>
+          </a:p>
+          <a:p>
+            <a:r>
+              <a:rPr lang="en-IN" dirty="0"/>
+              <a:t>        return new </a:t>
+            </a:r>
+            <a:r>
+              <a:rPr lang="en-IN" dirty="0" err="1"/>
+              <a:t>JobBuilder</a:t>
+            </a:r>
+            <a:r>
+              <a:rPr lang="en-IN" dirty="0"/>
+              <a:t>("</a:t>
+            </a:r>
+            <a:r>
+              <a:rPr lang="en-IN" dirty="0" err="1"/>
+              <a:t>transformJob</a:t>
+            </a:r>
+            <a:r>
+              <a:rPr lang="en-IN" dirty="0"/>
+              <a:t>", </a:t>
+            </a:r>
+            <a:r>
+              <a:rPr lang="en-IN" dirty="0" err="1"/>
+              <a:t>jobRepository</a:t>
+            </a:r>
+            <a:r>
+              <a:rPr lang="en-IN" dirty="0"/>
+              <a:t>)</a:t>
+            </a:r>
+          </a:p>
+          <a:p>
+            <a:r>
+              <a:rPr lang="en-IN" dirty="0"/>
+              <a:t>                .start(step1)</a:t>
+            </a:r>
+          </a:p>
+          <a:p>
+            <a:r>
+              <a:rPr lang="en-IN" dirty="0"/>
+              <a:t>                .build();</a:t>
+            </a:r>
+          </a:p>
+          <a:p>
+            <a:r>
+              <a:rPr lang="en-IN" dirty="0"/>
+              <a:t>    }</a:t>
+            </a:r>
+          </a:p>
+        </p:txBody>
+      </p:sp>
+    </p:spTree>
+    <p:extLst>
+      <p:ext uri="{BB962C8B-B14F-4D97-AF65-F5344CB8AC3E}">
+        <p14:creationId xmlns:p14="http://schemas.microsoft.com/office/powerpoint/2010/main" val="524381556"/>
+      </p:ext>
+    </p:extLst>
+  </p:cSld>
+  <p:clrMapOvr>
+    <a:masterClrMapping/>
+  </p:clrMapOvr>
+</p:sld>
+</file>
+
+<file path=ppt/slides/slide24.xml><?xml version="1.0" encoding="utf-8"?>
 <p:sld xmlns:a="http://schemas.openxmlformats.org/drawingml/2006/main" xmlns:r="http://schemas.openxmlformats.org/officeDocument/2006/relationships" xmlns:p="http://schemas.openxmlformats.org/presentationml/2006/main">
   <p:cSld>
     <p:spTree>
@@ -15348,7 +16436,11 @@
           <a:bodyPr/>
           <a:lstStyle/>
           <a:p>
-            <a:endParaRPr lang="en-IN"/>
+            <a:r>
+              <a:rPr lang="en-US" b="1" dirty="0"/>
+              <a:t>Messaging within a Batch Step</a:t>
+            </a:r>
+            <a:endParaRPr lang="en-IN" dirty="0"/>
           </a:p>
         </p:txBody>
       </p:sp>
@@ -15375,8 +16467,206 @@
           </a:xfrm>
         </p:spPr>
         <p:txBody>
-          <a:bodyPr/>
+          <a:bodyPr>
+            <a:normAutofit fontScale="85000" lnSpcReduction="20000"/>
+          </a:bodyPr>
           <a:lstStyle/>
+          <a:p>
+            <a:r>
+              <a:rPr lang="en-US" dirty="0"/>
+              <a:t>Sometimes, a Batch Job needs to read data from a message queue (like RabbitMQ) or send the output of a process to a message channel instead of a database.</a:t>
+            </a:r>
+          </a:p>
+          <a:p>
+            <a:pPr marL="0" indent="0">
+              <a:buNone/>
+            </a:pPr>
+            <a:r>
+              <a:rPr lang="en-US" b="1" dirty="0" err="1"/>
+              <a:t>IntegrationItemReader</a:t>
+            </a:r>
+            <a:r>
+              <a:rPr lang="en-US" b="1" dirty="0"/>
+              <a:t> and </a:t>
+            </a:r>
+            <a:r>
+              <a:rPr lang="en-US" b="1" dirty="0" err="1"/>
+              <a:t>IntegrationItemWriter</a:t>
+            </a:r>
+            <a:endParaRPr lang="en-US" b="1" dirty="0"/>
+          </a:p>
+          <a:p>
+            <a:r>
+              <a:rPr lang="en-US" dirty="0"/>
+              <a:t>These bridge the gap between Batch chunks and Integration channels.</a:t>
+            </a:r>
+          </a:p>
+          <a:p>
+            <a:r>
+              <a:rPr lang="en-US" b="1" dirty="0"/>
+              <a:t>Example: Writing Batch output to a Message Channel:</a:t>
+            </a:r>
+          </a:p>
+          <a:p>
+            <a:pPr marL="0" indent="0">
+              <a:buNone/>
+            </a:pPr>
+            <a:r>
+              <a:rPr lang="en-US" dirty="0"/>
+              <a:t>@Bean</a:t>
+            </a:r>
+          </a:p>
+          <a:p>
+            <a:pPr marL="0" indent="0">
+              <a:buNone/>
+            </a:pPr>
+            <a:r>
+              <a:rPr lang="en-US" dirty="0"/>
+              <a:t>public </a:t>
+            </a:r>
+            <a:r>
+              <a:rPr lang="en-US" dirty="0" err="1"/>
+              <a:t>IntegrationItemWriter</a:t>
+            </a:r>
+            <a:r>
+              <a:rPr lang="en-US" dirty="0"/>
+              <a:t>&lt;User&gt; </a:t>
+            </a:r>
+            <a:r>
+              <a:rPr lang="en-US" dirty="0" err="1"/>
+              <a:t>integrationWriter</a:t>
+            </a:r>
+            <a:r>
+              <a:rPr lang="en-US" dirty="0"/>
+              <a:t>(</a:t>
+            </a:r>
+            <a:r>
+              <a:rPr lang="en-US" dirty="0" err="1"/>
+              <a:t>MessagingTemplate</a:t>
+            </a:r>
+            <a:r>
+              <a:rPr lang="en-US" dirty="0"/>
+              <a:t> </a:t>
+            </a:r>
+            <a:r>
+              <a:rPr lang="en-US" dirty="0" err="1"/>
+              <a:t>messagingTemplate</a:t>
+            </a:r>
+            <a:r>
+              <a:rPr lang="en-US" dirty="0"/>
+              <a:t>) {</a:t>
+            </a:r>
+          </a:p>
+          <a:p>
+            <a:pPr marL="0" indent="0">
+              <a:buNone/>
+            </a:pPr>
+            <a:r>
+              <a:rPr lang="en-US" dirty="0"/>
+              <a:t>    </a:t>
+            </a:r>
+            <a:r>
+              <a:rPr lang="en-US" dirty="0" err="1"/>
+              <a:t>IntegrationItemWriter</a:t>
+            </a:r>
+            <a:r>
+              <a:rPr lang="en-US" dirty="0"/>
+              <a:t>&lt;User&gt; writer = new </a:t>
+            </a:r>
+            <a:r>
+              <a:rPr lang="en-US" dirty="0" err="1"/>
+              <a:t>IntegrationItemWriter</a:t>
+            </a:r>
+            <a:r>
+              <a:rPr lang="en-US" dirty="0"/>
+              <a:t>&lt;&gt;();</a:t>
+            </a:r>
+          </a:p>
+          <a:p>
+            <a:pPr marL="0" indent="0">
+              <a:buNone/>
+            </a:pPr>
+            <a:r>
+              <a:rPr lang="en-US" dirty="0"/>
+              <a:t>    </a:t>
+            </a:r>
+            <a:r>
+              <a:rPr lang="en-US" dirty="0" err="1"/>
+              <a:t>writer.setMessagingTemplate</a:t>
+            </a:r>
+            <a:r>
+              <a:rPr lang="en-US" dirty="0"/>
+              <a:t>(</a:t>
+            </a:r>
+            <a:r>
+              <a:rPr lang="en-US" dirty="0" err="1"/>
+              <a:t>messagingTemplate</a:t>
+            </a:r>
+            <a:r>
+              <a:rPr lang="en-US" dirty="0"/>
+              <a:t>);</a:t>
+            </a:r>
+          </a:p>
+          <a:p>
+            <a:pPr marL="0" indent="0">
+              <a:buNone/>
+            </a:pPr>
+            <a:r>
+              <a:rPr lang="en-US" dirty="0"/>
+              <a:t>    // Every processed item will be sent to the '</a:t>
+            </a:r>
+            <a:r>
+              <a:rPr lang="en-US" dirty="0" err="1"/>
+              <a:t>outputChannel</a:t>
+            </a:r>
+            <a:r>
+              <a:rPr lang="en-US" dirty="0"/>
+              <a:t>'</a:t>
+            </a:r>
+          </a:p>
+          <a:p>
+            <a:pPr marL="0" indent="0">
+              <a:buNone/>
+            </a:pPr>
+            <a:r>
+              <a:rPr lang="en-US" dirty="0"/>
+              <a:t>    </a:t>
+            </a:r>
+            <a:r>
+              <a:rPr lang="en-US" dirty="0" err="1"/>
+              <a:t>writer.setChannelName</a:t>
+            </a:r>
+            <a:r>
+              <a:rPr lang="en-US" dirty="0"/>
+              <a:t>("</a:t>
+            </a:r>
+            <a:r>
+              <a:rPr lang="en-US" dirty="0" err="1"/>
+              <a:t>outputChannel</a:t>
+            </a:r>
+            <a:r>
+              <a:rPr lang="en-US" dirty="0"/>
+              <a:t>"); </a:t>
+            </a:r>
+          </a:p>
+          <a:p>
+            <a:pPr marL="0" indent="0">
+              <a:buNone/>
+            </a:pPr>
+            <a:r>
+              <a:rPr lang="en-US" dirty="0"/>
+              <a:t>    return writer;</a:t>
+            </a:r>
+          </a:p>
+          <a:p>
+            <a:pPr marL="0" indent="0">
+              <a:buNone/>
+            </a:pPr>
+            <a:r>
+              <a:rPr lang="en-US" dirty="0"/>
+              <a:t>}</a:t>
+            </a:r>
+          </a:p>
           <a:p>
             <a:endParaRPr lang="en-IN" dirty="0"/>
           </a:p>
@@ -15395,7 +16685,7 @@
 </p:sld>
 </file>
 
-<file path=ppt/slides/slide22.xml><?xml version="1.0" encoding="utf-8"?>
+<file path=ppt/slides/slide25.xml><?xml version="1.0" encoding="utf-8"?>
 <p:sld xmlns:a="http://schemas.openxmlformats.org/drawingml/2006/main" xmlns:r="http://schemas.openxmlformats.org/officeDocument/2006/relationships" xmlns:p="http://schemas.openxmlformats.org/presentationml/2006/main">
   <p:cSld>
     <p:spTree>
@@ -15439,7 +16729,11 @@
           <a:bodyPr/>
           <a:lstStyle/>
           <a:p>
-            <a:endParaRPr lang="en-IN"/>
+            <a:r>
+              <a:rPr lang="en-US" b="1" dirty="0"/>
+              <a:t>Remote Chunking</a:t>
+            </a:r>
+            <a:endParaRPr lang="en-IN" dirty="0"/>
           </a:p>
         </p:txBody>
       </p:sp>
@@ -15466,8 +16760,99 @@
           </a:xfrm>
         </p:spPr>
         <p:txBody>
-          <a:bodyPr/>
+          <a:bodyPr>
+            <a:normAutofit/>
+          </a:bodyPr>
           <a:lstStyle/>
+          <a:p>
+            <a:r>
+              <a:rPr lang="en-US" dirty="0"/>
+              <a:t>This is where Spring Batch Integration becomes powerful for </a:t>
+            </a:r>
+            <a:r>
+              <a:rPr lang="en-US" b="1" dirty="0"/>
+              <a:t>Scalability</a:t>
+            </a:r>
+            <a:r>
+              <a:rPr lang="en-US" dirty="0"/>
+              <a:t>.</a:t>
+            </a:r>
+          </a:p>
+          <a:p>
+            <a:r>
+              <a:rPr lang="en-US" b="1" dirty="0"/>
+              <a:t>Remote Chunking</a:t>
+            </a:r>
+            <a:r>
+              <a:rPr lang="en-US" dirty="0"/>
+              <a:t> allows you to split the "Process" and "Write" phases across multiple worker nodes.</a:t>
+            </a:r>
+          </a:p>
+          <a:p>
+            <a:r>
+              <a:rPr lang="en-US" b="1" dirty="0"/>
+              <a:t>Manager Step:</a:t>
+            </a:r>
+            <a:r>
+              <a:rPr lang="en-US" dirty="0"/>
+              <a:t> Reads the data from the database. It sends a "Chunk" (e.g., 100 items) as a message to a middleware (RabbitMQ/Kafka).</a:t>
+            </a:r>
+          </a:p>
+          <a:p>
+            <a:r>
+              <a:rPr lang="en-US" b="1" dirty="0"/>
+              <a:t>Worker Nodes:</a:t>
+            </a:r>
+            <a:r>
+              <a:rPr lang="en-US" dirty="0"/>
+              <a:t> Listen to the queue, process the items, and write them (or send a response back).</a:t>
+            </a:r>
+          </a:p>
+          <a:p>
+            <a:pPr marL="0" indent="0">
+              <a:buNone/>
+            </a:pPr>
+            <a:r>
+              <a:rPr lang="en-US" b="1" dirty="0"/>
+              <a:t>Architecture:</a:t>
+            </a:r>
+          </a:p>
+          <a:p>
+            <a:r>
+              <a:rPr lang="en-US" b="1" dirty="0"/>
+              <a:t>Manager:</a:t>
+            </a:r>
+            <a:r>
+              <a:rPr lang="en-US" dirty="0"/>
+              <a:t> </a:t>
+            </a:r>
+            <a:r>
+              <a:rPr lang="en-US" dirty="0" err="1"/>
+              <a:t>ChunkMessageChannelItemWriter</a:t>
+            </a:r>
+            <a:r>
+              <a:rPr lang="en-US" dirty="0"/>
+              <a:t> (Sends chunks out).</a:t>
+            </a:r>
+          </a:p>
+          <a:p>
+            <a:r>
+              <a:rPr lang="en-US" b="1" dirty="0"/>
+              <a:t>Worker:</a:t>
+            </a:r>
+            <a:r>
+              <a:rPr lang="en-US" dirty="0"/>
+              <a:t> </a:t>
+            </a:r>
+            <a:r>
+              <a:rPr lang="en-US" dirty="0" err="1"/>
+              <a:t>ChunkProcessorChunkHandler</a:t>
+            </a:r>
+            <a:r>
+              <a:rPr lang="en-US" dirty="0"/>
+              <a:t> (Receives chunks, processes, and sends replies).</a:t>
+            </a:r>
+          </a:p>
           <a:p>
             <a:endParaRPr lang="en-IN" dirty="0"/>
           </a:p>
@@ -15486,7 +16871,7 @@
 </p:sld>
 </file>
 
-<file path=ppt/slides/slide23.xml><?xml version="1.0" encoding="utf-8"?>
+<file path=ppt/slides/slide26.xml><?xml version="1.0" encoding="utf-8"?>
 <p:sld xmlns:a="http://schemas.openxmlformats.org/drawingml/2006/main" xmlns:r="http://schemas.openxmlformats.org/officeDocument/2006/relationships" xmlns:p="http://schemas.openxmlformats.org/presentationml/2006/main">
   <p:cSld>
     <p:spTree>
@@ -15530,7 +16915,11 @@
           <a:bodyPr/>
           <a:lstStyle/>
           <a:p>
-            <a:endParaRPr lang="en-IN"/>
+            <a:r>
+              <a:rPr lang="en-US" b="1" dirty="0"/>
+              <a:t>Remote Chunking</a:t>
+            </a:r>
+            <a:endParaRPr lang="en-IN" dirty="0"/>
           </a:p>
         </p:txBody>
       </p:sp>
@@ -15557,10 +16946,212 @@
           </a:xfrm>
         </p:spPr>
         <p:txBody>
-          <a:bodyPr/>
+          <a:bodyPr>
+            <a:normAutofit fontScale="92500" lnSpcReduction="10000"/>
+          </a:bodyPr>
           <a:lstStyle/>
           <a:p>
-            <a:endParaRPr lang="en-IN" dirty="0"/>
+            <a:pPr marL="0" indent="0">
+              <a:buNone/>
+            </a:pPr>
+            <a:r>
+              <a:rPr lang="en-IN" dirty="0"/>
+              <a:t>@Bean</a:t>
+            </a:r>
+          </a:p>
+          <a:p>
+            <a:pPr marL="0" indent="0">
+              <a:buNone/>
+            </a:pPr>
+            <a:r>
+              <a:rPr lang="en-IN" dirty="0"/>
+              <a:t>public </a:t>
+            </a:r>
+            <a:r>
+              <a:rPr lang="en-IN" dirty="0" err="1"/>
+              <a:t>TaskletStep</a:t>
+            </a:r>
+            <a:r>
+              <a:rPr lang="en-IN" dirty="0"/>
+              <a:t> </a:t>
+            </a:r>
+            <a:r>
+              <a:rPr lang="en-IN" dirty="0" err="1"/>
+              <a:t>managerStep</a:t>
+            </a:r>
+            <a:r>
+              <a:rPr lang="en-IN" dirty="0"/>
+              <a:t>(</a:t>
+            </a:r>
+            <a:r>
+              <a:rPr lang="en-IN" dirty="0" err="1"/>
+              <a:t>JobRepository</a:t>
+            </a:r>
+            <a:r>
+              <a:rPr lang="en-IN" dirty="0"/>
+              <a:t> </a:t>
+            </a:r>
+            <a:r>
+              <a:rPr lang="en-IN" dirty="0" err="1"/>
+              <a:t>jobRepository</a:t>
+            </a:r>
+            <a:r>
+              <a:rPr lang="en-IN" dirty="0"/>
+              <a:t>, </a:t>
+            </a:r>
+          </a:p>
+          <a:p>
+            <a:pPr marL="0" indent="0">
+              <a:buNone/>
+            </a:pPr>
+            <a:r>
+              <a:rPr lang="en-IN" dirty="0"/>
+              <a:t>                               </a:t>
+            </a:r>
+            <a:r>
+              <a:rPr lang="en-IN" dirty="0" err="1"/>
+              <a:t>ItemReader</a:t>
+            </a:r>
+            <a:r>
+              <a:rPr lang="en-IN" dirty="0"/>
+              <a:t>&lt;User&gt; reader,</a:t>
+            </a:r>
+          </a:p>
+          <a:p>
+            <a:pPr marL="0" indent="0">
+              <a:buNone/>
+            </a:pPr>
+            <a:r>
+              <a:rPr lang="en-IN" dirty="0"/>
+              <a:t>                               </a:t>
+            </a:r>
+            <a:r>
+              <a:rPr lang="en-IN" dirty="0" err="1"/>
+              <a:t>MessagingTemplate</a:t>
+            </a:r>
+            <a:r>
+              <a:rPr lang="en-IN" dirty="0"/>
+              <a:t> </a:t>
+            </a:r>
+            <a:r>
+              <a:rPr lang="en-IN" dirty="0" err="1"/>
+              <a:t>messagingTemplate</a:t>
+            </a:r>
+            <a:r>
+              <a:rPr lang="en-IN" dirty="0"/>
+              <a:t>) {</a:t>
+            </a:r>
+          </a:p>
+          <a:p>
+            <a:pPr marL="0" indent="0">
+              <a:buNone/>
+            </a:pPr>
+            <a:r>
+              <a:rPr lang="en-IN" dirty="0"/>
+              <a:t>    return new </a:t>
+            </a:r>
+            <a:r>
+              <a:rPr lang="en-IN" dirty="0" err="1"/>
+              <a:t>RemoteChunkingManagerStepBuilder</a:t>
+            </a:r>
+            <a:r>
+              <a:rPr lang="en-IN" dirty="0"/>
+              <a:t>&lt;User, User&gt;(</a:t>
+            </a:r>
+            <a:r>
+              <a:rPr lang="en-IN" dirty="0" err="1"/>
+              <a:t>jobRepository</a:t>
+            </a:r>
+            <a:r>
+              <a:rPr lang="en-IN" dirty="0"/>
+              <a:t>)</a:t>
+            </a:r>
+          </a:p>
+          <a:p>
+            <a:pPr marL="0" indent="0">
+              <a:buNone/>
+            </a:pPr>
+            <a:r>
+              <a:rPr lang="en-IN" dirty="0"/>
+              <a:t>            .chunk(100)</a:t>
+            </a:r>
+          </a:p>
+          <a:p>
+            <a:pPr marL="0" indent="0">
+              <a:buNone/>
+            </a:pPr>
+            <a:r>
+              <a:rPr lang="en-IN" dirty="0"/>
+              <a:t>            .reader(reader)</a:t>
+            </a:r>
+          </a:p>
+          <a:p>
+            <a:pPr marL="0" indent="0">
+              <a:buNone/>
+            </a:pPr>
+            <a:r>
+              <a:rPr lang="en-IN" dirty="0"/>
+              <a:t>            .</a:t>
+            </a:r>
+            <a:r>
+              <a:rPr lang="en-IN" dirty="0" err="1"/>
+              <a:t>outputChannel</a:t>
+            </a:r>
+            <a:r>
+              <a:rPr lang="en-IN" dirty="0"/>
+              <a:t>(</a:t>
+            </a:r>
+            <a:r>
+              <a:rPr lang="en-IN" dirty="0" err="1"/>
+              <a:t>outboundRequests</a:t>
+            </a:r>
+            <a:r>
+              <a:rPr lang="en-IN" dirty="0"/>
+              <a:t>()) // Channel to Workers</a:t>
+            </a:r>
+          </a:p>
+          <a:p>
+            <a:pPr marL="0" indent="0">
+              <a:buNone/>
+            </a:pPr>
+            <a:r>
+              <a:rPr lang="en-IN" dirty="0"/>
+              <a:t>            .</a:t>
+            </a:r>
+            <a:r>
+              <a:rPr lang="en-IN" dirty="0" err="1"/>
+              <a:t>inputChannel</a:t>
+            </a:r>
+            <a:r>
+              <a:rPr lang="en-IN" dirty="0"/>
+              <a:t>(</a:t>
+            </a:r>
+            <a:r>
+              <a:rPr lang="en-IN" dirty="0" err="1"/>
+              <a:t>inboundReplies</a:t>
+            </a:r>
+            <a:r>
+              <a:rPr lang="en-IN" dirty="0"/>
+              <a:t>())    // Channel from Workers</a:t>
+            </a:r>
+          </a:p>
+          <a:p>
+            <a:pPr marL="0" indent="0">
+              <a:buNone/>
+            </a:pPr>
+            <a:r>
+              <a:rPr lang="en-IN" dirty="0"/>
+              <a:t>            .build();</a:t>
+            </a:r>
+          </a:p>
+          <a:p>
+            <a:pPr marL="0" indent="0">
+              <a:buNone/>
+            </a:pPr>
+            <a:r>
+              <a:rPr lang="en-IN" dirty="0"/>
+              <a:t>}</a:t>
+            </a:r>
           </a:p>
         </p:txBody>
       </p:sp>
@@ -15577,7 +17168,7 @@
 </p:sld>
 </file>
 
-<file path=ppt/slides/slide24.xml><?xml version="1.0" encoding="utf-8"?>
+<file path=ppt/slides/slide27.xml><?xml version="1.0" encoding="utf-8"?>
 <p:sld xmlns:a="http://schemas.openxmlformats.org/drawingml/2006/main" xmlns:r="http://schemas.openxmlformats.org/officeDocument/2006/relationships" xmlns:p="http://schemas.openxmlformats.org/presentationml/2006/main">
   <p:cSld>
     <p:spTree>
@@ -15621,7 +17212,11 @@
           <a:bodyPr/>
           <a:lstStyle/>
           <a:p>
-            <a:endParaRPr lang="en-IN"/>
+            <a:r>
+              <a:rPr lang="en-US" b="1" dirty="0"/>
+              <a:t>Remote Partitioning</a:t>
+            </a:r>
+            <a:endParaRPr lang="en-IN" dirty="0"/>
           </a:p>
         </p:txBody>
       </p:sp>
@@ -15651,6 +17246,48 @@
           <a:bodyPr/>
           <a:lstStyle/>
           <a:p>
+            <a:r>
+              <a:rPr lang="en-US" dirty="0"/>
+              <a:t>Unlike Remote Chunking (which sends the actual data), </a:t>
+            </a:r>
+            <a:r>
+              <a:rPr lang="en-US" b="1" dirty="0"/>
+              <a:t>Remote Partitioning</a:t>
+            </a:r>
+            <a:r>
+              <a:rPr lang="en-US" dirty="0"/>
+              <a:t> sends "metadata" (e.g., "Worker 1, handle IDs 1 to 1000").</a:t>
+            </a:r>
+          </a:p>
+          <a:p>
+            <a:r>
+              <a:rPr lang="en-US" b="1" dirty="0"/>
+              <a:t>Pros:</a:t>
+            </a:r>
+            <a:r>
+              <a:rPr lang="en-US" dirty="0"/>
+              <a:t> Much higher performance because data isn't serialized over the network. Each worker reads its own data from the shared database.</a:t>
+            </a:r>
+          </a:p>
+          <a:p>
+            <a:r>
+              <a:rPr lang="en-US" b="1" dirty="0"/>
+              <a:t>Components:</a:t>
+            </a:r>
+            <a:r>
+              <a:rPr lang="en-US" dirty="0"/>
+              <a:t> </a:t>
+            </a:r>
+            <a:r>
+              <a:rPr lang="en-US" dirty="0" err="1"/>
+              <a:t>MessageChannelPartitionHandler</a:t>
+            </a:r>
+            <a:r>
+              <a:rPr lang="en-US" dirty="0"/>
+              <a:t>.</a:t>
+            </a:r>
+          </a:p>
+          <a:p>
             <a:endParaRPr lang="en-IN" dirty="0"/>
           </a:p>
         </p:txBody>
@@ -15668,7 +17305,345 @@
 </p:sld>
 </file>
 
-<file path=ppt/slides/slide25.xml><?xml version="1.0" encoding="utf-8"?>
+<file path=ppt/slides/slide28.xml><?xml version="1.0" encoding="utf-8"?>
+<p:sld xmlns:a="http://schemas.openxmlformats.org/drawingml/2006/main" xmlns:r="http://schemas.openxmlformats.org/officeDocument/2006/relationships" xmlns:p="http://schemas.openxmlformats.org/presentationml/2006/main">
+  <p:cSld>
+    <p:spTree>
+      <p:nvGrpSpPr>
+        <p:cNvPr id="1" name=""/>
+        <p:cNvGrpSpPr/>
+        <p:nvPr/>
+      </p:nvGrpSpPr>
+      <p:grpSpPr>
+        <a:xfrm>
+          <a:off x="0" y="0"/>
+          <a:ext cx="0" cy="0"/>
+          <a:chOff x="0" y="0"/>
+          <a:chExt cx="0" cy="0"/>
+        </a:xfrm>
+      </p:grpSpPr>
+      <p:sp>
+        <p:nvSpPr>
+          <p:cNvPr id="5" name="TextBox 4">
+            <a:extLst>
+              <a:ext uri="{FF2B5EF4-FFF2-40B4-BE49-F238E27FC236}">
+                <a16:creationId xmlns:a16="http://schemas.microsoft.com/office/drawing/2014/main" id="{BB61007B-F6F0-F28A-1785-7918337F19B1}"/>
+              </a:ext>
+            </a:extLst>
+          </p:cNvPr>
+          <p:cNvSpPr txBox="1"/>
+          <p:nvPr/>
+        </p:nvSpPr>
+        <p:spPr>
+          <a:xfrm>
+            <a:off x="865501" y="1190344"/>
+            <a:ext cx="10601173" cy="4801314"/>
+          </a:xfrm>
+          <a:prstGeom prst="rect">
+            <a:avLst/>
+          </a:prstGeom>
+          <a:noFill/>
+        </p:spPr>
+        <p:txBody>
+          <a:bodyPr wrap="square">
+            <a:spAutoFit/>
+          </a:bodyPr>
+          <a:lstStyle/>
+          <a:p>
+            <a:r>
+              <a:rPr lang="en-IN" dirty="0"/>
+              <a:t>@Bean</a:t>
+            </a:r>
+          </a:p>
+          <a:p>
+            <a:r>
+              <a:rPr lang="en-IN" dirty="0"/>
+              <a:t>public Step </a:t>
+            </a:r>
+            <a:r>
+              <a:rPr lang="en-IN" dirty="0" err="1"/>
+              <a:t>workerStep</a:t>
+            </a:r>
+            <a:r>
+              <a:rPr lang="en-IN" dirty="0"/>
+              <a:t>(</a:t>
+            </a:r>
+            <a:r>
+              <a:rPr lang="en-IN" dirty="0" err="1"/>
+              <a:t>JobRepository</a:t>
+            </a:r>
+            <a:r>
+              <a:rPr lang="en-IN" dirty="0"/>
+              <a:t> </a:t>
+            </a:r>
+            <a:r>
+              <a:rPr lang="en-IN" dirty="0" err="1"/>
+              <a:t>jobRepository</a:t>
+            </a:r>
+            <a:r>
+              <a:rPr lang="en-IN" dirty="0"/>
+              <a:t>, </a:t>
+            </a:r>
+            <a:r>
+              <a:rPr lang="en-IN" dirty="0" err="1"/>
+              <a:t>PlatformTransactionManager</a:t>
+            </a:r>
+            <a:r>
+              <a:rPr lang="en-IN" dirty="0"/>
+              <a:t> tm) {</a:t>
+            </a:r>
+          </a:p>
+          <a:p>
+            <a:r>
+              <a:rPr lang="en-IN" dirty="0"/>
+              <a:t>    return new </a:t>
+            </a:r>
+            <a:r>
+              <a:rPr lang="en-IN" dirty="0" err="1"/>
+              <a:t>StepBuilder</a:t>
+            </a:r>
+            <a:r>
+              <a:rPr lang="en-IN" dirty="0"/>
+              <a:t>("</a:t>
+            </a:r>
+            <a:r>
+              <a:rPr lang="en-IN" dirty="0" err="1"/>
+              <a:t>workerStep</a:t>
+            </a:r>
+            <a:r>
+              <a:rPr lang="en-IN" dirty="0"/>
+              <a:t>", </a:t>
+            </a:r>
+            <a:r>
+              <a:rPr lang="en-IN" dirty="0" err="1"/>
+              <a:t>jobRepository</a:t>
+            </a:r>
+            <a:r>
+              <a:rPr lang="en-IN" dirty="0"/>
+              <a:t>)</a:t>
+            </a:r>
+          </a:p>
+          <a:p>
+            <a:r>
+              <a:rPr lang="en-IN" dirty="0"/>
+              <a:t>            .</a:t>
+            </a:r>
+            <a:r>
+              <a:rPr lang="en-IN" dirty="0" err="1"/>
+              <a:t>itemReader</a:t>
+            </a:r>
+            <a:r>
+              <a:rPr lang="en-IN" dirty="0"/>
+              <a:t>(reader(null)) // Injected via </a:t>
+            </a:r>
+            <a:r>
+              <a:rPr lang="en-IN" dirty="0" err="1"/>
+              <a:t>StepScope</a:t>
+            </a:r>
+            <a:endParaRPr lang="en-IN" dirty="0"/>
+          </a:p>
+          <a:p>
+            <a:r>
+              <a:rPr lang="en-IN" dirty="0"/>
+              <a:t>            .processor(processor())</a:t>
+            </a:r>
+          </a:p>
+          <a:p>
+            <a:r>
+              <a:rPr lang="en-IN" dirty="0"/>
+              <a:t>            .writer(writer())</a:t>
+            </a:r>
+          </a:p>
+          <a:p>
+            <a:r>
+              <a:rPr lang="en-IN" dirty="0"/>
+              <a:t>            .build();</a:t>
+            </a:r>
+          </a:p>
+          <a:p>
+            <a:r>
+              <a:rPr lang="en-IN" dirty="0"/>
+              <a:t>}</a:t>
+            </a:r>
+          </a:p>
+          <a:p>
+            <a:endParaRPr lang="en-IN" dirty="0"/>
+          </a:p>
+          <a:p>
+            <a:r>
+              <a:rPr lang="en-IN" dirty="0"/>
+              <a:t>// Integration flow on the Worker to listen for partition requests</a:t>
+            </a:r>
+          </a:p>
+          <a:p>
+            <a:r>
+              <a:rPr lang="en-IN" dirty="0"/>
+              <a:t>@Bean</a:t>
+            </a:r>
+          </a:p>
+          <a:p>
+            <a:r>
+              <a:rPr lang="en-IN" dirty="0"/>
+              <a:t>public </a:t>
+            </a:r>
+            <a:r>
+              <a:rPr lang="en-IN" dirty="0" err="1"/>
+              <a:t>IntegrationFlow</a:t>
+            </a:r>
+            <a:r>
+              <a:rPr lang="en-IN" dirty="0"/>
+              <a:t> </a:t>
+            </a:r>
+            <a:r>
+              <a:rPr lang="en-IN" dirty="0" err="1"/>
+              <a:t>workerIntegrationFlow</a:t>
+            </a:r>
+            <a:r>
+              <a:rPr lang="en-IN" dirty="0"/>
+              <a:t>(</a:t>
+            </a:r>
+            <a:r>
+              <a:rPr lang="en-IN" dirty="0" err="1"/>
+              <a:t>StepExecutionRequestHandler</a:t>
+            </a:r>
+            <a:r>
+              <a:rPr lang="en-IN" dirty="0"/>
+              <a:t> handler) {</a:t>
+            </a:r>
+          </a:p>
+          <a:p>
+            <a:r>
+              <a:rPr lang="en-IN" dirty="0"/>
+              <a:t>    return </a:t>
+            </a:r>
+            <a:r>
+              <a:rPr lang="en-IN" dirty="0" err="1"/>
+              <a:t>IntegrationFlow.from</a:t>
+            </a:r>
+            <a:r>
+              <a:rPr lang="en-IN" dirty="0"/>
+              <a:t>(</a:t>
+            </a:r>
+            <a:r>
+              <a:rPr lang="en-IN" dirty="0" err="1"/>
+              <a:t>workerRequests</a:t>
+            </a:r>
+            <a:r>
+              <a:rPr lang="en-IN" dirty="0"/>
+              <a:t>())</a:t>
+            </a:r>
+          </a:p>
+          <a:p>
+            <a:r>
+              <a:rPr lang="en-IN" dirty="0"/>
+              <a:t>            .handle(handler)</a:t>
+            </a:r>
+          </a:p>
+          <a:p>
+            <a:r>
+              <a:rPr lang="en-IN" dirty="0"/>
+              <a:t>            .channel(</a:t>
+            </a:r>
+            <a:r>
+              <a:rPr lang="en-IN" dirty="0" err="1"/>
+              <a:t>workerReplies</a:t>
+            </a:r>
+            <a:r>
+              <a:rPr lang="en-IN" dirty="0"/>
+              <a:t>())</a:t>
+            </a:r>
+          </a:p>
+          <a:p>
+            <a:r>
+              <a:rPr lang="en-IN" dirty="0"/>
+              <a:t>            .get();</a:t>
+            </a:r>
+          </a:p>
+          <a:p>
+            <a:r>
+              <a:rPr lang="en-IN" dirty="0"/>
+              <a:t>}</a:t>
+            </a:r>
+          </a:p>
+        </p:txBody>
+      </p:sp>
+      <p:sp>
+        <p:nvSpPr>
+          <p:cNvPr id="7" name="TextBox 6">
+            <a:extLst>
+              <a:ext uri="{FF2B5EF4-FFF2-40B4-BE49-F238E27FC236}">
+                <a16:creationId xmlns:a16="http://schemas.microsoft.com/office/drawing/2014/main" id="{7F1B37EB-31E6-02B2-3B18-919D46BF6740}"/>
+              </a:ext>
+            </a:extLst>
+          </p:cNvPr>
+          <p:cNvSpPr txBox="1"/>
+          <p:nvPr/>
+        </p:nvSpPr>
+        <p:spPr>
+          <a:xfrm>
+            <a:off x="588003" y="446123"/>
+            <a:ext cx="7798072" cy="461665"/>
+          </a:xfrm>
+          <a:prstGeom prst="rect">
+            <a:avLst/>
+          </a:prstGeom>
+          <a:noFill/>
+        </p:spPr>
+        <p:txBody>
+          <a:bodyPr wrap="square">
+            <a:spAutoFit/>
+          </a:bodyPr>
+          <a:lstStyle/>
+          <a:p>
+            <a:r>
+              <a:rPr lang="en-IN" sz="2400" b="1" i="0" dirty="0">
+                <a:solidFill>
+                  <a:srgbClr val="FF0000"/>
+                </a:solidFill>
+                <a:effectLst/>
+                <a:latin typeface="Inter"/>
+              </a:rPr>
+              <a:t>Worker Configuration</a:t>
+            </a:r>
+            <a:r>
+              <a:rPr lang="en-IN" sz="2400" b="1" dirty="0">
+                <a:solidFill>
+                  <a:srgbClr val="FF0000"/>
+                </a:solidFill>
+                <a:latin typeface="Inter"/>
+              </a:rPr>
+              <a:t> In </a:t>
+            </a:r>
+            <a:r>
+              <a:rPr lang="en-US" sz="2400" b="1" dirty="0">
+                <a:solidFill>
+                  <a:srgbClr val="FF0000"/>
+                </a:solidFill>
+              </a:rPr>
+              <a:t>Remote Partitioning</a:t>
+            </a:r>
+            <a:endParaRPr lang="en-IN" sz="2400" dirty="0">
+              <a:solidFill>
+                <a:srgbClr val="FF0000"/>
+              </a:solidFill>
+            </a:endParaRPr>
+          </a:p>
+        </p:txBody>
+      </p:sp>
+    </p:spTree>
+    <p:extLst>
+      <p:ext uri="{BB962C8B-B14F-4D97-AF65-F5344CB8AC3E}">
+        <p14:creationId xmlns:p14="http://schemas.microsoft.com/office/powerpoint/2010/main" val="3612220153"/>
+      </p:ext>
+    </p:extLst>
+  </p:cSld>
+  <p:clrMapOvr>
+    <a:masterClrMapping/>
+  </p:clrMapOvr>
+</p:sld>
+</file>
+
+<file path=ppt/slides/slide29.xml><?xml version="1.0" encoding="utf-8"?>
 <p:sld xmlns:a="http://schemas.openxmlformats.org/drawingml/2006/main" xmlns:r="http://schemas.openxmlformats.org/officeDocument/2006/relationships" xmlns:p="http://schemas.openxmlformats.org/presentationml/2006/main">
   <p:cSld>
     <p:spTree>
@@ -15742,6 +17717,59 @@
           <a:bodyPr/>
           <a:lstStyle/>
           <a:p>
+            <a:pPr marL="0" indent="0">
+              <a:buNone/>
+            </a:pPr>
+            <a:r>
+              <a:rPr lang="en-US" b="1" dirty="0"/>
+              <a:t>Job Repository</a:t>
+            </a:r>
+          </a:p>
+          <a:p>
+            <a:r>
+              <a:rPr lang="en-US" dirty="0"/>
+              <a:t>Even when using Integration, Spring Batch needs a database to store the state of the job. If the integration flow triggers a job that fails, the metadata in the DB allows it to restart from where it left off.</a:t>
+            </a:r>
+          </a:p>
+          <a:p>
+            <a:pPr marL="0" indent="0">
+              <a:buNone/>
+            </a:pPr>
+            <a:r>
+              <a:rPr lang="en-US" b="1" dirty="0" err="1"/>
+              <a:t>JobLaunchRequest</a:t>
+            </a:r>
+            <a:endParaRPr lang="en-US" b="1" dirty="0"/>
+          </a:p>
+          <a:p>
+            <a:r>
+              <a:rPr lang="en-US" dirty="0"/>
+              <a:t>This is the standard DTO used to bridge the two frameworks. It contains:</a:t>
+            </a:r>
+          </a:p>
+          <a:p>
+            <a:pPr lvl="1"/>
+            <a:r>
+              <a:rPr lang="en-US" dirty="0"/>
+              <a:t>The Job object to be executed.</a:t>
+            </a:r>
+          </a:p>
+          <a:p>
+            <a:pPr lvl="1"/>
+            <a:r>
+              <a:rPr lang="en-US" dirty="0"/>
+              <a:t>The </a:t>
+            </a:r>
+            <a:r>
+              <a:rPr lang="en-US" dirty="0" err="1"/>
+              <a:t>JobParameters</a:t>
+            </a:r>
+            <a:r>
+              <a:rPr lang="en-US" dirty="0"/>
+              <a:t> required for the job.</a:t>
+            </a:r>
+          </a:p>
+          <a:p>
             <a:endParaRPr lang="en-IN" dirty="0"/>
           </a:p>
         </p:txBody>
@@ -15750,370 +17778,6 @@
     <p:extLst>
       <p:ext uri="{BB962C8B-B14F-4D97-AF65-F5344CB8AC3E}">
         <p14:creationId xmlns:p14="http://schemas.microsoft.com/office/powerpoint/2010/main" val="2588121815"/>
-      </p:ext>
-    </p:extLst>
-  </p:cSld>
-  <p:clrMapOvr>
-    <a:masterClrMapping/>
-  </p:clrMapOvr>
-</p:sld>
-</file>
-
-<file path=ppt/slides/slide26.xml><?xml version="1.0" encoding="utf-8"?>
-<p:sld xmlns:a="http://schemas.openxmlformats.org/drawingml/2006/main" xmlns:r="http://schemas.openxmlformats.org/officeDocument/2006/relationships" xmlns:p="http://schemas.openxmlformats.org/presentationml/2006/main">
-  <p:cSld>
-    <p:spTree>
-      <p:nvGrpSpPr>
-        <p:cNvPr id="1" name="">
-          <a:extLst>
-            <a:ext uri="{FF2B5EF4-FFF2-40B4-BE49-F238E27FC236}">
-              <a16:creationId xmlns:a16="http://schemas.microsoft.com/office/drawing/2014/main" id="{42351A9A-F945-4D2D-0C41-BDBBF607C4EA}"/>
-            </a:ext>
-          </a:extLst>
-        </p:cNvPr>
-        <p:cNvGrpSpPr/>
-        <p:nvPr/>
-      </p:nvGrpSpPr>
-      <p:grpSpPr>
-        <a:xfrm>
-          <a:off x="0" y="0"/>
-          <a:ext cx="0" cy="0"/>
-          <a:chOff x="0" y="0"/>
-          <a:chExt cx="0" cy="0"/>
-        </a:xfrm>
-      </p:grpSpPr>
-      <p:sp>
-        <p:nvSpPr>
-          <p:cNvPr id="2" name="Title 1">
-            <a:extLst>
-              <a:ext uri="{FF2B5EF4-FFF2-40B4-BE49-F238E27FC236}">
-                <a16:creationId xmlns:a16="http://schemas.microsoft.com/office/drawing/2014/main" id="{11DEFE6B-53FF-6DB1-B0B5-DE5DFB9F6DC8}"/>
-              </a:ext>
-            </a:extLst>
-          </p:cNvPr>
-          <p:cNvSpPr>
-            <a:spLocks noGrp="1"/>
-          </p:cNvSpPr>
-          <p:nvPr>
-            <p:ph type="title"/>
-          </p:nvPr>
-        </p:nvSpPr>
-        <p:spPr/>
-        <p:txBody>
-          <a:bodyPr/>
-          <a:lstStyle/>
-          <a:p>
-            <a:endParaRPr lang="en-IN"/>
-          </a:p>
-        </p:txBody>
-      </p:sp>
-      <p:sp>
-        <p:nvSpPr>
-          <p:cNvPr id="3" name="Content Placeholder 2">
-            <a:extLst>
-              <a:ext uri="{FF2B5EF4-FFF2-40B4-BE49-F238E27FC236}">
-                <a16:creationId xmlns:a16="http://schemas.microsoft.com/office/drawing/2014/main" id="{ABF2C6E3-E11C-2976-1290-7CF94A92BB6A}"/>
-              </a:ext>
-            </a:extLst>
-          </p:cNvPr>
-          <p:cNvSpPr>
-            <a:spLocks noGrp="1"/>
-          </p:cNvSpPr>
-          <p:nvPr>
-            <p:ph idx="1"/>
-          </p:nvPr>
-        </p:nvSpPr>
-        <p:spPr>
-          <a:xfrm>
-            <a:off x="1154954" y="2603499"/>
-            <a:ext cx="10497534" cy="3948885"/>
-          </a:xfrm>
-        </p:spPr>
-        <p:txBody>
-          <a:bodyPr/>
-          <a:lstStyle/>
-          <a:p>
-            <a:endParaRPr lang="en-IN" dirty="0"/>
-          </a:p>
-        </p:txBody>
-      </p:sp>
-    </p:spTree>
-    <p:extLst>
-      <p:ext uri="{BB962C8B-B14F-4D97-AF65-F5344CB8AC3E}">
-        <p14:creationId xmlns:p14="http://schemas.microsoft.com/office/powerpoint/2010/main" val="3655592495"/>
-      </p:ext>
-    </p:extLst>
-  </p:cSld>
-  <p:clrMapOvr>
-    <a:masterClrMapping/>
-  </p:clrMapOvr>
-</p:sld>
-</file>
-
-<file path=ppt/slides/slide27.xml><?xml version="1.0" encoding="utf-8"?>
-<p:sld xmlns:a="http://schemas.openxmlformats.org/drawingml/2006/main" xmlns:r="http://schemas.openxmlformats.org/officeDocument/2006/relationships" xmlns:p="http://schemas.openxmlformats.org/presentationml/2006/main">
-  <p:cSld>
-    <p:spTree>
-      <p:nvGrpSpPr>
-        <p:cNvPr id="1" name="">
-          <a:extLst>
-            <a:ext uri="{FF2B5EF4-FFF2-40B4-BE49-F238E27FC236}">
-              <a16:creationId xmlns:a16="http://schemas.microsoft.com/office/drawing/2014/main" id="{5AEE0495-DE40-12EE-4222-9944582012A7}"/>
-            </a:ext>
-          </a:extLst>
-        </p:cNvPr>
-        <p:cNvGrpSpPr/>
-        <p:nvPr/>
-      </p:nvGrpSpPr>
-      <p:grpSpPr>
-        <a:xfrm>
-          <a:off x="0" y="0"/>
-          <a:ext cx="0" cy="0"/>
-          <a:chOff x="0" y="0"/>
-          <a:chExt cx="0" cy="0"/>
-        </a:xfrm>
-      </p:grpSpPr>
-      <p:sp>
-        <p:nvSpPr>
-          <p:cNvPr id="2" name="Title 1">
-            <a:extLst>
-              <a:ext uri="{FF2B5EF4-FFF2-40B4-BE49-F238E27FC236}">
-                <a16:creationId xmlns:a16="http://schemas.microsoft.com/office/drawing/2014/main" id="{86172B15-9D45-5974-4DA7-5E1ABEBA039B}"/>
-              </a:ext>
-            </a:extLst>
-          </p:cNvPr>
-          <p:cNvSpPr>
-            <a:spLocks noGrp="1"/>
-          </p:cNvSpPr>
-          <p:nvPr>
-            <p:ph type="title"/>
-          </p:nvPr>
-        </p:nvSpPr>
-        <p:spPr/>
-        <p:txBody>
-          <a:bodyPr/>
-          <a:lstStyle/>
-          <a:p>
-            <a:endParaRPr lang="en-IN"/>
-          </a:p>
-        </p:txBody>
-      </p:sp>
-      <p:sp>
-        <p:nvSpPr>
-          <p:cNvPr id="3" name="Content Placeholder 2">
-            <a:extLst>
-              <a:ext uri="{FF2B5EF4-FFF2-40B4-BE49-F238E27FC236}">
-                <a16:creationId xmlns:a16="http://schemas.microsoft.com/office/drawing/2014/main" id="{86147B55-AC13-F811-9F8E-1DF12B0FE0C0}"/>
-              </a:ext>
-            </a:extLst>
-          </p:cNvPr>
-          <p:cNvSpPr>
-            <a:spLocks noGrp="1"/>
-          </p:cNvSpPr>
-          <p:nvPr>
-            <p:ph idx="1"/>
-          </p:nvPr>
-        </p:nvSpPr>
-        <p:spPr>
-          <a:xfrm>
-            <a:off x="1154954" y="2603499"/>
-            <a:ext cx="10497534" cy="3948885"/>
-          </a:xfrm>
-        </p:spPr>
-        <p:txBody>
-          <a:bodyPr/>
-          <a:lstStyle/>
-          <a:p>
-            <a:endParaRPr lang="en-IN" dirty="0"/>
-          </a:p>
-        </p:txBody>
-      </p:sp>
-    </p:spTree>
-    <p:extLst>
-      <p:ext uri="{BB962C8B-B14F-4D97-AF65-F5344CB8AC3E}">
-        <p14:creationId xmlns:p14="http://schemas.microsoft.com/office/powerpoint/2010/main" val="2300890093"/>
-      </p:ext>
-    </p:extLst>
-  </p:cSld>
-  <p:clrMapOvr>
-    <a:masterClrMapping/>
-  </p:clrMapOvr>
-</p:sld>
-</file>
-
-<file path=ppt/slides/slide28.xml><?xml version="1.0" encoding="utf-8"?>
-<p:sld xmlns:a="http://schemas.openxmlformats.org/drawingml/2006/main" xmlns:r="http://schemas.openxmlformats.org/officeDocument/2006/relationships" xmlns:p="http://schemas.openxmlformats.org/presentationml/2006/main">
-  <p:cSld>
-    <p:spTree>
-      <p:nvGrpSpPr>
-        <p:cNvPr id="1" name="">
-          <a:extLst>
-            <a:ext uri="{FF2B5EF4-FFF2-40B4-BE49-F238E27FC236}">
-              <a16:creationId xmlns:a16="http://schemas.microsoft.com/office/drawing/2014/main" id="{166CE496-A8AD-9E32-B47A-17CE7DEC2999}"/>
-            </a:ext>
-          </a:extLst>
-        </p:cNvPr>
-        <p:cNvGrpSpPr/>
-        <p:nvPr/>
-      </p:nvGrpSpPr>
-      <p:grpSpPr>
-        <a:xfrm>
-          <a:off x="0" y="0"/>
-          <a:ext cx="0" cy="0"/>
-          <a:chOff x="0" y="0"/>
-          <a:chExt cx="0" cy="0"/>
-        </a:xfrm>
-      </p:grpSpPr>
-      <p:sp>
-        <p:nvSpPr>
-          <p:cNvPr id="2" name="Title 1">
-            <a:extLst>
-              <a:ext uri="{FF2B5EF4-FFF2-40B4-BE49-F238E27FC236}">
-                <a16:creationId xmlns:a16="http://schemas.microsoft.com/office/drawing/2014/main" id="{9E961F95-1227-46C3-B429-6CA08A9F3E65}"/>
-              </a:ext>
-            </a:extLst>
-          </p:cNvPr>
-          <p:cNvSpPr>
-            <a:spLocks noGrp="1"/>
-          </p:cNvSpPr>
-          <p:nvPr>
-            <p:ph type="title"/>
-          </p:nvPr>
-        </p:nvSpPr>
-        <p:spPr/>
-        <p:txBody>
-          <a:bodyPr/>
-          <a:lstStyle/>
-          <a:p>
-            <a:endParaRPr lang="en-IN"/>
-          </a:p>
-        </p:txBody>
-      </p:sp>
-      <p:sp>
-        <p:nvSpPr>
-          <p:cNvPr id="3" name="Content Placeholder 2">
-            <a:extLst>
-              <a:ext uri="{FF2B5EF4-FFF2-40B4-BE49-F238E27FC236}">
-                <a16:creationId xmlns:a16="http://schemas.microsoft.com/office/drawing/2014/main" id="{58C5CB74-7AEF-2CF5-35AB-10D6F5036919}"/>
-              </a:ext>
-            </a:extLst>
-          </p:cNvPr>
-          <p:cNvSpPr>
-            <a:spLocks noGrp="1"/>
-          </p:cNvSpPr>
-          <p:nvPr>
-            <p:ph idx="1"/>
-          </p:nvPr>
-        </p:nvSpPr>
-        <p:spPr>
-          <a:xfrm>
-            <a:off x="1154954" y="2603499"/>
-            <a:ext cx="10497534" cy="3948885"/>
-          </a:xfrm>
-        </p:spPr>
-        <p:txBody>
-          <a:bodyPr/>
-          <a:lstStyle/>
-          <a:p>
-            <a:endParaRPr lang="en-IN" dirty="0"/>
-          </a:p>
-        </p:txBody>
-      </p:sp>
-    </p:spTree>
-    <p:extLst>
-      <p:ext uri="{BB962C8B-B14F-4D97-AF65-F5344CB8AC3E}">
-        <p14:creationId xmlns:p14="http://schemas.microsoft.com/office/powerpoint/2010/main" val="1553074795"/>
-      </p:ext>
-    </p:extLst>
-  </p:cSld>
-  <p:clrMapOvr>
-    <a:masterClrMapping/>
-  </p:clrMapOvr>
-</p:sld>
-</file>
-
-<file path=ppt/slides/slide29.xml><?xml version="1.0" encoding="utf-8"?>
-<p:sld xmlns:a="http://schemas.openxmlformats.org/drawingml/2006/main" xmlns:r="http://schemas.openxmlformats.org/officeDocument/2006/relationships" xmlns:p="http://schemas.openxmlformats.org/presentationml/2006/main">
-  <p:cSld>
-    <p:spTree>
-      <p:nvGrpSpPr>
-        <p:cNvPr id="1" name="">
-          <a:extLst>
-            <a:ext uri="{FF2B5EF4-FFF2-40B4-BE49-F238E27FC236}">
-              <a16:creationId xmlns:a16="http://schemas.microsoft.com/office/drawing/2014/main" id="{9387E2DC-2381-3CFF-D2A1-B75EE8B8B226}"/>
-            </a:ext>
-          </a:extLst>
-        </p:cNvPr>
-        <p:cNvGrpSpPr/>
-        <p:nvPr/>
-      </p:nvGrpSpPr>
-      <p:grpSpPr>
-        <a:xfrm>
-          <a:off x="0" y="0"/>
-          <a:ext cx="0" cy="0"/>
-          <a:chOff x="0" y="0"/>
-          <a:chExt cx="0" cy="0"/>
-        </a:xfrm>
-      </p:grpSpPr>
-      <p:sp>
-        <p:nvSpPr>
-          <p:cNvPr id="2" name="Title 1">
-            <a:extLst>
-              <a:ext uri="{FF2B5EF4-FFF2-40B4-BE49-F238E27FC236}">
-                <a16:creationId xmlns:a16="http://schemas.microsoft.com/office/drawing/2014/main" id="{1844A830-AD8E-179A-4639-7A4440CBBD74}"/>
-              </a:ext>
-            </a:extLst>
-          </p:cNvPr>
-          <p:cNvSpPr>
-            <a:spLocks noGrp="1"/>
-          </p:cNvSpPr>
-          <p:nvPr>
-            <p:ph type="title"/>
-          </p:nvPr>
-        </p:nvSpPr>
-        <p:spPr/>
-        <p:txBody>
-          <a:bodyPr/>
-          <a:lstStyle/>
-          <a:p>
-            <a:endParaRPr lang="en-IN"/>
-          </a:p>
-        </p:txBody>
-      </p:sp>
-      <p:sp>
-        <p:nvSpPr>
-          <p:cNvPr id="3" name="Content Placeholder 2">
-            <a:extLst>
-              <a:ext uri="{FF2B5EF4-FFF2-40B4-BE49-F238E27FC236}">
-                <a16:creationId xmlns:a16="http://schemas.microsoft.com/office/drawing/2014/main" id="{4121B030-64A6-3AF1-2983-2DFCC6320C39}"/>
-              </a:ext>
-            </a:extLst>
-          </p:cNvPr>
-          <p:cNvSpPr>
-            <a:spLocks noGrp="1"/>
-          </p:cNvSpPr>
-          <p:nvPr>
-            <p:ph idx="1"/>
-          </p:nvPr>
-        </p:nvSpPr>
-        <p:spPr>
-          <a:xfrm>
-            <a:off x="1154954" y="2603499"/>
-            <a:ext cx="10497534" cy="3948885"/>
-          </a:xfrm>
-        </p:spPr>
-        <p:txBody>
-          <a:bodyPr/>
-          <a:lstStyle/>
-          <a:p>
-            <a:endParaRPr lang="en-IN" dirty="0"/>
-          </a:p>
-        </p:txBody>
-      </p:sp>
-    </p:spTree>
-    <p:extLst>
-      <p:ext uri="{BB962C8B-B14F-4D97-AF65-F5344CB8AC3E}">
-        <p14:creationId xmlns:p14="http://schemas.microsoft.com/office/powerpoint/2010/main" val="799303790"/>
       </p:ext>
     </p:extLst>
   </p:cSld>
@@ -16260,6 +17924,1057 @@
         <p:cNvPr id="1" name="">
           <a:extLst>
             <a:ext uri="{FF2B5EF4-FFF2-40B4-BE49-F238E27FC236}">
+              <a16:creationId xmlns:a16="http://schemas.microsoft.com/office/drawing/2014/main" id="{42351A9A-F945-4D2D-0C41-BDBBF607C4EA}"/>
+            </a:ext>
+          </a:extLst>
+        </p:cNvPr>
+        <p:cNvGrpSpPr/>
+        <p:nvPr/>
+      </p:nvGrpSpPr>
+      <p:grpSpPr>
+        <a:xfrm>
+          <a:off x="0" y="0"/>
+          <a:ext cx="0" cy="0"/>
+          <a:chOff x="0" y="0"/>
+          <a:chExt cx="0" cy="0"/>
+        </a:xfrm>
+      </p:grpSpPr>
+      <p:sp>
+        <p:nvSpPr>
+          <p:cNvPr id="2" name="Title 1">
+            <a:extLst>
+              <a:ext uri="{FF2B5EF4-FFF2-40B4-BE49-F238E27FC236}">
+                <a16:creationId xmlns:a16="http://schemas.microsoft.com/office/drawing/2014/main" id="{11DEFE6B-53FF-6DB1-B0B5-DE5DFB9F6DC8}"/>
+              </a:ext>
+            </a:extLst>
+          </p:cNvPr>
+          <p:cNvSpPr>
+            <a:spLocks noGrp="1"/>
+          </p:cNvSpPr>
+          <p:nvPr>
+            <p:ph type="title"/>
+          </p:nvPr>
+        </p:nvSpPr>
+        <p:spPr/>
+        <p:txBody>
+          <a:bodyPr/>
+          <a:lstStyle/>
+          <a:p>
+            <a:r>
+              <a:rPr lang="en-IN" b="1" dirty="0"/>
+              <a:t>Handling Job Results</a:t>
+            </a:r>
+            <a:endParaRPr lang="en-IN" dirty="0"/>
+          </a:p>
+        </p:txBody>
+      </p:sp>
+      <p:sp>
+        <p:nvSpPr>
+          <p:cNvPr id="3" name="Content Placeholder 2">
+            <a:extLst>
+              <a:ext uri="{FF2B5EF4-FFF2-40B4-BE49-F238E27FC236}">
+                <a16:creationId xmlns:a16="http://schemas.microsoft.com/office/drawing/2014/main" id="{ABF2C6E3-E11C-2976-1290-7CF94A92BB6A}"/>
+              </a:ext>
+            </a:extLst>
+          </p:cNvPr>
+          <p:cNvSpPr>
+            <a:spLocks noGrp="1"/>
+          </p:cNvSpPr>
+          <p:nvPr>
+            <p:ph idx="1"/>
+          </p:nvPr>
+        </p:nvSpPr>
+        <p:spPr>
+          <a:xfrm>
+            <a:off x="1154954" y="2603499"/>
+            <a:ext cx="10497534" cy="3948885"/>
+          </a:xfrm>
+        </p:spPr>
+        <p:txBody>
+          <a:bodyPr/>
+          <a:lstStyle/>
+          <a:p>
+            <a:r>
+              <a:rPr lang="en-IN" dirty="0"/>
+              <a:t>After </a:t>
+            </a:r>
+            <a:r>
+              <a:rPr lang="en-IN" dirty="0" err="1"/>
+              <a:t>JobLaunchingMessageHandler</a:t>
+            </a:r>
+            <a:r>
+              <a:rPr lang="en-IN" dirty="0"/>
+              <a:t> runs, it returns a </a:t>
+            </a:r>
+            <a:r>
+              <a:rPr lang="en-IN" dirty="0" err="1"/>
+              <a:t>JobExecution</a:t>
+            </a:r>
+            <a:r>
+              <a:rPr lang="en-IN" dirty="0"/>
+              <a:t> object. You can route this back into an Integration flow to send notification emails or log status.</a:t>
+            </a:r>
+          </a:p>
+          <a:p>
+            <a:pPr marL="0" indent="0">
+              <a:buNone/>
+            </a:pPr>
+            <a:r>
+              <a:rPr lang="en-IN" b="1" dirty="0">
+                <a:solidFill>
+                  <a:srgbClr val="FF0000"/>
+                </a:solidFill>
+              </a:rPr>
+              <a:t>.handle(</a:t>
+            </a:r>
+            <a:r>
+              <a:rPr lang="en-IN" b="1" dirty="0" err="1">
+                <a:solidFill>
+                  <a:srgbClr val="FF0000"/>
+                </a:solidFill>
+              </a:rPr>
+              <a:t>jobLaunchingMessageHandler</a:t>
+            </a:r>
+            <a:r>
+              <a:rPr lang="en-IN" b="1" dirty="0">
+                <a:solidFill>
+                  <a:srgbClr val="FF0000"/>
+                </a:solidFill>
+              </a:rPr>
+              <a:t>)</a:t>
+            </a:r>
+          </a:p>
+          <a:p>
+            <a:pPr marL="0" indent="0">
+              <a:buNone/>
+            </a:pPr>
+            <a:r>
+              <a:rPr lang="en-IN" b="1" dirty="0">
+                <a:solidFill>
+                  <a:srgbClr val="FF0000"/>
+                </a:solidFill>
+              </a:rPr>
+              <a:t>.route(</a:t>
+            </a:r>
+            <a:r>
+              <a:rPr lang="en-IN" b="1" dirty="0" err="1">
+                <a:solidFill>
+                  <a:srgbClr val="FF0000"/>
+                </a:solidFill>
+              </a:rPr>
+              <a:t>JobExecution.class</a:t>
+            </a:r>
+            <a:r>
+              <a:rPr lang="en-IN" b="1" dirty="0">
+                <a:solidFill>
+                  <a:srgbClr val="FF0000"/>
+                </a:solidFill>
+              </a:rPr>
+              <a:t>, </a:t>
+            </a:r>
+            <a:r>
+              <a:rPr lang="en-IN" b="1" dirty="0" err="1">
+                <a:solidFill>
+                  <a:srgbClr val="FF0000"/>
+                </a:solidFill>
+              </a:rPr>
+              <a:t>jobExecution</a:t>
+            </a:r>
+            <a:r>
+              <a:rPr lang="en-IN" b="1" dirty="0">
+                <a:solidFill>
+                  <a:srgbClr val="FF0000"/>
+                </a:solidFill>
+              </a:rPr>
+              <a:t> -&gt; {</a:t>
+            </a:r>
+          </a:p>
+          <a:p>
+            <a:pPr marL="0" indent="0">
+              <a:buNone/>
+            </a:pPr>
+            <a:r>
+              <a:rPr lang="en-IN" b="1" dirty="0">
+                <a:solidFill>
+                  <a:srgbClr val="FF0000"/>
+                </a:solidFill>
+              </a:rPr>
+              <a:t>    return </a:t>
+            </a:r>
+            <a:r>
+              <a:rPr lang="en-IN" b="1" dirty="0" err="1">
+                <a:solidFill>
+                  <a:srgbClr val="FF0000"/>
+                </a:solidFill>
+              </a:rPr>
+              <a:t>jobExecution.getStatus</a:t>
+            </a:r>
+            <a:r>
+              <a:rPr lang="en-IN" b="1" dirty="0">
+                <a:solidFill>
+                  <a:srgbClr val="FF0000"/>
+                </a:solidFill>
+              </a:rPr>
+              <a:t>() == </a:t>
+            </a:r>
+            <a:r>
+              <a:rPr lang="en-IN" b="1" dirty="0" err="1">
+                <a:solidFill>
+                  <a:srgbClr val="FF0000"/>
+                </a:solidFill>
+              </a:rPr>
+              <a:t>BatchStatus.COMPLETED</a:t>
+            </a:r>
+            <a:r>
+              <a:rPr lang="en-IN" b="1" dirty="0">
+                <a:solidFill>
+                  <a:srgbClr val="FF0000"/>
+                </a:solidFill>
+              </a:rPr>
+              <a:t> ? "</a:t>
+            </a:r>
+            <a:r>
+              <a:rPr lang="en-IN" b="1" dirty="0" err="1">
+                <a:solidFill>
+                  <a:srgbClr val="FF0000"/>
+                </a:solidFill>
+              </a:rPr>
+              <a:t>successChannel</a:t>
+            </a:r>
+            <a:r>
+              <a:rPr lang="en-IN" b="1" dirty="0">
+                <a:solidFill>
+                  <a:srgbClr val="FF0000"/>
+                </a:solidFill>
+              </a:rPr>
+              <a:t>" : "</a:t>
+            </a:r>
+            <a:r>
+              <a:rPr lang="en-IN" b="1" dirty="0" err="1">
+                <a:solidFill>
+                  <a:srgbClr val="FF0000"/>
+                </a:solidFill>
+              </a:rPr>
+              <a:t>errorChannel</a:t>
+            </a:r>
+            <a:r>
+              <a:rPr lang="en-IN" b="1" dirty="0">
+                <a:solidFill>
+                  <a:srgbClr val="FF0000"/>
+                </a:solidFill>
+              </a:rPr>
+              <a:t>";</a:t>
+            </a:r>
+          </a:p>
+          <a:p>
+            <a:pPr marL="0" indent="0">
+              <a:buNone/>
+            </a:pPr>
+            <a:r>
+              <a:rPr lang="en-IN" b="1" dirty="0">
+                <a:solidFill>
+                  <a:srgbClr val="FF0000"/>
+                </a:solidFill>
+              </a:rPr>
+              <a:t>})</a:t>
+            </a:r>
+          </a:p>
+          <a:p>
+            <a:endParaRPr lang="en-IN" dirty="0"/>
+          </a:p>
+        </p:txBody>
+      </p:sp>
+    </p:spTree>
+    <p:extLst>
+      <p:ext uri="{BB962C8B-B14F-4D97-AF65-F5344CB8AC3E}">
+        <p14:creationId xmlns:p14="http://schemas.microsoft.com/office/powerpoint/2010/main" val="3655592495"/>
+      </p:ext>
+    </p:extLst>
+  </p:cSld>
+  <p:clrMapOvr>
+    <a:masterClrMapping/>
+  </p:clrMapOvr>
+</p:sld>
+</file>
+
+<file path=ppt/slides/slide31.xml><?xml version="1.0" encoding="utf-8"?>
+<p:sld xmlns:a="http://schemas.openxmlformats.org/drawingml/2006/main" xmlns:r="http://schemas.openxmlformats.org/officeDocument/2006/relationships" xmlns:p="http://schemas.openxmlformats.org/presentationml/2006/main">
+  <p:cSld>
+    <p:spTree>
+      <p:nvGrpSpPr>
+        <p:cNvPr id="1" name="">
+          <a:extLst>
+            <a:ext uri="{FF2B5EF4-FFF2-40B4-BE49-F238E27FC236}">
+              <a16:creationId xmlns:a16="http://schemas.microsoft.com/office/drawing/2014/main" id="{5AEE0495-DE40-12EE-4222-9944582012A7}"/>
+            </a:ext>
+          </a:extLst>
+        </p:cNvPr>
+        <p:cNvGrpSpPr/>
+        <p:nvPr/>
+      </p:nvGrpSpPr>
+      <p:grpSpPr>
+        <a:xfrm>
+          <a:off x="0" y="0"/>
+          <a:ext cx="0" cy="0"/>
+          <a:chOff x="0" y="0"/>
+          <a:chExt cx="0" cy="0"/>
+        </a:xfrm>
+      </p:grpSpPr>
+      <p:sp>
+        <p:nvSpPr>
+          <p:cNvPr id="2" name="Title 1">
+            <a:extLst>
+              <a:ext uri="{FF2B5EF4-FFF2-40B4-BE49-F238E27FC236}">
+                <a16:creationId xmlns:a16="http://schemas.microsoft.com/office/drawing/2014/main" id="{86172B15-9D45-5974-4DA7-5E1ABEBA039B}"/>
+              </a:ext>
+            </a:extLst>
+          </p:cNvPr>
+          <p:cNvSpPr>
+            <a:spLocks noGrp="1"/>
+          </p:cNvSpPr>
+          <p:nvPr>
+            <p:ph type="title"/>
+          </p:nvPr>
+        </p:nvSpPr>
+        <p:spPr/>
+        <p:txBody>
+          <a:bodyPr/>
+          <a:lstStyle/>
+          <a:p>
+            <a:r>
+              <a:rPr lang="en-US" b="1" dirty="0"/>
+              <a:t>Idempotency &amp; Message Loss</a:t>
+            </a:r>
+            <a:br>
+              <a:rPr lang="en-US" b="1" dirty="0"/>
+            </a:br>
+            <a:endParaRPr lang="en-IN" dirty="0"/>
+          </a:p>
+        </p:txBody>
+      </p:sp>
+      <p:sp>
+        <p:nvSpPr>
+          <p:cNvPr id="3" name="Content Placeholder 2">
+            <a:extLst>
+              <a:ext uri="{FF2B5EF4-FFF2-40B4-BE49-F238E27FC236}">
+                <a16:creationId xmlns:a16="http://schemas.microsoft.com/office/drawing/2014/main" id="{86147B55-AC13-F811-9F8E-1DF12B0FE0C0}"/>
+              </a:ext>
+            </a:extLst>
+          </p:cNvPr>
+          <p:cNvSpPr>
+            <a:spLocks noGrp="1"/>
+          </p:cNvSpPr>
+          <p:nvPr>
+            <p:ph idx="1"/>
+          </p:nvPr>
+        </p:nvSpPr>
+        <p:spPr>
+          <a:xfrm>
+            <a:off x="1154954" y="2603499"/>
+            <a:ext cx="10497534" cy="3948885"/>
+          </a:xfrm>
+        </p:spPr>
+        <p:txBody>
+          <a:bodyPr/>
+          <a:lstStyle/>
+          <a:p>
+            <a:r>
+              <a:rPr lang="en-US" b="1" dirty="0"/>
+              <a:t> I</a:t>
+            </a:r>
+            <a:r>
+              <a:rPr lang="en-US" dirty="0"/>
+              <a:t>n high-level production environments, if a message triggers a batch job and the system crashes:</a:t>
+            </a:r>
+          </a:p>
+          <a:p>
+            <a:r>
+              <a:rPr lang="en-US" dirty="0"/>
+              <a:t>Use </a:t>
+            </a:r>
+            <a:r>
+              <a:rPr lang="en-US" b="1" dirty="0"/>
+              <a:t>Transactional Channels</a:t>
+            </a:r>
+            <a:r>
+              <a:rPr lang="en-US" dirty="0"/>
+              <a:t> (JMS/JDBC).</a:t>
+            </a:r>
+          </a:p>
+          <a:p>
+            <a:r>
+              <a:rPr lang="en-US" dirty="0"/>
+              <a:t>Ensure the Batch Job is </a:t>
+            </a:r>
+            <a:r>
+              <a:rPr lang="en-US" b="1" dirty="0"/>
+              <a:t>idempotent</a:t>
+            </a:r>
+            <a:r>
+              <a:rPr lang="en-US" dirty="0"/>
+              <a:t> (running it twice with the same parameters doesn't duplicate data).</a:t>
+            </a:r>
+          </a:p>
+          <a:p>
+            <a:endParaRPr lang="en-IN" dirty="0"/>
+          </a:p>
+        </p:txBody>
+      </p:sp>
+    </p:spTree>
+    <p:extLst>
+      <p:ext uri="{BB962C8B-B14F-4D97-AF65-F5344CB8AC3E}">
+        <p14:creationId xmlns:p14="http://schemas.microsoft.com/office/powerpoint/2010/main" val="2300890093"/>
+      </p:ext>
+    </p:extLst>
+  </p:cSld>
+  <p:clrMapOvr>
+    <a:masterClrMapping/>
+  </p:clrMapOvr>
+</p:sld>
+</file>
+
+<file path=ppt/slides/slide32.xml><?xml version="1.0" encoding="utf-8"?>
+<p:sld xmlns:a="http://schemas.openxmlformats.org/drawingml/2006/main" xmlns:r="http://schemas.openxmlformats.org/officeDocument/2006/relationships" xmlns:p="http://schemas.openxmlformats.org/presentationml/2006/main">
+  <p:cSld>
+    <p:spTree>
+      <p:nvGrpSpPr>
+        <p:cNvPr id="1" name="">
+          <a:extLst>
+            <a:ext uri="{FF2B5EF4-FFF2-40B4-BE49-F238E27FC236}">
+              <a16:creationId xmlns:a16="http://schemas.microsoft.com/office/drawing/2014/main" id="{166CE496-A8AD-9E32-B47A-17CE7DEC2999}"/>
+            </a:ext>
+          </a:extLst>
+        </p:cNvPr>
+        <p:cNvGrpSpPr/>
+        <p:nvPr/>
+      </p:nvGrpSpPr>
+      <p:grpSpPr>
+        <a:xfrm>
+          <a:off x="0" y="0"/>
+          <a:ext cx="0" cy="0"/>
+          <a:chOff x="0" y="0"/>
+          <a:chExt cx="0" cy="0"/>
+        </a:xfrm>
+      </p:grpSpPr>
+      <p:sp>
+        <p:nvSpPr>
+          <p:cNvPr id="2" name="Title 1">
+            <a:extLst>
+              <a:ext uri="{FF2B5EF4-FFF2-40B4-BE49-F238E27FC236}">
+                <a16:creationId xmlns:a16="http://schemas.microsoft.com/office/drawing/2014/main" id="{9E961F95-1227-46C3-B429-6CA08A9F3E65}"/>
+              </a:ext>
+            </a:extLst>
+          </p:cNvPr>
+          <p:cNvSpPr>
+            <a:spLocks noGrp="1"/>
+          </p:cNvSpPr>
+          <p:nvPr>
+            <p:ph type="title"/>
+          </p:nvPr>
+        </p:nvSpPr>
+        <p:spPr/>
+        <p:txBody>
+          <a:bodyPr/>
+          <a:lstStyle/>
+          <a:p>
+            <a:r>
+              <a:rPr lang="en-IN" dirty="0"/>
+              <a:t>Features of Spring Batch</a:t>
+            </a:r>
+          </a:p>
+        </p:txBody>
+      </p:sp>
+      <p:graphicFrame>
+        <p:nvGraphicFramePr>
+          <p:cNvPr id="4" name="Content Placeholder 3">
+            <a:extLst>
+              <a:ext uri="{FF2B5EF4-FFF2-40B4-BE49-F238E27FC236}">
+                <a16:creationId xmlns:a16="http://schemas.microsoft.com/office/drawing/2014/main" id="{917953EF-F7F9-AA64-178F-0059DF521DAE}"/>
+              </a:ext>
+            </a:extLst>
+          </p:cNvPr>
+          <p:cNvGraphicFramePr>
+            <a:graphicFrameLocks noGrp="1"/>
+          </p:cNvGraphicFramePr>
+          <p:nvPr>
+            <p:ph idx="1"/>
+            <p:extLst>
+              <p:ext uri="{D42A27DB-BD31-4B8C-83A1-F6EECF244321}">
+                <p14:modId xmlns:p14="http://schemas.microsoft.com/office/powerpoint/2010/main" val="2936516405"/>
+              </p:ext>
+            </p:extLst>
+          </p:nvPr>
+        </p:nvGraphicFramePr>
+        <p:xfrm>
+          <a:off x="1155700" y="2603500"/>
+          <a:ext cx="10046922" cy="3621266"/>
+        </p:xfrm>
+        <a:graphic>
+          <a:graphicData uri="http://schemas.openxmlformats.org/drawingml/2006/table">
+            <a:tbl>
+              <a:tblPr firstRow="1" bandRow="1">
+                <a:tableStyleId>{5C22544A-7EE6-4342-B048-85BDC9FD1C3A}</a:tableStyleId>
+              </a:tblPr>
+              <a:tblGrid>
+                <a:gridCol w="3348974">
+                  <a:extLst>
+                    <a:ext uri="{9D8B030D-6E8A-4147-A177-3AD203B41FA5}">
+                      <a16:colId xmlns:a16="http://schemas.microsoft.com/office/drawing/2014/main" val="631551379"/>
+                    </a:ext>
+                  </a:extLst>
+                </a:gridCol>
+                <a:gridCol w="3348974">
+                  <a:extLst>
+                    <a:ext uri="{9D8B030D-6E8A-4147-A177-3AD203B41FA5}">
+                      <a16:colId xmlns:a16="http://schemas.microsoft.com/office/drawing/2014/main" val="742226025"/>
+                    </a:ext>
+                  </a:extLst>
+                </a:gridCol>
+                <a:gridCol w="3348974">
+                  <a:extLst>
+                    <a:ext uri="{9D8B030D-6E8A-4147-A177-3AD203B41FA5}">
+                      <a16:colId xmlns:a16="http://schemas.microsoft.com/office/drawing/2014/main" val="2860422036"/>
+                    </a:ext>
+                  </a:extLst>
+                </a:gridCol>
+              </a:tblGrid>
+              <a:tr h="605618">
+                <a:tc>
+                  <a:txBody>
+                    <a:bodyPr/>
+                    <a:lstStyle/>
+                    <a:p>
+                      <a:pPr>
+                        <a:lnSpc>
+                          <a:spcPts val="1575"/>
+                        </a:lnSpc>
+                        <a:buNone/>
+                      </a:pPr>
+                      <a:r>
+                        <a:rPr lang="en-IN" b="1" dirty="0">
+                          <a:effectLst/>
+                          <a:latin typeface="Inter"/>
+                        </a:rPr>
+                        <a:t>Feature</a:t>
+                      </a:r>
+                    </a:p>
+                  </a:txBody>
+                  <a:tcPr marL="45720" marR="45720" marT="22860" marB="22860" anchor="ctr"/>
+                </a:tc>
+                <a:tc>
+                  <a:txBody>
+                    <a:bodyPr/>
+                    <a:lstStyle/>
+                    <a:p>
+                      <a:pPr>
+                        <a:lnSpc>
+                          <a:spcPts val="1575"/>
+                        </a:lnSpc>
+                        <a:buNone/>
+                      </a:pPr>
+                      <a:r>
+                        <a:rPr lang="en-IN" b="1">
+                          <a:effectLst/>
+                          <a:latin typeface="Inter"/>
+                        </a:rPr>
+                        <a:t>Description</a:t>
+                      </a:r>
+                    </a:p>
+                  </a:txBody>
+                  <a:tcPr marL="45720" marR="45720" marT="22860" marB="22860" anchor="ctr"/>
+                </a:tc>
+                <a:tc>
+                  <a:txBody>
+                    <a:bodyPr/>
+                    <a:lstStyle/>
+                    <a:p>
+                      <a:pPr>
+                        <a:lnSpc>
+                          <a:spcPts val="1575"/>
+                        </a:lnSpc>
+                        <a:buNone/>
+                      </a:pPr>
+                      <a:r>
+                        <a:rPr lang="en-IN" b="1">
+                          <a:effectLst/>
+                          <a:latin typeface="Inter"/>
+                        </a:rPr>
+                        <a:t>Use Case</a:t>
+                      </a:r>
+                    </a:p>
+                  </a:txBody>
+                  <a:tcPr marL="45720" marR="45720" marT="22860" marB="22860" anchor="ctr"/>
+                </a:tc>
+                <a:extLst>
+                  <a:ext uri="{0D108BD9-81ED-4DB2-BD59-A6C34878D82A}">
+                    <a16:rowId xmlns:a16="http://schemas.microsoft.com/office/drawing/2014/main" val="2670010461"/>
+                  </a:ext>
+                </a:extLst>
+              </a:tr>
+              <a:tr h="753912">
+                <a:tc>
+                  <a:txBody>
+                    <a:bodyPr/>
+                    <a:lstStyle/>
+                    <a:p>
+                      <a:pPr>
+                        <a:lnSpc>
+                          <a:spcPts val="1575"/>
+                        </a:lnSpc>
+                        <a:buNone/>
+                      </a:pPr>
+                      <a:r>
+                        <a:rPr lang="en-IN" b="1">
+                          <a:effectLst/>
+                          <a:latin typeface="Inter"/>
+                        </a:rPr>
+                        <a:t>JobLaunchingMessageHandler</a:t>
+                      </a:r>
+                      <a:endParaRPr lang="en-IN" b="0">
+                        <a:effectLst/>
+                        <a:latin typeface="Inter"/>
+                      </a:endParaRPr>
+                    </a:p>
+                  </a:txBody>
+                  <a:tcPr marL="45720" marR="45720" marT="22860" marB="22860" anchor="ctr"/>
+                </a:tc>
+                <a:tc>
+                  <a:txBody>
+                    <a:bodyPr/>
+                    <a:lstStyle/>
+                    <a:p>
+                      <a:pPr>
+                        <a:lnSpc>
+                          <a:spcPts val="1575"/>
+                        </a:lnSpc>
+                        <a:buNone/>
+                      </a:pPr>
+                      <a:r>
+                        <a:rPr lang="en-US" b="0">
+                          <a:effectLst/>
+                          <a:latin typeface="Inter"/>
+                        </a:rPr>
+                        <a:t>Converts message to Batch Job.</a:t>
+                      </a:r>
+                    </a:p>
+                  </a:txBody>
+                  <a:tcPr marL="45720" marR="45720" marT="22860" marB="22860" anchor="ctr"/>
+                </a:tc>
+                <a:tc>
+                  <a:txBody>
+                    <a:bodyPr/>
+                    <a:lstStyle/>
+                    <a:p>
+                      <a:pPr>
+                        <a:lnSpc>
+                          <a:spcPts val="1575"/>
+                        </a:lnSpc>
+                        <a:buNone/>
+                      </a:pPr>
+                      <a:r>
+                        <a:rPr lang="en-US" b="0">
+                          <a:effectLst/>
+                          <a:latin typeface="Inter"/>
+                        </a:rPr>
+                        <a:t>Event-driven batching (File/MQ trigger).</a:t>
+                      </a:r>
+                    </a:p>
+                  </a:txBody>
+                  <a:tcPr marL="45720" marR="45720" marT="22860" marB="22860" anchor="ctr"/>
+                </a:tc>
+                <a:extLst>
+                  <a:ext uri="{0D108BD9-81ED-4DB2-BD59-A6C34878D82A}">
+                    <a16:rowId xmlns:a16="http://schemas.microsoft.com/office/drawing/2014/main" val="4066677363"/>
+                  </a:ext>
+                </a:extLst>
+              </a:tr>
+              <a:tr h="753912">
+                <a:tc>
+                  <a:txBody>
+                    <a:bodyPr/>
+                    <a:lstStyle/>
+                    <a:p>
+                      <a:pPr>
+                        <a:lnSpc>
+                          <a:spcPts val="1575"/>
+                        </a:lnSpc>
+                        <a:buNone/>
+                      </a:pPr>
+                      <a:r>
+                        <a:rPr lang="en-IN" b="1">
+                          <a:effectLst/>
+                          <a:latin typeface="Inter"/>
+                        </a:rPr>
+                        <a:t>IntegrationItemWriter</a:t>
+                      </a:r>
+                      <a:endParaRPr lang="en-IN" b="0">
+                        <a:effectLst/>
+                        <a:latin typeface="Inter"/>
+                      </a:endParaRPr>
+                    </a:p>
+                  </a:txBody>
+                  <a:tcPr marL="45720" marR="45720" marT="22860" marB="22860" anchor="ctr"/>
+                </a:tc>
+                <a:tc>
+                  <a:txBody>
+                    <a:bodyPr/>
+                    <a:lstStyle/>
+                    <a:p>
+                      <a:pPr>
+                        <a:lnSpc>
+                          <a:spcPts val="1575"/>
+                        </a:lnSpc>
+                        <a:buNone/>
+                      </a:pPr>
+                      <a:r>
+                        <a:rPr lang="en-US" b="0">
+                          <a:effectLst/>
+                          <a:latin typeface="Inter"/>
+                        </a:rPr>
+                        <a:t>Sends batch items to a message channel.</a:t>
+                      </a:r>
+                    </a:p>
+                  </a:txBody>
+                  <a:tcPr marL="45720" marR="45720" marT="22860" marB="22860" anchor="ctr"/>
+                </a:tc>
+                <a:tc>
+                  <a:txBody>
+                    <a:bodyPr/>
+                    <a:lstStyle/>
+                    <a:p>
+                      <a:pPr>
+                        <a:lnSpc>
+                          <a:spcPts val="1575"/>
+                        </a:lnSpc>
+                        <a:buNone/>
+                      </a:pPr>
+                      <a:r>
+                        <a:rPr lang="en-US" b="0">
+                          <a:effectLst/>
+                          <a:latin typeface="Inter"/>
+                        </a:rPr>
+                        <a:t>Streaming batch results to other systems.</a:t>
+                      </a:r>
+                    </a:p>
+                  </a:txBody>
+                  <a:tcPr marL="45720" marR="45720" marT="22860" marB="22860" anchor="ctr"/>
+                </a:tc>
+                <a:extLst>
+                  <a:ext uri="{0D108BD9-81ED-4DB2-BD59-A6C34878D82A}">
+                    <a16:rowId xmlns:a16="http://schemas.microsoft.com/office/drawing/2014/main" val="2009631717"/>
+                  </a:ext>
+                </a:extLst>
+              </a:tr>
+              <a:tr h="753912">
+                <a:tc>
+                  <a:txBody>
+                    <a:bodyPr/>
+                    <a:lstStyle/>
+                    <a:p>
+                      <a:pPr>
+                        <a:lnSpc>
+                          <a:spcPts val="1575"/>
+                        </a:lnSpc>
+                        <a:buNone/>
+                      </a:pPr>
+                      <a:r>
+                        <a:rPr lang="en-IN" b="1">
+                          <a:effectLst/>
+                          <a:latin typeface="Inter"/>
+                        </a:rPr>
+                        <a:t>Remote Chunking</a:t>
+                      </a:r>
+                      <a:endParaRPr lang="en-IN" b="0">
+                        <a:effectLst/>
+                        <a:latin typeface="Inter"/>
+                      </a:endParaRPr>
+                    </a:p>
+                  </a:txBody>
+                  <a:tcPr marL="45720" marR="45720" marT="22860" marB="22860" anchor="ctr"/>
+                </a:tc>
+                <a:tc>
+                  <a:txBody>
+                    <a:bodyPr/>
+                    <a:lstStyle/>
+                    <a:p>
+                      <a:pPr>
+                        <a:lnSpc>
+                          <a:spcPts val="1575"/>
+                        </a:lnSpc>
+                        <a:buNone/>
+                      </a:pPr>
+                      <a:r>
+                        <a:rPr lang="en-US" b="0">
+                          <a:effectLst/>
+                          <a:latin typeface="Inter"/>
+                        </a:rPr>
+                        <a:t>Manager sends actual items to workers.</a:t>
+                      </a:r>
+                    </a:p>
+                  </a:txBody>
+                  <a:tcPr marL="45720" marR="45720" marT="22860" marB="22860" anchor="ctr"/>
+                </a:tc>
+                <a:tc>
+                  <a:txBody>
+                    <a:bodyPr/>
+                    <a:lstStyle/>
+                    <a:p>
+                      <a:pPr>
+                        <a:lnSpc>
+                          <a:spcPts val="1575"/>
+                        </a:lnSpc>
+                        <a:buNone/>
+                      </a:pPr>
+                      <a:r>
+                        <a:rPr lang="en-IN" b="0" dirty="0">
+                          <a:effectLst/>
+                          <a:latin typeface="Inter"/>
+                        </a:rPr>
+                        <a:t>Processing-intensive tasks (CPU heavy).</a:t>
+                      </a:r>
+                    </a:p>
+                  </a:txBody>
+                  <a:tcPr marL="45720" marR="45720" marT="22860" marB="22860" anchor="ctr"/>
+                </a:tc>
+                <a:extLst>
+                  <a:ext uri="{0D108BD9-81ED-4DB2-BD59-A6C34878D82A}">
+                    <a16:rowId xmlns:a16="http://schemas.microsoft.com/office/drawing/2014/main" val="2259159601"/>
+                  </a:ext>
+                </a:extLst>
+              </a:tr>
+              <a:tr h="753912">
+                <a:tc>
+                  <a:txBody>
+                    <a:bodyPr/>
+                    <a:lstStyle/>
+                    <a:p>
+                      <a:pPr>
+                        <a:lnSpc>
+                          <a:spcPts val="1575"/>
+                        </a:lnSpc>
+                        <a:buNone/>
+                      </a:pPr>
+                      <a:r>
+                        <a:rPr lang="en-IN" b="1">
+                          <a:effectLst/>
+                          <a:latin typeface="Inter"/>
+                        </a:rPr>
+                        <a:t>Remote Partitioning</a:t>
+                      </a:r>
+                      <a:endParaRPr lang="en-IN" b="0">
+                        <a:effectLst/>
+                        <a:latin typeface="Inter"/>
+                      </a:endParaRPr>
+                    </a:p>
+                  </a:txBody>
+                  <a:tcPr marL="45720" marR="45720" marT="22860" marB="22860" anchor="ctr"/>
+                </a:tc>
+                <a:tc>
+                  <a:txBody>
+                    <a:bodyPr/>
+                    <a:lstStyle/>
+                    <a:p>
+                      <a:pPr>
+                        <a:lnSpc>
+                          <a:spcPts val="1575"/>
+                        </a:lnSpc>
+                        <a:buNone/>
+                      </a:pPr>
+                      <a:r>
+                        <a:rPr lang="en-US" b="0">
+                          <a:effectLst/>
+                          <a:latin typeface="Inter"/>
+                        </a:rPr>
+                        <a:t>Manager sends instructions to workers.</a:t>
+                      </a:r>
+                    </a:p>
+                  </a:txBody>
+                  <a:tcPr marL="45720" marR="45720" marT="22860" marB="22860" anchor="ctr"/>
+                </a:tc>
+                <a:tc>
+                  <a:txBody>
+                    <a:bodyPr/>
+                    <a:lstStyle/>
+                    <a:p>
+                      <a:pPr>
+                        <a:lnSpc>
+                          <a:spcPts val="1575"/>
+                        </a:lnSpc>
+                        <a:buNone/>
+                      </a:pPr>
+                      <a:r>
+                        <a:rPr lang="en-IN" b="0" dirty="0">
+                          <a:effectLst/>
+                          <a:latin typeface="Inter"/>
+                        </a:rPr>
+                        <a:t>Data-intensive tasks (I/O heavy).</a:t>
+                      </a:r>
+                    </a:p>
+                  </a:txBody>
+                  <a:tcPr marL="45720" marR="45720" marT="22860" marB="22860" anchor="ctr"/>
+                </a:tc>
+                <a:extLst>
+                  <a:ext uri="{0D108BD9-81ED-4DB2-BD59-A6C34878D82A}">
+                    <a16:rowId xmlns:a16="http://schemas.microsoft.com/office/drawing/2014/main" val="1558391034"/>
+                  </a:ext>
+                </a:extLst>
+              </a:tr>
+            </a:tbl>
+          </a:graphicData>
+        </a:graphic>
+      </p:graphicFrame>
+    </p:spTree>
+    <p:extLst>
+      <p:ext uri="{BB962C8B-B14F-4D97-AF65-F5344CB8AC3E}">
+        <p14:creationId xmlns:p14="http://schemas.microsoft.com/office/powerpoint/2010/main" val="1553074795"/>
+      </p:ext>
+    </p:extLst>
+  </p:cSld>
+  <p:clrMapOvr>
+    <a:masterClrMapping/>
+  </p:clrMapOvr>
+</p:sld>
+</file>
+
+<file path=ppt/slides/slide33.xml><?xml version="1.0" encoding="utf-8"?>
+<p:sld xmlns:a="http://schemas.openxmlformats.org/drawingml/2006/main" xmlns:r="http://schemas.openxmlformats.org/officeDocument/2006/relationships" xmlns:p="http://schemas.openxmlformats.org/presentationml/2006/main">
+  <p:cSld>
+    <p:spTree>
+      <p:nvGrpSpPr>
+        <p:cNvPr id="1" name="">
+          <a:extLst>
+            <a:ext uri="{FF2B5EF4-FFF2-40B4-BE49-F238E27FC236}">
+              <a16:creationId xmlns:a16="http://schemas.microsoft.com/office/drawing/2014/main" id="{9387E2DC-2381-3CFF-D2A1-B75EE8B8B226}"/>
+            </a:ext>
+          </a:extLst>
+        </p:cNvPr>
+        <p:cNvGrpSpPr/>
+        <p:nvPr/>
+      </p:nvGrpSpPr>
+      <p:grpSpPr>
+        <a:xfrm>
+          <a:off x="0" y="0"/>
+          <a:ext cx="0" cy="0"/>
+          <a:chOff x="0" y="0"/>
+          <a:chExt cx="0" cy="0"/>
+        </a:xfrm>
+      </p:grpSpPr>
+      <p:sp>
+        <p:nvSpPr>
+          <p:cNvPr id="2" name="Title 1">
+            <a:extLst>
+              <a:ext uri="{FF2B5EF4-FFF2-40B4-BE49-F238E27FC236}">
+                <a16:creationId xmlns:a16="http://schemas.microsoft.com/office/drawing/2014/main" id="{1844A830-AD8E-179A-4639-7A4440CBBD74}"/>
+              </a:ext>
+            </a:extLst>
+          </p:cNvPr>
+          <p:cNvSpPr>
+            <a:spLocks noGrp="1"/>
+          </p:cNvSpPr>
+          <p:nvPr>
+            <p:ph type="title"/>
+          </p:nvPr>
+        </p:nvSpPr>
+        <p:spPr/>
+        <p:txBody>
+          <a:bodyPr/>
+          <a:lstStyle/>
+          <a:p>
+            <a:r>
+              <a:rPr lang="en-IN" dirty="0"/>
+              <a:t>Summary</a:t>
+            </a:r>
+          </a:p>
+        </p:txBody>
+      </p:sp>
+      <p:sp>
+        <p:nvSpPr>
+          <p:cNvPr id="3" name="Content Placeholder 2">
+            <a:extLst>
+              <a:ext uri="{FF2B5EF4-FFF2-40B4-BE49-F238E27FC236}">
+                <a16:creationId xmlns:a16="http://schemas.microsoft.com/office/drawing/2014/main" id="{4121B030-64A6-3AF1-2983-2DFCC6320C39}"/>
+              </a:ext>
+            </a:extLst>
+          </p:cNvPr>
+          <p:cNvSpPr>
+            <a:spLocks noGrp="1"/>
+          </p:cNvSpPr>
+          <p:nvPr>
+            <p:ph idx="1"/>
+          </p:nvPr>
+        </p:nvSpPr>
+        <p:spPr>
+          <a:xfrm>
+            <a:off x="1154954" y="2603499"/>
+            <a:ext cx="10497534" cy="3948885"/>
+          </a:xfrm>
+        </p:spPr>
+        <p:txBody>
+          <a:bodyPr/>
+          <a:lstStyle/>
+          <a:p>
+            <a:r>
+              <a:rPr lang="en-US" dirty="0"/>
+              <a:t>Spring Batch in Spring Integration </a:t>
+            </a:r>
+          </a:p>
+          <a:p>
+            <a:pPr lvl="1"/>
+            <a:r>
+              <a:rPr lang="en-US" dirty="0"/>
+              <a:t>turns a static, scheduled process into a dynamic, reactive system.</a:t>
+            </a:r>
+          </a:p>
+          <a:p>
+            <a:pPr lvl="1"/>
+            <a:r>
+              <a:rPr lang="en-US" dirty="0"/>
+              <a:t> Use </a:t>
+            </a:r>
+            <a:r>
+              <a:rPr lang="en-US" b="1" dirty="0" err="1"/>
+              <a:t>JobLaunchingMessageHandler</a:t>
+            </a:r>
+            <a:r>
+              <a:rPr lang="en-US" dirty="0"/>
+              <a:t> for simple triggers</a:t>
+            </a:r>
+          </a:p>
+          <a:p>
+            <a:pPr lvl="1"/>
+            <a:r>
+              <a:rPr lang="en-US" b="1" dirty="0"/>
+              <a:t>Remote Partitioning</a:t>
+            </a:r>
+            <a:r>
+              <a:rPr lang="en-US" dirty="0"/>
+              <a:t> when you need to scale horizontally across a cluster of servers.</a:t>
+            </a:r>
+            <a:endParaRPr lang="en-IN" dirty="0"/>
+          </a:p>
+        </p:txBody>
+      </p:sp>
+    </p:spTree>
+    <p:extLst>
+      <p:ext uri="{BB962C8B-B14F-4D97-AF65-F5344CB8AC3E}">
+        <p14:creationId xmlns:p14="http://schemas.microsoft.com/office/powerpoint/2010/main" val="799303790"/>
+      </p:ext>
+    </p:extLst>
+  </p:cSld>
+  <p:clrMapOvr>
+    <a:masterClrMapping/>
+  </p:clrMapOvr>
+</p:sld>
+</file>
+
+<file path=ppt/slides/slide34.xml><?xml version="1.0" encoding="utf-8"?>
+<p:sld xmlns:a="http://schemas.openxmlformats.org/drawingml/2006/main" xmlns:r="http://schemas.openxmlformats.org/officeDocument/2006/relationships" xmlns:p="http://schemas.openxmlformats.org/presentationml/2006/main">
+  <p:cSld>
+    <p:spTree>
+      <p:nvGrpSpPr>
+        <p:cNvPr id="1" name="">
+          <a:extLst>
+            <a:ext uri="{FF2B5EF4-FFF2-40B4-BE49-F238E27FC236}">
               <a16:creationId xmlns:a16="http://schemas.microsoft.com/office/drawing/2014/main" id="{DD05EB36-056A-8206-5584-3804B29411E6}"/>
             </a:ext>
           </a:extLst>
@@ -16343,7 +19058,7 @@
 </p:sld>
 </file>
 
-<file path=ppt/slides/slide31.xml><?xml version="1.0" encoding="utf-8"?>
+<file path=ppt/slides/slide35.xml><?xml version="1.0" encoding="utf-8"?>
 <p:sld xmlns:a="http://schemas.openxmlformats.org/drawingml/2006/main" xmlns:r="http://schemas.openxmlformats.org/officeDocument/2006/relationships" xmlns:p="http://schemas.openxmlformats.org/presentationml/2006/main">
   <p:cSld>
     <p:spTree>
@@ -16434,7 +19149,7 @@
 </p:sld>
 </file>
 
-<file path=ppt/slides/slide32.xml><?xml version="1.0" encoding="utf-8"?>
+<file path=ppt/slides/slide36.xml><?xml version="1.0" encoding="utf-8"?>
 <p:sld xmlns:a="http://schemas.openxmlformats.org/drawingml/2006/main" xmlns:r="http://schemas.openxmlformats.org/officeDocument/2006/relationships" xmlns:p="http://schemas.openxmlformats.org/presentationml/2006/main">
   <p:cSld>
     <p:spTree>
@@ -16525,7 +19240,7 @@
 </p:sld>
 </file>
 
-<file path=ppt/slides/slide33.xml><?xml version="1.0" encoding="utf-8"?>
+<file path=ppt/slides/slide37.xml><?xml version="1.0" encoding="utf-8"?>
 <p:sld xmlns:a="http://schemas.openxmlformats.org/drawingml/2006/main" xmlns:r="http://schemas.openxmlformats.org/officeDocument/2006/relationships" xmlns:p="http://schemas.openxmlformats.org/presentationml/2006/main">
   <p:cSld>
     <p:spTree>
@@ -16616,7 +19331,7 @@
 </p:sld>
 </file>
 
-<file path=ppt/slides/slide34.xml><?xml version="1.0" encoding="utf-8"?>
+<file path=ppt/slides/slide38.xml><?xml version="1.0" encoding="utf-8"?>
 <p:sld xmlns:a="http://schemas.openxmlformats.org/drawingml/2006/main" xmlns:r="http://schemas.openxmlformats.org/officeDocument/2006/relationships" xmlns:p="http://schemas.openxmlformats.org/presentationml/2006/main">
   <p:cSld>
     <p:spTree>
@@ -16707,7 +19422,7 @@
 </p:sld>
 </file>
 
-<file path=ppt/slides/slide35.xml><?xml version="1.0" encoding="utf-8"?>
+<file path=ppt/slides/slide39.xml><?xml version="1.0" encoding="utf-8"?>
 <p:sld xmlns:a="http://schemas.openxmlformats.org/drawingml/2006/main" xmlns:r="http://schemas.openxmlformats.org/officeDocument/2006/relationships" xmlns:p="http://schemas.openxmlformats.org/presentationml/2006/main">
   <p:cSld>
     <p:spTree>
@@ -16789,370 +19504,6 @@
     <p:extLst>
       <p:ext uri="{BB962C8B-B14F-4D97-AF65-F5344CB8AC3E}">
         <p14:creationId xmlns:p14="http://schemas.microsoft.com/office/powerpoint/2010/main" val="4010588492"/>
-      </p:ext>
-    </p:extLst>
-  </p:cSld>
-  <p:clrMapOvr>
-    <a:masterClrMapping/>
-  </p:clrMapOvr>
-</p:sld>
-</file>
-
-<file path=ppt/slides/slide36.xml><?xml version="1.0" encoding="utf-8"?>
-<p:sld xmlns:a="http://schemas.openxmlformats.org/drawingml/2006/main" xmlns:r="http://schemas.openxmlformats.org/officeDocument/2006/relationships" xmlns:p="http://schemas.openxmlformats.org/presentationml/2006/main">
-  <p:cSld>
-    <p:spTree>
-      <p:nvGrpSpPr>
-        <p:cNvPr id="1" name="">
-          <a:extLst>
-            <a:ext uri="{FF2B5EF4-FFF2-40B4-BE49-F238E27FC236}">
-              <a16:creationId xmlns:a16="http://schemas.microsoft.com/office/drawing/2014/main" id="{3D4C5A44-2709-0DE7-5602-D648CA8D7799}"/>
-            </a:ext>
-          </a:extLst>
-        </p:cNvPr>
-        <p:cNvGrpSpPr/>
-        <p:nvPr/>
-      </p:nvGrpSpPr>
-      <p:grpSpPr>
-        <a:xfrm>
-          <a:off x="0" y="0"/>
-          <a:ext cx="0" cy="0"/>
-          <a:chOff x="0" y="0"/>
-          <a:chExt cx="0" cy="0"/>
-        </a:xfrm>
-      </p:grpSpPr>
-      <p:sp>
-        <p:nvSpPr>
-          <p:cNvPr id="2" name="Title 1">
-            <a:extLst>
-              <a:ext uri="{FF2B5EF4-FFF2-40B4-BE49-F238E27FC236}">
-                <a16:creationId xmlns:a16="http://schemas.microsoft.com/office/drawing/2014/main" id="{5B886E33-7C68-8075-6F67-C7B96CB19B79}"/>
-              </a:ext>
-            </a:extLst>
-          </p:cNvPr>
-          <p:cNvSpPr>
-            <a:spLocks noGrp="1"/>
-          </p:cNvSpPr>
-          <p:nvPr>
-            <p:ph type="title"/>
-          </p:nvPr>
-        </p:nvSpPr>
-        <p:spPr/>
-        <p:txBody>
-          <a:bodyPr/>
-          <a:lstStyle/>
-          <a:p>
-            <a:endParaRPr lang="en-IN"/>
-          </a:p>
-        </p:txBody>
-      </p:sp>
-      <p:sp>
-        <p:nvSpPr>
-          <p:cNvPr id="3" name="Content Placeholder 2">
-            <a:extLst>
-              <a:ext uri="{FF2B5EF4-FFF2-40B4-BE49-F238E27FC236}">
-                <a16:creationId xmlns:a16="http://schemas.microsoft.com/office/drawing/2014/main" id="{6A272CE1-F233-55BC-5DC8-5D180B059DB0}"/>
-              </a:ext>
-            </a:extLst>
-          </p:cNvPr>
-          <p:cNvSpPr>
-            <a:spLocks noGrp="1"/>
-          </p:cNvSpPr>
-          <p:nvPr>
-            <p:ph idx="1"/>
-          </p:nvPr>
-        </p:nvSpPr>
-        <p:spPr>
-          <a:xfrm>
-            <a:off x="1154954" y="2603499"/>
-            <a:ext cx="10497534" cy="3948885"/>
-          </a:xfrm>
-        </p:spPr>
-        <p:txBody>
-          <a:bodyPr/>
-          <a:lstStyle/>
-          <a:p>
-            <a:endParaRPr lang="en-IN" dirty="0"/>
-          </a:p>
-        </p:txBody>
-      </p:sp>
-    </p:spTree>
-    <p:extLst>
-      <p:ext uri="{BB962C8B-B14F-4D97-AF65-F5344CB8AC3E}">
-        <p14:creationId xmlns:p14="http://schemas.microsoft.com/office/powerpoint/2010/main" val="4202233685"/>
-      </p:ext>
-    </p:extLst>
-  </p:cSld>
-  <p:clrMapOvr>
-    <a:masterClrMapping/>
-  </p:clrMapOvr>
-</p:sld>
-</file>
-
-<file path=ppt/slides/slide37.xml><?xml version="1.0" encoding="utf-8"?>
-<p:sld xmlns:a="http://schemas.openxmlformats.org/drawingml/2006/main" xmlns:r="http://schemas.openxmlformats.org/officeDocument/2006/relationships" xmlns:p="http://schemas.openxmlformats.org/presentationml/2006/main">
-  <p:cSld>
-    <p:spTree>
-      <p:nvGrpSpPr>
-        <p:cNvPr id="1" name="">
-          <a:extLst>
-            <a:ext uri="{FF2B5EF4-FFF2-40B4-BE49-F238E27FC236}">
-              <a16:creationId xmlns:a16="http://schemas.microsoft.com/office/drawing/2014/main" id="{7077E61B-21A5-8E77-A5BB-2D9953F9F902}"/>
-            </a:ext>
-          </a:extLst>
-        </p:cNvPr>
-        <p:cNvGrpSpPr/>
-        <p:nvPr/>
-      </p:nvGrpSpPr>
-      <p:grpSpPr>
-        <a:xfrm>
-          <a:off x="0" y="0"/>
-          <a:ext cx="0" cy="0"/>
-          <a:chOff x="0" y="0"/>
-          <a:chExt cx="0" cy="0"/>
-        </a:xfrm>
-      </p:grpSpPr>
-      <p:sp>
-        <p:nvSpPr>
-          <p:cNvPr id="2" name="Title 1">
-            <a:extLst>
-              <a:ext uri="{FF2B5EF4-FFF2-40B4-BE49-F238E27FC236}">
-                <a16:creationId xmlns:a16="http://schemas.microsoft.com/office/drawing/2014/main" id="{80885B12-DF44-DB12-6C7F-975849520A71}"/>
-              </a:ext>
-            </a:extLst>
-          </p:cNvPr>
-          <p:cNvSpPr>
-            <a:spLocks noGrp="1"/>
-          </p:cNvSpPr>
-          <p:nvPr>
-            <p:ph type="title"/>
-          </p:nvPr>
-        </p:nvSpPr>
-        <p:spPr/>
-        <p:txBody>
-          <a:bodyPr/>
-          <a:lstStyle/>
-          <a:p>
-            <a:endParaRPr lang="en-IN"/>
-          </a:p>
-        </p:txBody>
-      </p:sp>
-      <p:sp>
-        <p:nvSpPr>
-          <p:cNvPr id="3" name="Content Placeholder 2">
-            <a:extLst>
-              <a:ext uri="{FF2B5EF4-FFF2-40B4-BE49-F238E27FC236}">
-                <a16:creationId xmlns:a16="http://schemas.microsoft.com/office/drawing/2014/main" id="{49D73E0D-D229-0600-5119-49ADFF76DD50}"/>
-              </a:ext>
-            </a:extLst>
-          </p:cNvPr>
-          <p:cNvSpPr>
-            <a:spLocks noGrp="1"/>
-          </p:cNvSpPr>
-          <p:nvPr>
-            <p:ph idx="1"/>
-          </p:nvPr>
-        </p:nvSpPr>
-        <p:spPr>
-          <a:xfrm>
-            <a:off x="1154954" y="2603499"/>
-            <a:ext cx="10497534" cy="3948885"/>
-          </a:xfrm>
-        </p:spPr>
-        <p:txBody>
-          <a:bodyPr/>
-          <a:lstStyle/>
-          <a:p>
-            <a:endParaRPr lang="en-IN" dirty="0"/>
-          </a:p>
-        </p:txBody>
-      </p:sp>
-    </p:spTree>
-    <p:extLst>
-      <p:ext uri="{BB962C8B-B14F-4D97-AF65-F5344CB8AC3E}">
-        <p14:creationId xmlns:p14="http://schemas.microsoft.com/office/powerpoint/2010/main" val="244558708"/>
-      </p:ext>
-    </p:extLst>
-  </p:cSld>
-  <p:clrMapOvr>
-    <a:masterClrMapping/>
-  </p:clrMapOvr>
-</p:sld>
-</file>
-
-<file path=ppt/slides/slide38.xml><?xml version="1.0" encoding="utf-8"?>
-<p:sld xmlns:a="http://schemas.openxmlformats.org/drawingml/2006/main" xmlns:r="http://schemas.openxmlformats.org/officeDocument/2006/relationships" xmlns:p="http://schemas.openxmlformats.org/presentationml/2006/main">
-  <p:cSld>
-    <p:spTree>
-      <p:nvGrpSpPr>
-        <p:cNvPr id="1" name="">
-          <a:extLst>
-            <a:ext uri="{FF2B5EF4-FFF2-40B4-BE49-F238E27FC236}">
-              <a16:creationId xmlns:a16="http://schemas.microsoft.com/office/drawing/2014/main" id="{6CDC842A-AAC5-4711-2FAA-CB153EB04793}"/>
-            </a:ext>
-          </a:extLst>
-        </p:cNvPr>
-        <p:cNvGrpSpPr/>
-        <p:nvPr/>
-      </p:nvGrpSpPr>
-      <p:grpSpPr>
-        <a:xfrm>
-          <a:off x="0" y="0"/>
-          <a:ext cx="0" cy="0"/>
-          <a:chOff x="0" y="0"/>
-          <a:chExt cx="0" cy="0"/>
-        </a:xfrm>
-      </p:grpSpPr>
-      <p:sp>
-        <p:nvSpPr>
-          <p:cNvPr id="2" name="Title 1">
-            <a:extLst>
-              <a:ext uri="{FF2B5EF4-FFF2-40B4-BE49-F238E27FC236}">
-                <a16:creationId xmlns:a16="http://schemas.microsoft.com/office/drawing/2014/main" id="{FFC64E4A-E628-52BF-A345-364FCB223BDD}"/>
-              </a:ext>
-            </a:extLst>
-          </p:cNvPr>
-          <p:cNvSpPr>
-            <a:spLocks noGrp="1"/>
-          </p:cNvSpPr>
-          <p:nvPr>
-            <p:ph type="title"/>
-          </p:nvPr>
-        </p:nvSpPr>
-        <p:spPr/>
-        <p:txBody>
-          <a:bodyPr/>
-          <a:lstStyle/>
-          <a:p>
-            <a:endParaRPr lang="en-IN"/>
-          </a:p>
-        </p:txBody>
-      </p:sp>
-      <p:sp>
-        <p:nvSpPr>
-          <p:cNvPr id="3" name="Content Placeholder 2">
-            <a:extLst>
-              <a:ext uri="{FF2B5EF4-FFF2-40B4-BE49-F238E27FC236}">
-                <a16:creationId xmlns:a16="http://schemas.microsoft.com/office/drawing/2014/main" id="{307D9075-EC2F-921B-326F-42B25E8C25D5}"/>
-              </a:ext>
-            </a:extLst>
-          </p:cNvPr>
-          <p:cNvSpPr>
-            <a:spLocks noGrp="1"/>
-          </p:cNvSpPr>
-          <p:nvPr>
-            <p:ph idx="1"/>
-          </p:nvPr>
-        </p:nvSpPr>
-        <p:spPr>
-          <a:xfrm>
-            <a:off x="1154954" y="2603499"/>
-            <a:ext cx="10497534" cy="3948885"/>
-          </a:xfrm>
-        </p:spPr>
-        <p:txBody>
-          <a:bodyPr/>
-          <a:lstStyle/>
-          <a:p>
-            <a:endParaRPr lang="en-IN" dirty="0"/>
-          </a:p>
-        </p:txBody>
-      </p:sp>
-    </p:spTree>
-    <p:extLst>
-      <p:ext uri="{BB962C8B-B14F-4D97-AF65-F5344CB8AC3E}">
-        <p14:creationId xmlns:p14="http://schemas.microsoft.com/office/powerpoint/2010/main" val="3511475776"/>
-      </p:ext>
-    </p:extLst>
-  </p:cSld>
-  <p:clrMapOvr>
-    <a:masterClrMapping/>
-  </p:clrMapOvr>
-</p:sld>
-</file>
-
-<file path=ppt/slides/slide39.xml><?xml version="1.0" encoding="utf-8"?>
-<p:sld xmlns:a="http://schemas.openxmlformats.org/drawingml/2006/main" xmlns:r="http://schemas.openxmlformats.org/officeDocument/2006/relationships" xmlns:p="http://schemas.openxmlformats.org/presentationml/2006/main">
-  <p:cSld>
-    <p:spTree>
-      <p:nvGrpSpPr>
-        <p:cNvPr id="1" name="">
-          <a:extLst>
-            <a:ext uri="{FF2B5EF4-FFF2-40B4-BE49-F238E27FC236}">
-              <a16:creationId xmlns:a16="http://schemas.microsoft.com/office/drawing/2014/main" id="{EF59D01F-6A4F-8B3C-29C1-1F96AD15E413}"/>
-            </a:ext>
-          </a:extLst>
-        </p:cNvPr>
-        <p:cNvGrpSpPr/>
-        <p:nvPr/>
-      </p:nvGrpSpPr>
-      <p:grpSpPr>
-        <a:xfrm>
-          <a:off x="0" y="0"/>
-          <a:ext cx="0" cy="0"/>
-          <a:chOff x="0" y="0"/>
-          <a:chExt cx="0" cy="0"/>
-        </a:xfrm>
-      </p:grpSpPr>
-      <p:sp>
-        <p:nvSpPr>
-          <p:cNvPr id="2" name="Title 1">
-            <a:extLst>
-              <a:ext uri="{FF2B5EF4-FFF2-40B4-BE49-F238E27FC236}">
-                <a16:creationId xmlns:a16="http://schemas.microsoft.com/office/drawing/2014/main" id="{35DDC2CA-EC18-95AC-050C-558AD394851F}"/>
-              </a:ext>
-            </a:extLst>
-          </p:cNvPr>
-          <p:cNvSpPr>
-            <a:spLocks noGrp="1"/>
-          </p:cNvSpPr>
-          <p:nvPr>
-            <p:ph type="title"/>
-          </p:nvPr>
-        </p:nvSpPr>
-        <p:spPr/>
-        <p:txBody>
-          <a:bodyPr/>
-          <a:lstStyle/>
-          <a:p>
-            <a:endParaRPr lang="en-IN"/>
-          </a:p>
-        </p:txBody>
-      </p:sp>
-      <p:sp>
-        <p:nvSpPr>
-          <p:cNvPr id="3" name="Content Placeholder 2">
-            <a:extLst>
-              <a:ext uri="{FF2B5EF4-FFF2-40B4-BE49-F238E27FC236}">
-                <a16:creationId xmlns:a16="http://schemas.microsoft.com/office/drawing/2014/main" id="{A7EE1928-16E5-2F55-375E-1F8D2161BAEA}"/>
-              </a:ext>
-            </a:extLst>
-          </p:cNvPr>
-          <p:cNvSpPr>
-            <a:spLocks noGrp="1"/>
-          </p:cNvSpPr>
-          <p:nvPr>
-            <p:ph idx="1"/>
-          </p:nvPr>
-        </p:nvSpPr>
-        <p:spPr>
-          <a:xfrm>
-            <a:off x="1154954" y="2603499"/>
-            <a:ext cx="10497534" cy="3948885"/>
-          </a:xfrm>
-        </p:spPr>
-        <p:txBody>
-          <a:bodyPr/>
-          <a:lstStyle/>
-          <a:p>
-            <a:endParaRPr lang="en-IN" dirty="0"/>
-          </a:p>
-        </p:txBody>
-      </p:sp>
-    </p:spTree>
-    <p:extLst>
-      <p:ext uri="{BB962C8B-B14F-4D97-AF65-F5344CB8AC3E}">
-        <p14:creationId xmlns:p14="http://schemas.microsoft.com/office/powerpoint/2010/main" val="860006369"/>
       </p:ext>
     </p:extLst>
   </p:cSld>
@@ -17702,6 +20053,370 @@
         <p:cNvPr id="1" name="">
           <a:extLst>
             <a:ext uri="{FF2B5EF4-FFF2-40B4-BE49-F238E27FC236}">
+              <a16:creationId xmlns:a16="http://schemas.microsoft.com/office/drawing/2014/main" id="{3D4C5A44-2709-0DE7-5602-D648CA8D7799}"/>
+            </a:ext>
+          </a:extLst>
+        </p:cNvPr>
+        <p:cNvGrpSpPr/>
+        <p:nvPr/>
+      </p:nvGrpSpPr>
+      <p:grpSpPr>
+        <a:xfrm>
+          <a:off x="0" y="0"/>
+          <a:ext cx="0" cy="0"/>
+          <a:chOff x="0" y="0"/>
+          <a:chExt cx="0" cy="0"/>
+        </a:xfrm>
+      </p:grpSpPr>
+      <p:sp>
+        <p:nvSpPr>
+          <p:cNvPr id="2" name="Title 1">
+            <a:extLst>
+              <a:ext uri="{FF2B5EF4-FFF2-40B4-BE49-F238E27FC236}">
+                <a16:creationId xmlns:a16="http://schemas.microsoft.com/office/drawing/2014/main" id="{5B886E33-7C68-8075-6F67-C7B96CB19B79}"/>
+              </a:ext>
+            </a:extLst>
+          </p:cNvPr>
+          <p:cNvSpPr>
+            <a:spLocks noGrp="1"/>
+          </p:cNvSpPr>
+          <p:nvPr>
+            <p:ph type="title"/>
+          </p:nvPr>
+        </p:nvSpPr>
+        <p:spPr/>
+        <p:txBody>
+          <a:bodyPr/>
+          <a:lstStyle/>
+          <a:p>
+            <a:endParaRPr lang="en-IN"/>
+          </a:p>
+        </p:txBody>
+      </p:sp>
+      <p:sp>
+        <p:nvSpPr>
+          <p:cNvPr id="3" name="Content Placeholder 2">
+            <a:extLst>
+              <a:ext uri="{FF2B5EF4-FFF2-40B4-BE49-F238E27FC236}">
+                <a16:creationId xmlns:a16="http://schemas.microsoft.com/office/drawing/2014/main" id="{6A272CE1-F233-55BC-5DC8-5D180B059DB0}"/>
+              </a:ext>
+            </a:extLst>
+          </p:cNvPr>
+          <p:cNvSpPr>
+            <a:spLocks noGrp="1"/>
+          </p:cNvSpPr>
+          <p:nvPr>
+            <p:ph idx="1"/>
+          </p:nvPr>
+        </p:nvSpPr>
+        <p:spPr>
+          <a:xfrm>
+            <a:off x="1154954" y="2603499"/>
+            <a:ext cx="10497534" cy="3948885"/>
+          </a:xfrm>
+        </p:spPr>
+        <p:txBody>
+          <a:bodyPr/>
+          <a:lstStyle/>
+          <a:p>
+            <a:endParaRPr lang="en-IN" dirty="0"/>
+          </a:p>
+        </p:txBody>
+      </p:sp>
+    </p:spTree>
+    <p:extLst>
+      <p:ext uri="{BB962C8B-B14F-4D97-AF65-F5344CB8AC3E}">
+        <p14:creationId xmlns:p14="http://schemas.microsoft.com/office/powerpoint/2010/main" val="4202233685"/>
+      </p:ext>
+    </p:extLst>
+  </p:cSld>
+  <p:clrMapOvr>
+    <a:masterClrMapping/>
+  </p:clrMapOvr>
+</p:sld>
+</file>
+
+<file path=ppt/slides/slide41.xml><?xml version="1.0" encoding="utf-8"?>
+<p:sld xmlns:a="http://schemas.openxmlformats.org/drawingml/2006/main" xmlns:r="http://schemas.openxmlformats.org/officeDocument/2006/relationships" xmlns:p="http://schemas.openxmlformats.org/presentationml/2006/main">
+  <p:cSld>
+    <p:spTree>
+      <p:nvGrpSpPr>
+        <p:cNvPr id="1" name="">
+          <a:extLst>
+            <a:ext uri="{FF2B5EF4-FFF2-40B4-BE49-F238E27FC236}">
+              <a16:creationId xmlns:a16="http://schemas.microsoft.com/office/drawing/2014/main" id="{7077E61B-21A5-8E77-A5BB-2D9953F9F902}"/>
+            </a:ext>
+          </a:extLst>
+        </p:cNvPr>
+        <p:cNvGrpSpPr/>
+        <p:nvPr/>
+      </p:nvGrpSpPr>
+      <p:grpSpPr>
+        <a:xfrm>
+          <a:off x="0" y="0"/>
+          <a:ext cx="0" cy="0"/>
+          <a:chOff x="0" y="0"/>
+          <a:chExt cx="0" cy="0"/>
+        </a:xfrm>
+      </p:grpSpPr>
+      <p:sp>
+        <p:nvSpPr>
+          <p:cNvPr id="2" name="Title 1">
+            <a:extLst>
+              <a:ext uri="{FF2B5EF4-FFF2-40B4-BE49-F238E27FC236}">
+                <a16:creationId xmlns:a16="http://schemas.microsoft.com/office/drawing/2014/main" id="{80885B12-DF44-DB12-6C7F-975849520A71}"/>
+              </a:ext>
+            </a:extLst>
+          </p:cNvPr>
+          <p:cNvSpPr>
+            <a:spLocks noGrp="1"/>
+          </p:cNvSpPr>
+          <p:nvPr>
+            <p:ph type="title"/>
+          </p:nvPr>
+        </p:nvSpPr>
+        <p:spPr/>
+        <p:txBody>
+          <a:bodyPr/>
+          <a:lstStyle/>
+          <a:p>
+            <a:endParaRPr lang="en-IN"/>
+          </a:p>
+        </p:txBody>
+      </p:sp>
+      <p:sp>
+        <p:nvSpPr>
+          <p:cNvPr id="3" name="Content Placeholder 2">
+            <a:extLst>
+              <a:ext uri="{FF2B5EF4-FFF2-40B4-BE49-F238E27FC236}">
+                <a16:creationId xmlns:a16="http://schemas.microsoft.com/office/drawing/2014/main" id="{49D73E0D-D229-0600-5119-49ADFF76DD50}"/>
+              </a:ext>
+            </a:extLst>
+          </p:cNvPr>
+          <p:cNvSpPr>
+            <a:spLocks noGrp="1"/>
+          </p:cNvSpPr>
+          <p:nvPr>
+            <p:ph idx="1"/>
+          </p:nvPr>
+        </p:nvSpPr>
+        <p:spPr>
+          <a:xfrm>
+            <a:off x="1154954" y="2603499"/>
+            <a:ext cx="10497534" cy="3948885"/>
+          </a:xfrm>
+        </p:spPr>
+        <p:txBody>
+          <a:bodyPr/>
+          <a:lstStyle/>
+          <a:p>
+            <a:endParaRPr lang="en-IN" dirty="0"/>
+          </a:p>
+        </p:txBody>
+      </p:sp>
+    </p:spTree>
+    <p:extLst>
+      <p:ext uri="{BB962C8B-B14F-4D97-AF65-F5344CB8AC3E}">
+        <p14:creationId xmlns:p14="http://schemas.microsoft.com/office/powerpoint/2010/main" val="244558708"/>
+      </p:ext>
+    </p:extLst>
+  </p:cSld>
+  <p:clrMapOvr>
+    <a:masterClrMapping/>
+  </p:clrMapOvr>
+</p:sld>
+</file>
+
+<file path=ppt/slides/slide42.xml><?xml version="1.0" encoding="utf-8"?>
+<p:sld xmlns:a="http://schemas.openxmlformats.org/drawingml/2006/main" xmlns:r="http://schemas.openxmlformats.org/officeDocument/2006/relationships" xmlns:p="http://schemas.openxmlformats.org/presentationml/2006/main">
+  <p:cSld>
+    <p:spTree>
+      <p:nvGrpSpPr>
+        <p:cNvPr id="1" name="">
+          <a:extLst>
+            <a:ext uri="{FF2B5EF4-FFF2-40B4-BE49-F238E27FC236}">
+              <a16:creationId xmlns:a16="http://schemas.microsoft.com/office/drawing/2014/main" id="{6CDC842A-AAC5-4711-2FAA-CB153EB04793}"/>
+            </a:ext>
+          </a:extLst>
+        </p:cNvPr>
+        <p:cNvGrpSpPr/>
+        <p:nvPr/>
+      </p:nvGrpSpPr>
+      <p:grpSpPr>
+        <a:xfrm>
+          <a:off x="0" y="0"/>
+          <a:ext cx="0" cy="0"/>
+          <a:chOff x="0" y="0"/>
+          <a:chExt cx="0" cy="0"/>
+        </a:xfrm>
+      </p:grpSpPr>
+      <p:sp>
+        <p:nvSpPr>
+          <p:cNvPr id="2" name="Title 1">
+            <a:extLst>
+              <a:ext uri="{FF2B5EF4-FFF2-40B4-BE49-F238E27FC236}">
+                <a16:creationId xmlns:a16="http://schemas.microsoft.com/office/drawing/2014/main" id="{FFC64E4A-E628-52BF-A345-364FCB223BDD}"/>
+              </a:ext>
+            </a:extLst>
+          </p:cNvPr>
+          <p:cNvSpPr>
+            <a:spLocks noGrp="1"/>
+          </p:cNvSpPr>
+          <p:nvPr>
+            <p:ph type="title"/>
+          </p:nvPr>
+        </p:nvSpPr>
+        <p:spPr/>
+        <p:txBody>
+          <a:bodyPr/>
+          <a:lstStyle/>
+          <a:p>
+            <a:endParaRPr lang="en-IN"/>
+          </a:p>
+        </p:txBody>
+      </p:sp>
+      <p:sp>
+        <p:nvSpPr>
+          <p:cNvPr id="3" name="Content Placeholder 2">
+            <a:extLst>
+              <a:ext uri="{FF2B5EF4-FFF2-40B4-BE49-F238E27FC236}">
+                <a16:creationId xmlns:a16="http://schemas.microsoft.com/office/drawing/2014/main" id="{307D9075-EC2F-921B-326F-42B25E8C25D5}"/>
+              </a:ext>
+            </a:extLst>
+          </p:cNvPr>
+          <p:cNvSpPr>
+            <a:spLocks noGrp="1"/>
+          </p:cNvSpPr>
+          <p:nvPr>
+            <p:ph idx="1"/>
+          </p:nvPr>
+        </p:nvSpPr>
+        <p:spPr>
+          <a:xfrm>
+            <a:off x="1154954" y="2603499"/>
+            <a:ext cx="10497534" cy="3948885"/>
+          </a:xfrm>
+        </p:spPr>
+        <p:txBody>
+          <a:bodyPr/>
+          <a:lstStyle/>
+          <a:p>
+            <a:endParaRPr lang="en-IN" dirty="0"/>
+          </a:p>
+        </p:txBody>
+      </p:sp>
+    </p:spTree>
+    <p:extLst>
+      <p:ext uri="{BB962C8B-B14F-4D97-AF65-F5344CB8AC3E}">
+        <p14:creationId xmlns:p14="http://schemas.microsoft.com/office/powerpoint/2010/main" val="3511475776"/>
+      </p:ext>
+    </p:extLst>
+  </p:cSld>
+  <p:clrMapOvr>
+    <a:masterClrMapping/>
+  </p:clrMapOvr>
+</p:sld>
+</file>
+
+<file path=ppt/slides/slide43.xml><?xml version="1.0" encoding="utf-8"?>
+<p:sld xmlns:a="http://schemas.openxmlformats.org/drawingml/2006/main" xmlns:r="http://schemas.openxmlformats.org/officeDocument/2006/relationships" xmlns:p="http://schemas.openxmlformats.org/presentationml/2006/main">
+  <p:cSld>
+    <p:spTree>
+      <p:nvGrpSpPr>
+        <p:cNvPr id="1" name="">
+          <a:extLst>
+            <a:ext uri="{FF2B5EF4-FFF2-40B4-BE49-F238E27FC236}">
+              <a16:creationId xmlns:a16="http://schemas.microsoft.com/office/drawing/2014/main" id="{EF59D01F-6A4F-8B3C-29C1-1F96AD15E413}"/>
+            </a:ext>
+          </a:extLst>
+        </p:cNvPr>
+        <p:cNvGrpSpPr/>
+        <p:nvPr/>
+      </p:nvGrpSpPr>
+      <p:grpSpPr>
+        <a:xfrm>
+          <a:off x="0" y="0"/>
+          <a:ext cx="0" cy="0"/>
+          <a:chOff x="0" y="0"/>
+          <a:chExt cx="0" cy="0"/>
+        </a:xfrm>
+      </p:grpSpPr>
+      <p:sp>
+        <p:nvSpPr>
+          <p:cNvPr id="2" name="Title 1">
+            <a:extLst>
+              <a:ext uri="{FF2B5EF4-FFF2-40B4-BE49-F238E27FC236}">
+                <a16:creationId xmlns:a16="http://schemas.microsoft.com/office/drawing/2014/main" id="{35DDC2CA-EC18-95AC-050C-558AD394851F}"/>
+              </a:ext>
+            </a:extLst>
+          </p:cNvPr>
+          <p:cNvSpPr>
+            <a:spLocks noGrp="1"/>
+          </p:cNvSpPr>
+          <p:nvPr>
+            <p:ph type="title"/>
+          </p:nvPr>
+        </p:nvSpPr>
+        <p:spPr/>
+        <p:txBody>
+          <a:bodyPr/>
+          <a:lstStyle/>
+          <a:p>
+            <a:endParaRPr lang="en-IN"/>
+          </a:p>
+        </p:txBody>
+      </p:sp>
+      <p:sp>
+        <p:nvSpPr>
+          <p:cNvPr id="3" name="Content Placeholder 2">
+            <a:extLst>
+              <a:ext uri="{FF2B5EF4-FFF2-40B4-BE49-F238E27FC236}">
+                <a16:creationId xmlns:a16="http://schemas.microsoft.com/office/drawing/2014/main" id="{A7EE1928-16E5-2F55-375E-1F8D2161BAEA}"/>
+              </a:ext>
+            </a:extLst>
+          </p:cNvPr>
+          <p:cNvSpPr>
+            <a:spLocks noGrp="1"/>
+          </p:cNvSpPr>
+          <p:nvPr>
+            <p:ph idx="1"/>
+          </p:nvPr>
+        </p:nvSpPr>
+        <p:spPr>
+          <a:xfrm>
+            <a:off x="1154954" y="2603499"/>
+            <a:ext cx="10497534" cy="3948885"/>
+          </a:xfrm>
+        </p:spPr>
+        <p:txBody>
+          <a:bodyPr/>
+          <a:lstStyle/>
+          <a:p>
+            <a:endParaRPr lang="en-IN" dirty="0"/>
+          </a:p>
+        </p:txBody>
+      </p:sp>
+    </p:spTree>
+    <p:extLst>
+      <p:ext uri="{BB962C8B-B14F-4D97-AF65-F5344CB8AC3E}">
+        <p14:creationId xmlns:p14="http://schemas.microsoft.com/office/powerpoint/2010/main" val="860006369"/>
+      </p:ext>
+    </p:extLst>
+  </p:cSld>
+  <p:clrMapOvr>
+    <a:masterClrMapping/>
+  </p:clrMapOvr>
+</p:sld>
+</file>
+
+<file path=ppt/slides/slide44.xml><?xml version="1.0" encoding="utf-8"?>
+<p:sld xmlns:a="http://schemas.openxmlformats.org/drawingml/2006/main" xmlns:r="http://schemas.openxmlformats.org/officeDocument/2006/relationships" xmlns:p="http://schemas.openxmlformats.org/presentationml/2006/main">
+  <p:cSld>
+    <p:spTree>
+      <p:nvGrpSpPr>
+        <p:cNvPr id="1" name="">
+          <a:extLst>
+            <a:ext uri="{FF2B5EF4-FFF2-40B4-BE49-F238E27FC236}">
               <a16:creationId xmlns:a16="http://schemas.microsoft.com/office/drawing/2014/main" id="{8C781B70-7643-E318-1835-2A80FBB6C2D3}"/>
             </a:ext>
           </a:extLst>
@@ -17785,7 +20500,7 @@
 </p:sld>
 </file>
 
-<file path=ppt/slides/slide41.xml><?xml version="1.0" encoding="utf-8"?>
+<file path=ppt/slides/slide45.xml><?xml version="1.0" encoding="utf-8"?>
 <p:sld xmlns:a="http://schemas.openxmlformats.org/drawingml/2006/main" xmlns:r="http://schemas.openxmlformats.org/officeDocument/2006/relationships" xmlns:p="http://schemas.openxmlformats.org/presentationml/2006/main">
   <p:cSld>
     <p:spTree>
@@ -17876,7 +20591,7 @@
 </p:sld>
 </file>
 
-<file path=ppt/slides/slide42.xml><?xml version="1.0" encoding="utf-8"?>
+<file path=ppt/slides/slide46.xml><?xml version="1.0" encoding="utf-8"?>
 <p:sld xmlns:a="http://schemas.openxmlformats.org/drawingml/2006/main" xmlns:r="http://schemas.openxmlformats.org/officeDocument/2006/relationships" xmlns:p="http://schemas.openxmlformats.org/presentationml/2006/main">
   <p:cSld>
     <p:spTree>
@@ -17967,7 +20682,7 @@
 </p:sld>
 </file>
 
-<file path=ppt/slides/slide43.xml><?xml version="1.0" encoding="utf-8"?>
+<file path=ppt/slides/slide47.xml><?xml version="1.0" encoding="utf-8"?>
 <p:sld xmlns:a="http://schemas.openxmlformats.org/drawingml/2006/main" xmlns:r="http://schemas.openxmlformats.org/officeDocument/2006/relationships" xmlns:p="http://schemas.openxmlformats.org/presentationml/2006/main">
   <p:cSld>
     <p:spTree>
@@ -18058,7 +20773,7 @@
 </p:sld>
 </file>
 
-<file path=ppt/slides/slide44.xml><?xml version="1.0" encoding="utf-8"?>
+<file path=ppt/slides/slide48.xml><?xml version="1.0" encoding="utf-8"?>
 <p:sld xmlns:a="http://schemas.openxmlformats.org/drawingml/2006/main" xmlns:r="http://schemas.openxmlformats.org/officeDocument/2006/relationships" xmlns:p="http://schemas.openxmlformats.org/presentationml/2006/main">
   <p:cSld>
     <p:spTree>
@@ -18149,7 +20864,7 @@
 </p:sld>
 </file>
 
-<file path=ppt/slides/slide45.xml><?xml version="1.0" encoding="utf-8"?>
+<file path=ppt/slides/slide49.xml><?xml version="1.0" encoding="utf-8"?>
 <p:sld xmlns:a="http://schemas.openxmlformats.org/drawingml/2006/main" xmlns:r="http://schemas.openxmlformats.org/officeDocument/2006/relationships" xmlns:p="http://schemas.openxmlformats.org/presentationml/2006/main">
   <p:cSld>
     <p:spTree>
@@ -18231,370 +20946,6 @@
     <p:extLst>
       <p:ext uri="{BB962C8B-B14F-4D97-AF65-F5344CB8AC3E}">
         <p14:creationId xmlns:p14="http://schemas.microsoft.com/office/powerpoint/2010/main" val="1083339518"/>
-      </p:ext>
-    </p:extLst>
-  </p:cSld>
-  <p:clrMapOvr>
-    <a:masterClrMapping/>
-  </p:clrMapOvr>
-</p:sld>
-</file>
-
-<file path=ppt/slides/slide46.xml><?xml version="1.0" encoding="utf-8"?>
-<p:sld xmlns:a="http://schemas.openxmlformats.org/drawingml/2006/main" xmlns:r="http://schemas.openxmlformats.org/officeDocument/2006/relationships" xmlns:p="http://schemas.openxmlformats.org/presentationml/2006/main">
-  <p:cSld>
-    <p:spTree>
-      <p:nvGrpSpPr>
-        <p:cNvPr id="1" name="">
-          <a:extLst>
-            <a:ext uri="{FF2B5EF4-FFF2-40B4-BE49-F238E27FC236}">
-              <a16:creationId xmlns:a16="http://schemas.microsoft.com/office/drawing/2014/main" id="{A2DE1885-BF12-F46F-A3F6-5CD6FEC3DAB0}"/>
-            </a:ext>
-          </a:extLst>
-        </p:cNvPr>
-        <p:cNvGrpSpPr/>
-        <p:nvPr/>
-      </p:nvGrpSpPr>
-      <p:grpSpPr>
-        <a:xfrm>
-          <a:off x="0" y="0"/>
-          <a:ext cx="0" cy="0"/>
-          <a:chOff x="0" y="0"/>
-          <a:chExt cx="0" cy="0"/>
-        </a:xfrm>
-      </p:grpSpPr>
-      <p:sp>
-        <p:nvSpPr>
-          <p:cNvPr id="2" name="Title 1">
-            <a:extLst>
-              <a:ext uri="{FF2B5EF4-FFF2-40B4-BE49-F238E27FC236}">
-                <a16:creationId xmlns:a16="http://schemas.microsoft.com/office/drawing/2014/main" id="{B8EA77AD-D6D9-9A14-EBCC-465C7412F3D0}"/>
-              </a:ext>
-            </a:extLst>
-          </p:cNvPr>
-          <p:cNvSpPr>
-            <a:spLocks noGrp="1"/>
-          </p:cNvSpPr>
-          <p:nvPr>
-            <p:ph type="title"/>
-          </p:nvPr>
-        </p:nvSpPr>
-        <p:spPr/>
-        <p:txBody>
-          <a:bodyPr/>
-          <a:lstStyle/>
-          <a:p>
-            <a:endParaRPr lang="en-IN"/>
-          </a:p>
-        </p:txBody>
-      </p:sp>
-      <p:sp>
-        <p:nvSpPr>
-          <p:cNvPr id="3" name="Content Placeholder 2">
-            <a:extLst>
-              <a:ext uri="{FF2B5EF4-FFF2-40B4-BE49-F238E27FC236}">
-                <a16:creationId xmlns:a16="http://schemas.microsoft.com/office/drawing/2014/main" id="{B9EFFA13-C0AC-7E79-2FA7-17BE86A8C83F}"/>
-              </a:ext>
-            </a:extLst>
-          </p:cNvPr>
-          <p:cNvSpPr>
-            <a:spLocks noGrp="1"/>
-          </p:cNvSpPr>
-          <p:nvPr>
-            <p:ph idx="1"/>
-          </p:nvPr>
-        </p:nvSpPr>
-        <p:spPr>
-          <a:xfrm>
-            <a:off x="1154954" y="2603499"/>
-            <a:ext cx="10497534" cy="3948885"/>
-          </a:xfrm>
-        </p:spPr>
-        <p:txBody>
-          <a:bodyPr/>
-          <a:lstStyle/>
-          <a:p>
-            <a:endParaRPr lang="en-IN" dirty="0"/>
-          </a:p>
-        </p:txBody>
-      </p:sp>
-    </p:spTree>
-    <p:extLst>
-      <p:ext uri="{BB962C8B-B14F-4D97-AF65-F5344CB8AC3E}">
-        <p14:creationId xmlns:p14="http://schemas.microsoft.com/office/powerpoint/2010/main" val="2474123577"/>
-      </p:ext>
-    </p:extLst>
-  </p:cSld>
-  <p:clrMapOvr>
-    <a:masterClrMapping/>
-  </p:clrMapOvr>
-</p:sld>
-</file>
-
-<file path=ppt/slides/slide47.xml><?xml version="1.0" encoding="utf-8"?>
-<p:sld xmlns:a="http://schemas.openxmlformats.org/drawingml/2006/main" xmlns:r="http://schemas.openxmlformats.org/officeDocument/2006/relationships" xmlns:p="http://schemas.openxmlformats.org/presentationml/2006/main">
-  <p:cSld>
-    <p:spTree>
-      <p:nvGrpSpPr>
-        <p:cNvPr id="1" name="">
-          <a:extLst>
-            <a:ext uri="{FF2B5EF4-FFF2-40B4-BE49-F238E27FC236}">
-              <a16:creationId xmlns:a16="http://schemas.microsoft.com/office/drawing/2014/main" id="{EA8A8D0F-DAE8-8C5E-2F1D-8B1567AFC35D}"/>
-            </a:ext>
-          </a:extLst>
-        </p:cNvPr>
-        <p:cNvGrpSpPr/>
-        <p:nvPr/>
-      </p:nvGrpSpPr>
-      <p:grpSpPr>
-        <a:xfrm>
-          <a:off x="0" y="0"/>
-          <a:ext cx="0" cy="0"/>
-          <a:chOff x="0" y="0"/>
-          <a:chExt cx="0" cy="0"/>
-        </a:xfrm>
-      </p:grpSpPr>
-      <p:sp>
-        <p:nvSpPr>
-          <p:cNvPr id="2" name="Title 1">
-            <a:extLst>
-              <a:ext uri="{FF2B5EF4-FFF2-40B4-BE49-F238E27FC236}">
-                <a16:creationId xmlns:a16="http://schemas.microsoft.com/office/drawing/2014/main" id="{30667C79-2214-20E4-91D3-87F150A525EF}"/>
-              </a:ext>
-            </a:extLst>
-          </p:cNvPr>
-          <p:cNvSpPr>
-            <a:spLocks noGrp="1"/>
-          </p:cNvSpPr>
-          <p:nvPr>
-            <p:ph type="title"/>
-          </p:nvPr>
-        </p:nvSpPr>
-        <p:spPr/>
-        <p:txBody>
-          <a:bodyPr/>
-          <a:lstStyle/>
-          <a:p>
-            <a:endParaRPr lang="en-IN"/>
-          </a:p>
-        </p:txBody>
-      </p:sp>
-      <p:sp>
-        <p:nvSpPr>
-          <p:cNvPr id="3" name="Content Placeholder 2">
-            <a:extLst>
-              <a:ext uri="{FF2B5EF4-FFF2-40B4-BE49-F238E27FC236}">
-                <a16:creationId xmlns:a16="http://schemas.microsoft.com/office/drawing/2014/main" id="{356F49F7-DE7F-4549-F1A7-35EEB02C2789}"/>
-              </a:ext>
-            </a:extLst>
-          </p:cNvPr>
-          <p:cNvSpPr>
-            <a:spLocks noGrp="1"/>
-          </p:cNvSpPr>
-          <p:nvPr>
-            <p:ph idx="1"/>
-          </p:nvPr>
-        </p:nvSpPr>
-        <p:spPr>
-          <a:xfrm>
-            <a:off x="1154954" y="2603499"/>
-            <a:ext cx="10497534" cy="3948885"/>
-          </a:xfrm>
-        </p:spPr>
-        <p:txBody>
-          <a:bodyPr/>
-          <a:lstStyle/>
-          <a:p>
-            <a:endParaRPr lang="en-IN" dirty="0"/>
-          </a:p>
-        </p:txBody>
-      </p:sp>
-    </p:spTree>
-    <p:extLst>
-      <p:ext uri="{BB962C8B-B14F-4D97-AF65-F5344CB8AC3E}">
-        <p14:creationId xmlns:p14="http://schemas.microsoft.com/office/powerpoint/2010/main" val="3522406739"/>
-      </p:ext>
-    </p:extLst>
-  </p:cSld>
-  <p:clrMapOvr>
-    <a:masterClrMapping/>
-  </p:clrMapOvr>
-</p:sld>
-</file>
-
-<file path=ppt/slides/slide48.xml><?xml version="1.0" encoding="utf-8"?>
-<p:sld xmlns:a="http://schemas.openxmlformats.org/drawingml/2006/main" xmlns:r="http://schemas.openxmlformats.org/officeDocument/2006/relationships" xmlns:p="http://schemas.openxmlformats.org/presentationml/2006/main">
-  <p:cSld>
-    <p:spTree>
-      <p:nvGrpSpPr>
-        <p:cNvPr id="1" name="">
-          <a:extLst>
-            <a:ext uri="{FF2B5EF4-FFF2-40B4-BE49-F238E27FC236}">
-              <a16:creationId xmlns:a16="http://schemas.microsoft.com/office/drawing/2014/main" id="{6E433678-7AFA-2A36-6973-B445F4272DAD}"/>
-            </a:ext>
-          </a:extLst>
-        </p:cNvPr>
-        <p:cNvGrpSpPr/>
-        <p:nvPr/>
-      </p:nvGrpSpPr>
-      <p:grpSpPr>
-        <a:xfrm>
-          <a:off x="0" y="0"/>
-          <a:ext cx="0" cy="0"/>
-          <a:chOff x="0" y="0"/>
-          <a:chExt cx="0" cy="0"/>
-        </a:xfrm>
-      </p:grpSpPr>
-      <p:sp>
-        <p:nvSpPr>
-          <p:cNvPr id="2" name="Title 1">
-            <a:extLst>
-              <a:ext uri="{FF2B5EF4-FFF2-40B4-BE49-F238E27FC236}">
-                <a16:creationId xmlns:a16="http://schemas.microsoft.com/office/drawing/2014/main" id="{659C4DF3-8BBB-939D-E34A-30494696561A}"/>
-              </a:ext>
-            </a:extLst>
-          </p:cNvPr>
-          <p:cNvSpPr>
-            <a:spLocks noGrp="1"/>
-          </p:cNvSpPr>
-          <p:nvPr>
-            <p:ph type="title"/>
-          </p:nvPr>
-        </p:nvSpPr>
-        <p:spPr/>
-        <p:txBody>
-          <a:bodyPr/>
-          <a:lstStyle/>
-          <a:p>
-            <a:endParaRPr lang="en-IN"/>
-          </a:p>
-        </p:txBody>
-      </p:sp>
-      <p:sp>
-        <p:nvSpPr>
-          <p:cNvPr id="3" name="Content Placeholder 2">
-            <a:extLst>
-              <a:ext uri="{FF2B5EF4-FFF2-40B4-BE49-F238E27FC236}">
-                <a16:creationId xmlns:a16="http://schemas.microsoft.com/office/drawing/2014/main" id="{6C87B64C-EB5B-8855-D993-EE715BCDD660}"/>
-              </a:ext>
-            </a:extLst>
-          </p:cNvPr>
-          <p:cNvSpPr>
-            <a:spLocks noGrp="1"/>
-          </p:cNvSpPr>
-          <p:nvPr>
-            <p:ph idx="1"/>
-          </p:nvPr>
-        </p:nvSpPr>
-        <p:spPr>
-          <a:xfrm>
-            <a:off x="1154954" y="2603499"/>
-            <a:ext cx="10497534" cy="3948885"/>
-          </a:xfrm>
-        </p:spPr>
-        <p:txBody>
-          <a:bodyPr/>
-          <a:lstStyle/>
-          <a:p>
-            <a:endParaRPr lang="en-IN" dirty="0"/>
-          </a:p>
-        </p:txBody>
-      </p:sp>
-    </p:spTree>
-    <p:extLst>
-      <p:ext uri="{BB962C8B-B14F-4D97-AF65-F5344CB8AC3E}">
-        <p14:creationId xmlns:p14="http://schemas.microsoft.com/office/powerpoint/2010/main" val="1686729797"/>
-      </p:ext>
-    </p:extLst>
-  </p:cSld>
-  <p:clrMapOvr>
-    <a:masterClrMapping/>
-  </p:clrMapOvr>
-</p:sld>
-</file>
-
-<file path=ppt/slides/slide49.xml><?xml version="1.0" encoding="utf-8"?>
-<p:sld xmlns:a="http://schemas.openxmlformats.org/drawingml/2006/main" xmlns:r="http://schemas.openxmlformats.org/officeDocument/2006/relationships" xmlns:p="http://schemas.openxmlformats.org/presentationml/2006/main">
-  <p:cSld>
-    <p:spTree>
-      <p:nvGrpSpPr>
-        <p:cNvPr id="1" name="">
-          <a:extLst>
-            <a:ext uri="{FF2B5EF4-FFF2-40B4-BE49-F238E27FC236}">
-              <a16:creationId xmlns:a16="http://schemas.microsoft.com/office/drawing/2014/main" id="{CAFCF2F1-D7BA-BDF0-D554-C4FF35236A83}"/>
-            </a:ext>
-          </a:extLst>
-        </p:cNvPr>
-        <p:cNvGrpSpPr/>
-        <p:nvPr/>
-      </p:nvGrpSpPr>
-      <p:grpSpPr>
-        <a:xfrm>
-          <a:off x="0" y="0"/>
-          <a:ext cx="0" cy="0"/>
-          <a:chOff x="0" y="0"/>
-          <a:chExt cx="0" cy="0"/>
-        </a:xfrm>
-      </p:grpSpPr>
-      <p:sp>
-        <p:nvSpPr>
-          <p:cNvPr id="2" name="Title 1">
-            <a:extLst>
-              <a:ext uri="{FF2B5EF4-FFF2-40B4-BE49-F238E27FC236}">
-                <a16:creationId xmlns:a16="http://schemas.microsoft.com/office/drawing/2014/main" id="{C2C02128-283E-4568-9881-9A77883C98A3}"/>
-              </a:ext>
-            </a:extLst>
-          </p:cNvPr>
-          <p:cNvSpPr>
-            <a:spLocks noGrp="1"/>
-          </p:cNvSpPr>
-          <p:nvPr>
-            <p:ph type="title"/>
-          </p:nvPr>
-        </p:nvSpPr>
-        <p:spPr/>
-        <p:txBody>
-          <a:bodyPr/>
-          <a:lstStyle/>
-          <a:p>
-            <a:endParaRPr lang="en-IN"/>
-          </a:p>
-        </p:txBody>
-      </p:sp>
-      <p:sp>
-        <p:nvSpPr>
-          <p:cNvPr id="3" name="Content Placeholder 2">
-            <a:extLst>
-              <a:ext uri="{FF2B5EF4-FFF2-40B4-BE49-F238E27FC236}">
-                <a16:creationId xmlns:a16="http://schemas.microsoft.com/office/drawing/2014/main" id="{44E53454-AFD8-A46F-45B7-D3CEF9DEACDE}"/>
-              </a:ext>
-            </a:extLst>
-          </p:cNvPr>
-          <p:cNvSpPr>
-            <a:spLocks noGrp="1"/>
-          </p:cNvSpPr>
-          <p:nvPr>
-            <p:ph idx="1"/>
-          </p:nvPr>
-        </p:nvSpPr>
-        <p:spPr>
-          <a:xfrm>
-            <a:off x="1154954" y="2603499"/>
-            <a:ext cx="10497534" cy="3948885"/>
-          </a:xfrm>
-        </p:spPr>
-        <p:txBody>
-          <a:bodyPr/>
-          <a:lstStyle/>
-          <a:p>
-            <a:endParaRPr lang="en-IN" dirty="0"/>
-          </a:p>
-        </p:txBody>
-      </p:sp>
-    </p:spTree>
-    <p:extLst>
-      <p:ext uri="{BB962C8B-B14F-4D97-AF65-F5344CB8AC3E}">
-        <p14:creationId xmlns:p14="http://schemas.microsoft.com/office/powerpoint/2010/main" val="3986293418"/>
       </p:ext>
     </p:extLst>
   </p:cSld>
@@ -18794,6 +21145,370 @@
         <p:cNvPr id="1" name="">
           <a:extLst>
             <a:ext uri="{FF2B5EF4-FFF2-40B4-BE49-F238E27FC236}">
+              <a16:creationId xmlns:a16="http://schemas.microsoft.com/office/drawing/2014/main" id="{A2DE1885-BF12-F46F-A3F6-5CD6FEC3DAB0}"/>
+            </a:ext>
+          </a:extLst>
+        </p:cNvPr>
+        <p:cNvGrpSpPr/>
+        <p:nvPr/>
+      </p:nvGrpSpPr>
+      <p:grpSpPr>
+        <a:xfrm>
+          <a:off x="0" y="0"/>
+          <a:ext cx="0" cy="0"/>
+          <a:chOff x="0" y="0"/>
+          <a:chExt cx="0" cy="0"/>
+        </a:xfrm>
+      </p:grpSpPr>
+      <p:sp>
+        <p:nvSpPr>
+          <p:cNvPr id="2" name="Title 1">
+            <a:extLst>
+              <a:ext uri="{FF2B5EF4-FFF2-40B4-BE49-F238E27FC236}">
+                <a16:creationId xmlns:a16="http://schemas.microsoft.com/office/drawing/2014/main" id="{B8EA77AD-D6D9-9A14-EBCC-465C7412F3D0}"/>
+              </a:ext>
+            </a:extLst>
+          </p:cNvPr>
+          <p:cNvSpPr>
+            <a:spLocks noGrp="1"/>
+          </p:cNvSpPr>
+          <p:nvPr>
+            <p:ph type="title"/>
+          </p:nvPr>
+        </p:nvSpPr>
+        <p:spPr/>
+        <p:txBody>
+          <a:bodyPr/>
+          <a:lstStyle/>
+          <a:p>
+            <a:endParaRPr lang="en-IN"/>
+          </a:p>
+        </p:txBody>
+      </p:sp>
+      <p:sp>
+        <p:nvSpPr>
+          <p:cNvPr id="3" name="Content Placeholder 2">
+            <a:extLst>
+              <a:ext uri="{FF2B5EF4-FFF2-40B4-BE49-F238E27FC236}">
+                <a16:creationId xmlns:a16="http://schemas.microsoft.com/office/drawing/2014/main" id="{B9EFFA13-C0AC-7E79-2FA7-17BE86A8C83F}"/>
+              </a:ext>
+            </a:extLst>
+          </p:cNvPr>
+          <p:cNvSpPr>
+            <a:spLocks noGrp="1"/>
+          </p:cNvSpPr>
+          <p:nvPr>
+            <p:ph idx="1"/>
+          </p:nvPr>
+        </p:nvSpPr>
+        <p:spPr>
+          <a:xfrm>
+            <a:off x="1154954" y="2603499"/>
+            <a:ext cx="10497534" cy="3948885"/>
+          </a:xfrm>
+        </p:spPr>
+        <p:txBody>
+          <a:bodyPr/>
+          <a:lstStyle/>
+          <a:p>
+            <a:endParaRPr lang="en-IN" dirty="0"/>
+          </a:p>
+        </p:txBody>
+      </p:sp>
+    </p:spTree>
+    <p:extLst>
+      <p:ext uri="{BB962C8B-B14F-4D97-AF65-F5344CB8AC3E}">
+        <p14:creationId xmlns:p14="http://schemas.microsoft.com/office/powerpoint/2010/main" val="2474123577"/>
+      </p:ext>
+    </p:extLst>
+  </p:cSld>
+  <p:clrMapOvr>
+    <a:masterClrMapping/>
+  </p:clrMapOvr>
+</p:sld>
+</file>
+
+<file path=ppt/slides/slide51.xml><?xml version="1.0" encoding="utf-8"?>
+<p:sld xmlns:a="http://schemas.openxmlformats.org/drawingml/2006/main" xmlns:r="http://schemas.openxmlformats.org/officeDocument/2006/relationships" xmlns:p="http://schemas.openxmlformats.org/presentationml/2006/main">
+  <p:cSld>
+    <p:spTree>
+      <p:nvGrpSpPr>
+        <p:cNvPr id="1" name="">
+          <a:extLst>
+            <a:ext uri="{FF2B5EF4-FFF2-40B4-BE49-F238E27FC236}">
+              <a16:creationId xmlns:a16="http://schemas.microsoft.com/office/drawing/2014/main" id="{EA8A8D0F-DAE8-8C5E-2F1D-8B1567AFC35D}"/>
+            </a:ext>
+          </a:extLst>
+        </p:cNvPr>
+        <p:cNvGrpSpPr/>
+        <p:nvPr/>
+      </p:nvGrpSpPr>
+      <p:grpSpPr>
+        <a:xfrm>
+          <a:off x="0" y="0"/>
+          <a:ext cx="0" cy="0"/>
+          <a:chOff x="0" y="0"/>
+          <a:chExt cx="0" cy="0"/>
+        </a:xfrm>
+      </p:grpSpPr>
+      <p:sp>
+        <p:nvSpPr>
+          <p:cNvPr id="2" name="Title 1">
+            <a:extLst>
+              <a:ext uri="{FF2B5EF4-FFF2-40B4-BE49-F238E27FC236}">
+                <a16:creationId xmlns:a16="http://schemas.microsoft.com/office/drawing/2014/main" id="{30667C79-2214-20E4-91D3-87F150A525EF}"/>
+              </a:ext>
+            </a:extLst>
+          </p:cNvPr>
+          <p:cNvSpPr>
+            <a:spLocks noGrp="1"/>
+          </p:cNvSpPr>
+          <p:nvPr>
+            <p:ph type="title"/>
+          </p:nvPr>
+        </p:nvSpPr>
+        <p:spPr/>
+        <p:txBody>
+          <a:bodyPr/>
+          <a:lstStyle/>
+          <a:p>
+            <a:endParaRPr lang="en-IN"/>
+          </a:p>
+        </p:txBody>
+      </p:sp>
+      <p:sp>
+        <p:nvSpPr>
+          <p:cNvPr id="3" name="Content Placeholder 2">
+            <a:extLst>
+              <a:ext uri="{FF2B5EF4-FFF2-40B4-BE49-F238E27FC236}">
+                <a16:creationId xmlns:a16="http://schemas.microsoft.com/office/drawing/2014/main" id="{356F49F7-DE7F-4549-F1A7-35EEB02C2789}"/>
+              </a:ext>
+            </a:extLst>
+          </p:cNvPr>
+          <p:cNvSpPr>
+            <a:spLocks noGrp="1"/>
+          </p:cNvSpPr>
+          <p:nvPr>
+            <p:ph idx="1"/>
+          </p:nvPr>
+        </p:nvSpPr>
+        <p:spPr>
+          <a:xfrm>
+            <a:off x="1154954" y="2603499"/>
+            <a:ext cx="10497534" cy="3948885"/>
+          </a:xfrm>
+        </p:spPr>
+        <p:txBody>
+          <a:bodyPr/>
+          <a:lstStyle/>
+          <a:p>
+            <a:endParaRPr lang="en-IN" dirty="0"/>
+          </a:p>
+        </p:txBody>
+      </p:sp>
+    </p:spTree>
+    <p:extLst>
+      <p:ext uri="{BB962C8B-B14F-4D97-AF65-F5344CB8AC3E}">
+        <p14:creationId xmlns:p14="http://schemas.microsoft.com/office/powerpoint/2010/main" val="3522406739"/>
+      </p:ext>
+    </p:extLst>
+  </p:cSld>
+  <p:clrMapOvr>
+    <a:masterClrMapping/>
+  </p:clrMapOvr>
+</p:sld>
+</file>
+
+<file path=ppt/slides/slide52.xml><?xml version="1.0" encoding="utf-8"?>
+<p:sld xmlns:a="http://schemas.openxmlformats.org/drawingml/2006/main" xmlns:r="http://schemas.openxmlformats.org/officeDocument/2006/relationships" xmlns:p="http://schemas.openxmlformats.org/presentationml/2006/main">
+  <p:cSld>
+    <p:spTree>
+      <p:nvGrpSpPr>
+        <p:cNvPr id="1" name="">
+          <a:extLst>
+            <a:ext uri="{FF2B5EF4-FFF2-40B4-BE49-F238E27FC236}">
+              <a16:creationId xmlns:a16="http://schemas.microsoft.com/office/drawing/2014/main" id="{6E433678-7AFA-2A36-6973-B445F4272DAD}"/>
+            </a:ext>
+          </a:extLst>
+        </p:cNvPr>
+        <p:cNvGrpSpPr/>
+        <p:nvPr/>
+      </p:nvGrpSpPr>
+      <p:grpSpPr>
+        <a:xfrm>
+          <a:off x="0" y="0"/>
+          <a:ext cx="0" cy="0"/>
+          <a:chOff x="0" y="0"/>
+          <a:chExt cx="0" cy="0"/>
+        </a:xfrm>
+      </p:grpSpPr>
+      <p:sp>
+        <p:nvSpPr>
+          <p:cNvPr id="2" name="Title 1">
+            <a:extLst>
+              <a:ext uri="{FF2B5EF4-FFF2-40B4-BE49-F238E27FC236}">
+                <a16:creationId xmlns:a16="http://schemas.microsoft.com/office/drawing/2014/main" id="{659C4DF3-8BBB-939D-E34A-30494696561A}"/>
+              </a:ext>
+            </a:extLst>
+          </p:cNvPr>
+          <p:cNvSpPr>
+            <a:spLocks noGrp="1"/>
+          </p:cNvSpPr>
+          <p:nvPr>
+            <p:ph type="title"/>
+          </p:nvPr>
+        </p:nvSpPr>
+        <p:spPr/>
+        <p:txBody>
+          <a:bodyPr/>
+          <a:lstStyle/>
+          <a:p>
+            <a:endParaRPr lang="en-IN"/>
+          </a:p>
+        </p:txBody>
+      </p:sp>
+      <p:sp>
+        <p:nvSpPr>
+          <p:cNvPr id="3" name="Content Placeholder 2">
+            <a:extLst>
+              <a:ext uri="{FF2B5EF4-FFF2-40B4-BE49-F238E27FC236}">
+                <a16:creationId xmlns:a16="http://schemas.microsoft.com/office/drawing/2014/main" id="{6C87B64C-EB5B-8855-D993-EE715BCDD660}"/>
+              </a:ext>
+            </a:extLst>
+          </p:cNvPr>
+          <p:cNvSpPr>
+            <a:spLocks noGrp="1"/>
+          </p:cNvSpPr>
+          <p:nvPr>
+            <p:ph idx="1"/>
+          </p:nvPr>
+        </p:nvSpPr>
+        <p:spPr>
+          <a:xfrm>
+            <a:off x="1154954" y="2603499"/>
+            <a:ext cx="10497534" cy="3948885"/>
+          </a:xfrm>
+        </p:spPr>
+        <p:txBody>
+          <a:bodyPr/>
+          <a:lstStyle/>
+          <a:p>
+            <a:endParaRPr lang="en-IN" dirty="0"/>
+          </a:p>
+        </p:txBody>
+      </p:sp>
+    </p:spTree>
+    <p:extLst>
+      <p:ext uri="{BB962C8B-B14F-4D97-AF65-F5344CB8AC3E}">
+        <p14:creationId xmlns:p14="http://schemas.microsoft.com/office/powerpoint/2010/main" val="1686729797"/>
+      </p:ext>
+    </p:extLst>
+  </p:cSld>
+  <p:clrMapOvr>
+    <a:masterClrMapping/>
+  </p:clrMapOvr>
+</p:sld>
+</file>
+
+<file path=ppt/slides/slide53.xml><?xml version="1.0" encoding="utf-8"?>
+<p:sld xmlns:a="http://schemas.openxmlformats.org/drawingml/2006/main" xmlns:r="http://schemas.openxmlformats.org/officeDocument/2006/relationships" xmlns:p="http://schemas.openxmlformats.org/presentationml/2006/main">
+  <p:cSld>
+    <p:spTree>
+      <p:nvGrpSpPr>
+        <p:cNvPr id="1" name="">
+          <a:extLst>
+            <a:ext uri="{FF2B5EF4-FFF2-40B4-BE49-F238E27FC236}">
+              <a16:creationId xmlns:a16="http://schemas.microsoft.com/office/drawing/2014/main" id="{CAFCF2F1-D7BA-BDF0-D554-C4FF35236A83}"/>
+            </a:ext>
+          </a:extLst>
+        </p:cNvPr>
+        <p:cNvGrpSpPr/>
+        <p:nvPr/>
+      </p:nvGrpSpPr>
+      <p:grpSpPr>
+        <a:xfrm>
+          <a:off x="0" y="0"/>
+          <a:ext cx="0" cy="0"/>
+          <a:chOff x="0" y="0"/>
+          <a:chExt cx="0" cy="0"/>
+        </a:xfrm>
+      </p:grpSpPr>
+      <p:sp>
+        <p:nvSpPr>
+          <p:cNvPr id="2" name="Title 1">
+            <a:extLst>
+              <a:ext uri="{FF2B5EF4-FFF2-40B4-BE49-F238E27FC236}">
+                <a16:creationId xmlns:a16="http://schemas.microsoft.com/office/drawing/2014/main" id="{C2C02128-283E-4568-9881-9A77883C98A3}"/>
+              </a:ext>
+            </a:extLst>
+          </p:cNvPr>
+          <p:cNvSpPr>
+            <a:spLocks noGrp="1"/>
+          </p:cNvSpPr>
+          <p:nvPr>
+            <p:ph type="title"/>
+          </p:nvPr>
+        </p:nvSpPr>
+        <p:spPr/>
+        <p:txBody>
+          <a:bodyPr/>
+          <a:lstStyle/>
+          <a:p>
+            <a:endParaRPr lang="en-IN"/>
+          </a:p>
+        </p:txBody>
+      </p:sp>
+      <p:sp>
+        <p:nvSpPr>
+          <p:cNvPr id="3" name="Content Placeholder 2">
+            <a:extLst>
+              <a:ext uri="{FF2B5EF4-FFF2-40B4-BE49-F238E27FC236}">
+                <a16:creationId xmlns:a16="http://schemas.microsoft.com/office/drawing/2014/main" id="{44E53454-AFD8-A46F-45B7-D3CEF9DEACDE}"/>
+              </a:ext>
+            </a:extLst>
+          </p:cNvPr>
+          <p:cNvSpPr>
+            <a:spLocks noGrp="1"/>
+          </p:cNvSpPr>
+          <p:nvPr>
+            <p:ph idx="1"/>
+          </p:nvPr>
+        </p:nvSpPr>
+        <p:spPr>
+          <a:xfrm>
+            <a:off x="1154954" y="2603499"/>
+            <a:ext cx="10497534" cy="3948885"/>
+          </a:xfrm>
+        </p:spPr>
+        <p:txBody>
+          <a:bodyPr/>
+          <a:lstStyle/>
+          <a:p>
+            <a:endParaRPr lang="en-IN" dirty="0"/>
+          </a:p>
+        </p:txBody>
+      </p:sp>
+    </p:spTree>
+    <p:extLst>
+      <p:ext uri="{BB962C8B-B14F-4D97-AF65-F5344CB8AC3E}">
+        <p14:creationId xmlns:p14="http://schemas.microsoft.com/office/powerpoint/2010/main" val="3986293418"/>
+      </p:ext>
+    </p:extLst>
+  </p:cSld>
+  <p:clrMapOvr>
+    <a:masterClrMapping/>
+  </p:clrMapOvr>
+</p:sld>
+</file>
+
+<file path=ppt/slides/slide54.xml><?xml version="1.0" encoding="utf-8"?>
+<p:sld xmlns:a="http://schemas.openxmlformats.org/drawingml/2006/main" xmlns:r="http://schemas.openxmlformats.org/officeDocument/2006/relationships" xmlns:p="http://schemas.openxmlformats.org/presentationml/2006/main">
+  <p:cSld>
+    <p:spTree>
+      <p:nvGrpSpPr>
+        <p:cNvPr id="1" name="">
+          <a:extLst>
+            <a:ext uri="{FF2B5EF4-FFF2-40B4-BE49-F238E27FC236}">
               <a16:creationId xmlns:a16="http://schemas.microsoft.com/office/drawing/2014/main" id="{963FB19A-1A6C-348D-6F7B-356129BB9BA7}"/>
             </a:ext>
           </a:extLst>
@@ -18877,7 +21592,7 @@
 </p:sld>
 </file>
 
-<file path=ppt/slides/slide51.xml><?xml version="1.0" encoding="utf-8"?>
+<file path=ppt/slides/slide55.xml><?xml version="1.0" encoding="utf-8"?>
 <p:sld xmlns:a="http://schemas.openxmlformats.org/drawingml/2006/main" xmlns:r="http://schemas.openxmlformats.org/officeDocument/2006/relationships" xmlns:p="http://schemas.openxmlformats.org/presentationml/2006/main">
   <p:cSld>
     <p:spTree>
@@ -18968,7 +21683,7 @@
 </p:sld>
 </file>
 
-<file path=ppt/slides/slide52.xml><?xml version="1.0" encoding="utf-8"?>
+<file path=ppt/slides/slide56.xml><?xml version="1.0" encoding="utf-8"?>
 <p:sld xmlns:a="http://schemas.openxmlformats.org/drawingml/2006/main" xmlns:r="http://schemas.openxmlformats.org/officeDocument/2006/relationships" xmlns:p="http://schemas.openxmlformats.org/presentationml/2006/main">
   <p:cSld>
     <p:spTree>
